--- a/ppt/UdayKiranReddyDodda_X25166484_smart-port-container-terminal.pptx
+++ b/ppt/UdayKiranReddyDodda_X25166484_smart-port-container-terminal.pptx
@@ -1150,20 +1150,20 @@
         </p:nvSpPr>
         <p:spPr>
           <a:xfrm>
-            <a:off x="640080" y="914400"/>
-            <a:ext cx="10972800" cy="1280160"/>
-          </a:xfrm>
-          <a:prstGeom prst="rect">
-            <a:avLst/>
-          </a:prstGeom>
-          <a:noFill/>
-          <a:ln/>
-        </p:spPr>
-        <p:txBody>
-          <a:bodyPr wrap="square" rtlCol="0" anchor="t"/>
-          <a:lstStyle/>
-          <a:p>
-            <a:pPr algn="l" indent="0" marL="0">
+            <a:off x="548640" y="1051560"/>
+            <a:ext cx="11064240" cy="1188720"/>
+          </a:xfrm>
+          <a:prstGeom prst="rect">
+            <a:avLst/>
+          </a:prstGeom>
+          <a:noFill/>
+          <a:ln/>
+        </p:spPr>
+        <p:txBody>
+          <a:bodyPr wrap="square" rtlCol="0" anchor="ctr"/>
+          <a:lstStyle/>
+          <a:p>
+            <a:pPr algn="ctr" indent="0" marL="0">
               <a:buNone/>
             </a:pPr>
             <a:r>
@@ -1189,8 +1189,8 @@
         </p:nvSpPr>
         <p:spPr>
           <a:xfrm>
-            <a:off x="658368" y="2148840"/>
-            <a:ext cx="10972800" cy="365760"/>
+            <a:off x="548640" y="2286000"/>
+            <a:ext cx="11064240" cy="365760"/>
           </a:xfrm>
           <a:prstGeom prst="rect">
             <a:avLst/>
@@ -1202,7 +1202,7 @@
           <a:bodyPr wrap="square" rtlCol="0" anchor="ctr"/>
           <a:lstStyle/>
           <a:p>
-            <a:pPr indent="0" marL="0">
+            <a:pPr algn="ctr" indent="0" marL="0">
               <a:buNone/>
             </a:pPr>
             <a:r>
@@ -1228,8 +1228,8 @@
         </p:nvSpPr>
         <p:spPr>
           <a:xfrm>
-            <a:off x="658368" y="2697480"/>
-            <a:ext cx="10424160" cy="1371600"/>
+            <a:off x="1463040" y="2926080"/>
+            <a:ext cx="9235440" cy="1371600"/>
           </a:xfrm>
           <a:prstGeom prst="rect">
             <a:avLst/>
@@ -1241,7 +1241,7 @@
           <a:bodyPr wrap="square" rtlCol="0" anchor="ctr"/>
           <a:lstStyle/>
           <a:p>
-            <a:pPr indent="0" marL="0">
+            <a:pPr algn="ctr" indent="0" marL="0">
               <a:lnSpc>
                 <a:spcPct val="110000"/>
               </a:lnSpc>
@@ -1270,7 +1270,7 @@
         </p:nvSpPr>
         <p:spPr>
           <a:xfrm>
-            <a:off x="658368" y="4206240"/>
+            <a:off x="1889608" y="4526280"/>
             <a:ext cx="2651760" cy="566928"/>
           </a:xfrm>
           <a:prstGeom prst="roundRect">
@@ -1297,7 +1297,7 @@
         </p:nvSpPr>
         <p:spPr>
           <a:xfrm>
-            <a:off x="658368" y="4206240"/>
+            <a:off x="1889608" y="4526280"/>
             <a:ext cx="2651760" cy="566928"/>
           </a:xfrm>
           <a:prstGeom prst="rect">
@@ -1314,7 +1314,7 @@
               <a:buNone/>
             </a:pPr>
             <a:r>
-              <a:rPr lang="en-US" sz="1400" b="1" dirty="0">
+              <a:rPr lang="en-US" sz="1350" b="1" dirty="0">
                 <a:solidFill>
                   <a:srgbClr val="E4A63C"/>
                 </a:solidFill>
@@ -1324,7 +1324,7 @@
               </a:rPr>
               <a:t>Wind &gt; 34 kn halts lifts</a:t>
             </a:r>
-            <a:endParaRPr lang="en-US" sz="1400" dirty="0"/>
+            <a:endParaRPr lang="en-US" sz="1350" dirty="0"/>
           </a:p>
         </p:txBody>
       </p:sp>
@@ -1336,7 +1336,7 @@
         </p:nvSpPr>
         <p:spPr>
           <a:xfrm>
-            <a:off x="3538728" y="4206240"/>
+            <a:off x="4769968" y="4526280"/>
             <a:ext cx="2651760" cy="566928"/>
           </a:xfrm>
           <a:prstGeom prst="roundRect">
@@ -1363,7 +1363,7 @@
         </p:nvSpPr>
         <p:spPr>
           <a:xfrm>
-            <a:off x="3538728" y="4206240"/>
+            <a:off x="4769968" y="4526280"/>
             <a:ext cx="2651760" cy="566928"/>
           </a:xfrm>
           <a:prstGeom prst="rect">
@@ -1380,7 +1380,7 @@
               <a:buNone/>
             </a:pPr>
             <a:r>
-              <a:rPr lang="en-US" sz="1400" b="1" dirty="0">
+              <a:rPr lang="en-US" sz="1350" b="1" dirty="0">
                 <a:solidFill>
                   <a:srgbClr val="E4A63C"/>
                 </a:solidFill>
@@ -1390,7 +1390,7 @@
               </a:rPr>
               <a:t>Crane load &gt; 32,000 kg</a:t>
             </a:r>
-            <a:endParaRPr lang="en-US" sz="1400" dirty="0"/>
+            <a:endParaRPr lang="en-US" sz="1350" dirty="0"/>
           </a:p>
         </p:txBody>
       </p:sp>
@@ -1402,7 +1402,7 @@
         </p:nvSpPr>
         <p:spPr>
           <a:xfrm>
-            <a:off x="6419088" y="4206240"/>
+            <a:off x="7650328" y="4526280"/>
             <a:ext cx="2651760" cy="566928"/>
           </a:xfrm>
           <a:prstGeom prst="roundRect">
@@ -1429,7 +1429,7 @@
         </p:nvSpPr>
         <p:spPr>
           <a:xfrm>
-            <a:off x="6419088" y="4206240"/>
+            <a:off x="7650328" y="4526280"/>
             <a:ext cx="2651760" cy="566928"/>
           </a:xfrm>
           <a:prstGeom prst="rect">
@@ -1446,7 +1446,7 @@
               <a:buNone/>
             </a:pPr>
             <a:r>
-              <a:rPr lang="en-US" sz="1400" b="1" dirty="0">
+              <a:rPr lang="en-US" sz="1350" b="1" dirty="0">
                 <a:solidFill>
                   <a:srgbClr val="E4A63C"/>
                 </a:solidFill>
@@ -1456,7 +1456,7 @@
               </a:rPr>
               <a:t>Reefer &gt; −10 °C</a:t>
             </a:r>
-            <a:endParaRPr lang="en-US" sz="1400" dirty="0"/>
+            <a:endParaRPr lang="en-US" sz="1350" dirty="0"/>
           </a:p>
         </p:txBody>
       </p:sp>
@@ -1468,8 +1468,8 @@
         </p:nvSpPr>
         <p:spPr>
           <a:xfrm>
-            <a:off x="658368" y="6126480"/>
-            <a:ext cx="10972800" cy="365760"/>
+            <a:off x="548640" y="6126480"/>
+            <a:ext cx="11064240" cy="365760"/>
           </a:xfrm>
           <a:prstGeom prst="rect">
             <a:avLst/>
@@ -1481,7 +1481,7 @@
           <a:bodyPr wrap="square" rtlCol="0" anchor="ctr"/>
           <a:lstStyle/>
           <a:p>
-            <a:pPr indent="0" marL="0">
+            <a:pPr algn="ctr" indent="0" marL="0">
               <a:buNone/>
             </a:pPr>
             <a:r>
@@ -1605,8 +1605,8 @@
         </p:nvSpPr>
         <p:spPr>
           <a:xfrm>
-            <a:off x="1325880" y="2670048"/>
-            <a:ext cx="201168" cy="201168"/>
+            <a:off x="1335024" y="2633472"/>
+            <a:ext cx="182880" cy="182880"/>
           </a:xfrm>
           <a:prstGeom prst="ellipse">
             <a:avLst/>
@@ -1625,8 +1625,8 @@
         </p:nvSpPr>
         <p:spPr>
           <a:xfrm>
-            <a:off x="594360" y="2926080"/>
-            <a:ext cx="1664208" cy="411480"/>
+            <a:off x="612648" y="2852928"/>
+            <a:ext cx="1627632" cy="365760"/>
           </a:xfrm>
           <a:prstGeom prst="rect">
             <a:avLst/>
@@ -1664,8 +1664,8 @@
         </p:nvSpPr>
         <p:spPr>
           <a:xfrm>
-            <a:off x="621792" y="3310128"/>
-            <a:ext cx="1609344" cy="457200"/>
+            <a:off x="640080" y="3200400"/>
+            <a:ext cx="1572768" cy="411480"/>
           </a:xfrm>
           <a:prstGeom prst="rect">
             <a:avLst/>
@@ -1754,8 +1754,8 @@
         </p:nvSpPr>
         <p:spPr>
           <a:xfrm>
-            <a:off x="3193633" y="2670048"/>
-            <a:ext cx="201168" cy="201168"/>
+            <a:off x="3202777" y="2633472"/>
+            <a:ext cx="182880" cy="182880"/>
           </a:xfrm>
           <a:prstGeom prst="ellipse">
             <a:avLst/>
@@ -1774,8 +1774,8 @@
         </p:nvSpPr>
         <p:spPr>
           <a:xfrm>
-            <a:off x="2462113" y="2926080"/>
-            <a:ext cx="1664208" cy="411480"/>
+            <a:off x="2480401" y="2852928"/>
+            <a:ext cx="1627632" cy="365760"/>
           </a:xfrm>
           <a:prstGeom prst="rect">
             <a:avLst/>
@@ -1813,8 +1813,8 @@
         </p:nvSpPr>
         <p:spPr>
           <a:xfrm>
-            <a:off x="2489545" y="3310128"/>
-            <a:ext cx="1609344" cy="457200"/>
+            <a:off x="2507833" y="3200400"/>
+            <a:ext cx="1572768" cy="411480"/>
           </a:xfrm>
           <a:prstGeom prst="rect">
             <a:avLst/>
@@ -1903,8 +1903,8 @@
         </p:nvSpPr>
         <p:spPr>
           <a:xfrm>
-            <a:off x="5061387" y="2670048"/>
-            <a:ext cx="201168" cy="201168"/>
+            <a:off x="5070531" y="2633472"/>
+            <a:ext cx="182880" cy="182880"/>
           </a:xfrm>
           <a:prstGeom prst="ellipse">
             <a:avLst/>
@@ -1923,8 +1923,8 @@
         </p:nvSpPr>
         <p:spPr>
           <a:xfrm>
-            <a:off x="4329867" y="2926080"/>
-            <a:ext cx="1664208" cy="411480"/>
+            <a:off x="4348155" y="2852928"/>
+            <a:ext cx="1627632" cy="365760"/>
           </a:xfrm>
           <a:prstGeom prst="rect">
             <a:avLst/>
@@ -1962,8 +1962,8 @@
         </p:nvSpPr>
         <p:spPr>
           <a:xfrm>
-            <a:off x="4357299" y="3310128"/>
-            <a:ext cx="1609344" cy="457200"/>
+            <a:off x="4375587" y="3200400"/>
+            <a:ext cx="1572768" cy="411480"/>
           </a:xfrm>
           <a:prstGeom prst="rect">
             <a:avLst/>
@@ -2052,8 +2052,8 @@
         </p:nvSpPr>
         <p:spPr>
           <a:xfrm>
-            <a:off x="6929140" y="2670048"/>
-            <a:ext cx="201168" cy="201168"/>
+            <a:off x="6938284" y="2633472"/>
+            <a:ext cx="182880" cy="182880"/>
           </a:xfrm>
           <a:prstGeom prst="ellipse">
             <a:avLst/>
@@ -2072,8 +2072,8 @@
         </p:nvSpPr>
         <p:spPr>
           <a:xfrm>
-            <a:off x="6197620" y="2926080"/>
-            <a:ext cx="1664208" cy="411480"/>
+            <a:off x="6215908" y="2852928"/>
+            <a:ext cx="1627632" cy="365760"/>
           </a:xfrm>
           <a:prstGeom prst="rect">
             <a:avLst/>
@@ -2111,8 +2111,8 @@
         </p:nvSpPr>
         <p:spPr>
           <a:xfrm>
-            <a:off x="6225052" y="3310128"/>
-            <a:ext cx="1609344" cy="457200"/>
+            <a:off x="6243340" y="3200400"/>
+            <a:ext cx="1572768" cy="411480"/>
           </a:xfrm>
           <a:prstGeom prst="rect">
             <a:avLst/>
@@ -2201,8 +2201,8 @@
         </p:nvSpPr>
         <p:spPr>
           <a:xfrm>
-            <a:off x="8796894" y="2670048"/>
-            <a:ext cx="201168" cy="201168"/>
+            <a:off x="8806038" y="2633472"/>
+            <a:ext cx="182880" cy="182880"/>
           </a:xfrm>
           <a:prstGeom prst="ellipse">
             <a:avLst/>
@@ -2221,8 +2221,8 @@
         </p:nvSpPr>
         <p:spPr>
           <a:xfrm>
-            <a:off x="8065374" y="2926080"/>
-            <a:ext cx="1664208" cy="411480"/>
+            <a:off x="8083662" y="2852928"/>
+            <a:ext cx="1627632" cy="365760"/>
           </a:xfrm>
           <a:prstGeom prst="rect">
             <a:avLst/>
@@ -2260,8 +2260,8 @@
         </p:nvSpPr>
         <p:spPr>
           <a:xfrm>
-            <a:off x="8092806" y="3310128"/>
-            <a:ext cx="1609344" cy="457200"/>
+            <a:off x="8111094" y="3200400"/>
+            <a:ext cx="1572768" cy="411480"/>
           </a:xfrm>
           <a:prstGeom prst="rect">
             <a:avLst/>
@@ -2350,8 +2350,8 @@
         </p:nvSpPr>
         <p:spPr>
           <a:xfrm>
-            <a:off x="10664647" y="2670048"/>
-            <a:ext cx="201168" cy="201168"/>
+            <a:off x="10673791" y="2633472"/>
+            <a:ext cx="182880" cy="182880"/>
           </a:xfrm>
           <a:prstGeom prst="ellipse">
             <a:avLst/>
@@ -2370,8 +2370,8 @@
         </p:nvSpPr>
         <p:spPr>
           <a:xfrm>
-            <a:off x="9933127" y="2926080"/>
-            <a:ext cx="1664208" cy="411480"/>
+            <a:off x="9951415" y="2852928"/>
+            <a:ext cx="1627632" cy="365760"/>
           </a:xfrm>
           <a:prstGeom prst="rect">
             <a:avLst/>
@@ -2409,8 +2409,8 @@
         </p:nvSpPr>
         <p:spPr>
           <a:xfrm>
-            <a:off x="9960559" y="3310128"/>
-            <a:ext cx="1609344" cy="457200"/>
+            <a:off x="9978847" y="3200400"/>
+            <a:ext cx="1572768" cy="411480"/>
           </a:xfrm>
           <a:prstGeom prst="rect">
             <a:avLst/>
@@ -2526,8 +2526,8 @@
         </p:nvSpPr>
         <p:spPr>
           <a:xfrm>
-            <a:off x="640080" y="5212080"/>
-            <a:ext cx="10972800" cy="640080"/>
+            <a:off x="640080" y="5257800"/>
+            <a:ext cx="10972800" cy="731520"/>
           </a:xfrm>
           <a:prstGeom prst="rect">
             <a:avLst/>
@@ -2759,7 +2759,7 @@
                 <a:ea typeface="Calibri" pitchFamily="34" charset="-122"/>
                 <a:cs typeface="Calibri" pitchFamily="34" charset="-120"/>
               </a:rPr>
-              <a:t>Pipeline health, all green</a:t>
+              <a:t>Two berths, five quayside signals</a:t>
             </a:r>
             <a:endParaRPr lang="en-US" sz="1800" dirty="0"/>
           </a:p>
@@ -2798,7 +2798,7 @@
                 <a:ea typeface="Calibri" pitchFamily="34" charset="-122"/>
                 <a:cs typeface="Calibri" pitchFamily="34" charset="-120"/>
               </a:rPr>
-              <a:t>Four of four checks green on the real AWS account, freshest data only seconds old.</a:t>
+              <a:t>Crane load, container stacks, wind, occupancy and reefer temperature live for both berths.</a:t>
             </a:r>
             <a:endParaRPr lang="en-US" sz="1350" dirty="0"/>
           </a:p>
@@ -2896,7 +2896,7 @@
                 <a:ea typeface="Calibri" pitchFamily="34" charset="-122"/>
                 <a:cs typeface="Calibri" pitchFamily="34" charset="-120"/>
               </a:rPr>
-              <a:t>Two berths, live</a:t>
+              <a:t>Crane, wind and cold-chain alerts</a:t>
             </a:r>
             <a:endParaRPr lang="en-US" sz="1800" dirty="0"/>
           </a:p>
@@ -2935,7 +2935,7 @@
                 <a:ea typeface="Calibri" pitchFamily="34" charset="-122"/>
                 <a:cs typeface="Calibri" pitchFamily="34" charset="-120"/>
               </a:rPr>
-              <a:t>Crane, wind and cold-chain alerts across two berths, every alert tracing to a real code-defined threshold.</a:t>
+              <a:t>A gust over the 34-knot limit halts crane lifts, an overloaded lift and a warm reefer each raise their own alert on the window.</a:t>
             </a:r>
             <a:endParaRPr lang="en-US" sz="1350" dirty="0"/>
           </a:p>
@@ -3033,7 +3033,7 @@
                 <a:ea typeface="Calibri" pitchFamily="34" charset="-122"/>
                 <a:cs typeface="Calibri" pitchFamily="34" charset="-120"/>
               </a:rPr>
-              <a:t>Tested and scales</a:t>
+              <a:t>Every alert traces to a real rule</a:t>
             </a:r>
             <a:endParaRPr lang="en-US" sz="1800" dirty="0"/>
           </a:p>
@@ -3072,7 +3072,7 @@
                 <a:ea typeface="Calibri" pitchFamily="34" charset="-122"/>
                 <a:cs typeface="Calibri" pitchFamily="34" charset="-120"/>
               </a:rPr>
-              <a:t>95 automated tests pass across the sensor, fog, processor and dashboard modules; a 2,000-message burst drains fully.</a:t>
+              <a:t>Each banner maps to a code-defined threshold — 34 knots, 32,000 kg, -10 C, 90% occupancy — not a demo constant.</a:t>
             </a:r>
             <a:endParaRPr lang="en-US" sz="1350" dirty="0"/>
           </a:p>
@@ -3157,24 +3157,24 @@
         </p:nvSpPr>
         <p:spPr>
           <a:xfrm>
-            <a:off x="640080" y="640080"/>
-            <a:ext cx="10972800" cy="640080"/>
-          </a:xfrm>
-          <a:prstGeom prst="rect">
-            <a:avLst/>
-          </a:prstGeom>
-          <a:noFill/>
-          <a:ln/>
-        </p:spPr>
-        <p:txBody>
-          <a:bodyPr wrap="square" rtlCol="0" anchor="ctr"/>
+            <a:off x="640080" y="594360"/>
+            <a:ext cx="10972800" cy="822960"/>
+          </a:xfrm>
+          <a:prstGeom prst="rect">
+            <a:avLst/>
+          </a:prstGeom>
+          <a:noFill/>
+          <a:ln/>
+        </p:spPr>
+        <p:txBody>
+          <a:bodyPr wrap="square" rtlCol="0" anchor="t"/>
           <a:lstStyle/>
           <a:p>
             <a:pPr indent="0" marL="0">
               <a:buNone/>
             </a:pPr>
             <a:r>
-              <a:rPr lang="en-US" sz="3000" b="1" dirty="0">
+              <a:rPr lang="en-US" sz="2800" b="1" dirty="0">
                 <a:solidFill>
                   <a:srgbClr val="FFFFFF"/>
                 </a:solidFill>
@@ -3184,30 +3184,65 @@
               </a:rPr>
               <a:t>Hardest Part — a numbered-ticket window boundary</a:t>
             </a:r>
-            <a:endParaRPr lang="en-US" sz="3000" dirty="0"/>
-          </a:p>
-        </p:txBody>
-      </p:sp>
-      <p:sp>
-        <p:nvSpPr>
-          <p:cNvPr id="3" name="Shape 1"/>
-          <p:cNvSpPr/>
-          <p:nvPr/>
-        </p:nvSpPr>
-        <p:spPr>
-          <a:xfrm>
-            <a:off x="731520" y="1920240"/>
-            <a:ext cx="10698480" cy="1965960"/>
-          </a:xfrm>
-          <a:prstGeom prst="roundRect">
-            <a:avLst>
-              <a:gd name="adj" fmla="val 4651"/>
-            </a:avLst>
-          </a:prstGeom>
-          <a:solidFill>
-            <a:srgbClr val="184556"/>
-          </a:solidFill>
-          <a:ln w="15875">
+            <a:endParaRPr lang="en-US" sz="2800" dirty="0"/>
+          </a:p>
+        </p:txBody>
+      </p:sp>
+      <p:sp>
+        <p:nvSpPr>
+          <p:cNvPr id="3" name="Text 1"/>
+          <p:cNvSpPr/>
+          <p:nvPr/>
+        </p:nvSpPr>
+        <p:spPr>
+          <a:xfrm>
+            <a:off x="731520" y="1965960"/>
+            <a:ext cx="2377440" cy="548640"/>
+          </a:xfrm>
+          <a:prstGeom prst="rect">
+            <a:avLst/>
+          </a:prstGeom>
+          <a:noFill/>
+          <a:ln/>
+        </p:spPr>
+        <p:txBody>
+          <a:bodyPr wrap="square" lIns="0" tIns="0" rIns="0" bIns="0" rtlCol="0" anchor="ctr"/>
+          <a:lstStyle/>
+          <a:p>
+            <a:pPr indent="0" marL="0">
+              <a:buNone/>
+            </a:pPr>
+            <a:r>
+              <a:rPr lang="en-US" sz="2200" b="1" dirty="0">
+                <a:solidFill>
+                  <a:srgbClr val="E4A63C"/>
+                </a:solidFill>
+                <a:latin typeface="Cambria" pitchFamily="34" charset="0"/>
+                <a:ea typeface="Cambria" pitchFamily="34" charset="-122"/>
+                <a:cs typeface="Cambria" pitchFamily="34" charset="-120"/>
+              </a:rPr>
+              <a:t>Problem</a:t>
+            </a:r>
+            <a:endParaRPr lang="en-US" sz="2200" dirty="0"/>
+          </a:p>
+        </p:txBody>
+      </p:sp>
+      <p:sp>
+        <p:nvSpPr>
+          <p:cNvPr id="4" name="Shape 2"/>
+          <p:cNvSpPr/>
+          <p:nvPr/>
+        </p:nvSpPr>
+        <p:spPr>
+          <a:xfrm>
+            <a:off x="3200400" y="1920240"/>
+            <a:ext cx="0" cy="1737360"/>
+          </a:xfrm>
+          <a:prstGeom prst="line">
+            <a:avLst/>
+          </a:prstGeom>
+          <a:noFill/>
+          <a:ln w="25400">
             <a:solidFill>
               <a:srgbClr val="E4A63C"/>
             </a:solidFill>
@@ -3217,14 +3252,14 @@
       </p:sp>
       <p:sp>
         <p:nvSpPr>
-          <p:cNvPr id="4" name="Text 2"/>
-          <p:cNvSpPr/>
-          <p:nvPr/>
-        </p:nvSpPr>
-        <p:spPr>
-          <a:xfrm>
-            <a:off x="1005840" y="2103120"/>
-            <a:ext cx="3657600" cy="457200"/>
+          <p:cNvPr id="5" name="Text 3"/>
+          <p:cNvSpPr/>
+          <p:nvPr/>
+        </p:nvSpPr>
+        <p:spPr>
+          <a:xfrm>
+            <a:off x="3474720" y="1920240"/>
+            <a:ext cx="7955280" cy="1874520"/>
           </a:xfrm>
           <a:prstGeom prst="rect">
             <a:avLst/>
@@ -3237,85 +3272,81 @@
           <a:lstStyle/>
           <a:p>
             <a:pPr indent="0" marL="0">
-              <a:buNone/>
-            </a:pPr>
-            <a:r>
-              <a:rPr lang="en-US" sz="1900" b="1" dirty="0">
-                <a:solidFill>
-                  <a:srgbClr val="E4A63C"/>
+              <a:lnSpc>
+                <a:spcPct val="110000"/>
+              </a:lnSpc>
+              <a:buNone/>
+            </a:pPr>
+            <a:r>
+              <a:rPr lang="en-US" sz="1450" dirty="0">
+                <a:solidFill>
+                  <a:srgbClr val="CFE2EC"/>
+                </a:solidFill>
+                <a:latin typeface="Calibri" pitchFamily="34" charset="0"/>
+                <a:ea typeface="Calibri" pitchFamily="34" charset="-122"/>
+                <a:cs typeface="Calibri" pitchFamily="34" charset="-120"/>
+              </a:rPr>
+              <a:t>Every ten seconds the fog node must close the current window and publish aggregates, while ten sensors keep posting new readings into the very same buffer. Lock the buffer and ingest stalls on every flush; clear it naively and any reading that lands mid-drain is lost, or counted twice in the next window.</a:t>
+            </a:r>
+            <a:endParaRPr lang="en-US" sz="1450" dirty="0"/>
+          </a:p>
+        </p:txBody>
+      </p:sp>
+      <p:sp>
+        <p:nvSpPr>
+          <p:cNvPr id="6" name="Text 4"/>
+          <p:cNvSpPr/>
+          <p:nvPr/>
+        </p:nvSpPr>
+        <p:spPr>
+          <a:xfrm>
+            <a:off x="731520" y="4114800"/>
+            <a:ext cx="2377440" cy="548640"/>
+          </a:xfrm>
+          <a:prstGeom prst="rect">
+            <a:avLst/>
+          </a:prstGeom>
+          <a:noFill/>
+          <a:ln/>
+        </p:spPr>
+        <p:txBody>
+          <a:bodyPr wrap="square" lIns="0" tIns="0" rIns="0" bIns="0" rtlCol="0" anchor="ctr"/>
+          <a:lstStyle/>
+          <a:p>
+            <a:pPr indent="0" marL="0">
+              <a:buNone/>
+            </a:pPr>
+            <a:r>
+              <a:rPr lang="en-US" sz="2200" b="1" dirty="0">
+                <a:solidFill>
+                  <a:srgbClr val="4F98B8"/>
                 </a:solidFill>
                 <a:latin typeface="Cambria" pitchFamily="34" charset="0"/>
                 <a:ea typeface="Cambria" pitchFamily="34" charset="-122"/>
                 <a:cs typeface="Cambria" pitchFamily="34" charset="-120"/>
               </a:rPr>
-              <a:t>Problem</a:t>
-            </a:r>
-            <a:endParaRPr lang="en-US" sz="1900" dirty="0"/>
-          </a:p>
-        </p:txBody>
-      </p:sp>
-      <p:sp>
-        <p:nvSpPr>
-          <p:cNvPr id="5" name="Text 3"/>
-          <p:cNvSpPr/>
-          <p:nvPr/>
-        </p:nvSpPr>
-        <p:spPr>
-          <a:xfrm>
-            <a:off x="1005840" y="2578608"/>
-            <a:ext cx="9966960" cy="1188720"/>
-          </a:xfrm>
-          <a:prstGeom prst="rect">
-            <a:avLst/>
-          </a:prstGeom>
-          <a:noFill/>
-          <a:ln/>
-        </p:spPr>
-        <p:txBody>
-          <a:bodyPr wrap="square" lIns="0" tIns="0" rIns="0" bIns="0" rtlCol="0" anchor="ctr"/>
-          <a:lstStyle/>
-          <a:p>
-            <a:pPr indent="0" marL="0">
-              <a:lnSpc>
-                <a:spcPct val="105000"/>
-              </a:lnSpc>
-              <a:buNone/>
-            </a:pPr>
-            <a:r>
-              <a:rPr lang="en-US" sz="1300" dirty="0">
-                <a:solidFill>
-                  <a:srgbClr val="CFE2EC"/>
-                </a:solidFill>
-                <a:latin typeface="Calibri" pitchFamily="34" charset="0"/>
-                <a:ea typeface="Calibri" pitchFamily="34" charset="-122"/>
-                <a:cs typeface="Calibri" pitchFamily="34" charset="-120"/>
-              </a:rPr>
-              <a:t>Every ten seconds the fog node must close the current window and publish aggregates, while ten sensors keep posting new readings into the very same buffer. Lock the buffer and ingest stalls on every flush; clear it naively and any reading that lands mid-drain is lost, or counted twice in the next window.</a:t>
-            </a:r>
-            <a:endParaRPr lang="en-US" sz="1300" dirty="0"/>
-          </a:p>
-        </p:txBody>
-      </p:sp>
-      <p:sp>
-        <p:nvSpPr>
-          <p:cNvPr id="6" name="Shape 4"/>
-          <p:cNvSpPr/>
-          <p:nvPr/>
-        </p:nvSpPr>
-        <p:spPr>
-          <a:xfrm>
-            <a:off x="731520" y="4041648"/>
-            <a:ext cx="10698480" cy="1965960"/>
-          </a:xfrm>
-          <a:prstGeom prst="roundRect">
-            <a:avLst>
-              <a:gd name="adj" fmla="val 4651"/>
-            </a:avLst>
-          </a:prstGeom>
-          <a:solidFill>
-            <a:srgbClr val="184556"/>
-          </a:solidFill>
-          <a:ln w="15875">
+              <a:t>Solution</a:t>
+            </a:r>
+            <a:endParaRPr lang="en-US" sz="2200" dirty="0"/>
+          </a:p>
+        </p:txBody>
+      </p:sp>
+      <p:sp>
+        <p:nvSpPr>
+          <p:cNvPr id="7" name="Shape 5"/>
+          <p:cNvSpPr/>
+          <p:nvPr/>
+        </p:nvSpPr>
+        <p:spPr>
+          <a:xfrm>
+            <a:off x="3200400" y="4069080"/>
+            <a:ext cx="0" cy="1737360"/>
+          </a:xfrm>
+          <a:prstGeom prst="line">
+            <a:avLst/>
+          </a:prstGeom>
+          <a:noFill/>
+          <a:ln w="25400">
             <a:solidFill>
               <a:srgbClr val="4F98B8"/>
             </a:solidFill>
@@ -3325,53 +3356,14 @@
       </p:sp>
       <p:sp>
         <p:nvSpPr>
-          <p:cNvPr id="7" name="Text 5"/>
-          <p:cNvSpPr/>
-          <p:nvPr/>
-        </p:nvSpPr>
-        <p:spPr>
-          <a:xfrm>
-            <a:off x="1005840" y="4224528"/>
-            <a:ext cx="3657600" cy="457200"/>
-          </a:xfrm>
-          <a:prstGeom prst="rect">
-            <a:avLst/>
-          </a:prstGeom>
-          <a:noFill/>
-          <a:ln/>
-        </p:spPr>
-        <p:txBody>
-          <a:bodyPr wrap="square" lIns="0" tIns="0" rIns="0" bIns="0" rtlCol="0" anchor="ctr"/>
-          <a:lstStyle/>
-          <a:p>
-            <a:pPr indent="0" marL="0">
-              <a:buNone/>
-            </a:pPr>
-            <a:r>
-              <a:rPr lang="en-US" sz="1900" b="1" dirty="0">
-                <a:solidFill>
-                  <a:srgbClr val="4F98B8"/>
-                </a:solidFill>
-                <a:latin typeface="Cambria" pitchFamily="34" charset="0"/>
-                <a:ea typeface="Cambria" pitchFamily="34" charset="-122"/>
-                <a:cs typeface="Cambria" pitchFamily="34" charset="-120"/>
-              </a:rPr>
-              <a:t>Solution</a:t>
-            </a:r>
-            <a:endParaRPr lang="en-US" sz="1900" dirty="0"/>
-          </a:p>
-        </p:txBody>
-      </p:sp>
-      <p:sp>
-        <p:nvSpPr>
           <p:cNvPr id="8" name="Text 6"/>
           <p:cNvSpPr/>
           <p:nvPr/>
         </p:nvSpPr>
         <p:spPr>
           <a:xfrm>
-            <a:off x="1005840" y="4700016"/>
-            <a:ext cx="9966960" cy="1188720"/>
+            <a:off x="3474720" y="4069080"/>
+            <a:ext cx="7955280" cy="1874520"/>
           </a:xfrm>
           <a:prstGeom prst="rect">
             <a:avLst/>
@@ -3385,12 +3377,12 @@
           <a:p>
             <a:pPr indent="0" marL="0">
               <a:lnSpc>
-                <a:spcPct val="105000"/>
+                <a:spcPct val="110000"/>
               </a:lnSpc>
               <a:buNone/>
             </a:pPr>
             <a:r>
-              <a:rPr lang="en-US" sz="1300" dirty="0">
+              <a:rPr lang="en-US" sz="1450" dirty="0">
                 <a:solidFill>
                   <a:srgbClr val="CFE2EC"/>
                 </a:solidFill>
@@ -3400,7 +3392,7 @@
               </a:rPr>
               <a:t>Every reading takes a numbered ticket on arrival. A flush snapshots the latest number as a boundary, then aggregates and removes only readings below it. Later arrivals roll into the next window — no locks, nothing lost, nothing counted twice. Backed by the fog module's 48 automated tests, including ingest exercised over a real HTTP server.</a:t>
             </a:r>
-            <a:endParaRPr lang="en-US" sz="1300" dirty="0"/>
+            <a:endParaRPr lang="en-US" sz="1450" dirty="0"/>
           </a:p>
         </p:txBody>
       </p:sp>

--- a/ppt/UdayKiranReddyDodda_X25166484_smart-port-container-terminal.pptx
+++ b/ppt/UdayKiranReddyDodda_X25166484_smart-port-container-terminal.pptx
@@ -3131,7 +3131,7 @@
     <p:bg>
       <p:bgPr>
         <a:solidFill>
-          <a:srgbClr val="102534"/>
+          <a:srgbClr val="FFFFFF"/>
         </a:solidFill>
       </p:bgPr>
     </p:bg>
@@ -3157,7 +3157,7 @@
         </p:nvSpPr>
         <p:spPr>
           <a:xfrm>
-            <a:off x="640080" y="594360"/>
+            <a:off x="640080" y="502920"/>
             <a:ext cx="10972800" cy="822960"/>
           </a:xfrm>
           <a:prstGeom prst="rect">
@@ -3176,7 +3176,7 @@
             <a:r>
               <a:rPr lang="en-US" sz="2800" b="1" dirty="0">
                 <a:solidFill>
-                  <a:srgbClr val="FFFFFF"/>
+                  <a:srgbClr val="112634"/>
                 </a:solidFill>
                 <a:latin typeface="Cambria" pitchFamily="34" charset="0"/>
                 <a:ea typeface="Cambria" pitchFamily="34" charset="-122"/>
@@ -3213,7 +3213,7 @@
               <a:buNone/>
             </a:pPr>
             <a:r>
-              <a:rPr lang="en-US" sz="2200" b="1" dirty="0">
+              <a:rPr lang="en-US" sz="2300" b="1" dirty="0">
                 <a:solidFill>
                   <a:srgbClr val="E4A63C"/>
                 </a:solidFill>
@@ -3223,7 +3223,7 @@
               </a:rPr>
               <a:t>Problem</a:t>
             </a:r>
-            <a:endParaRPr lang="en-US" sz="2200" dirty="0"/>
+            <a:endParaRPr lang="en-US" sz="2300" dirty="0"/>
           </a:p>
         </p:txBody>
       </p:sp>
@@ -3236,13 +3236,13 @@
         <p:spPr>
           <a:xfrm>
             <a:off x="3200400" y="1920240"/>
-            <a:ext cx="0" cy="1737360"/>
+            <a:ext cx="0" cy="1783080"/>
           </a:xfrm>
           <a:prstGeom prst="line">
             <a:avLst/>
           </a:prstGeom>
           <a:noFill/>
-          <a:ln w="25400">
+          <a:ln w="31750">
             <a:solidFill>
               <a:srgbClr val="E4A63C"/>
             </a:solidFill>
@@ -3259,7 +3259,7 @@
         <p:spPr>
           <a:xfrm>
             <a:off x="3474720" y="1920240"/>
-            <a:ext cx="7955280" cy="1874520"/>
+            <a:ext cx="7955280" cy="1920240"/>
           </a:xfrm>
           <a:prstGeom prst="rect">
             <a:avLst/>
@@ -3273,14 +3273,14 @@
           <a:p>
             <a:pPr indent="0" marL="0">
               <a:lnSpc>
-                <a:spcPct val="110000"/>
+                <a:spcPct val="112000"/>
               </a:lnSpc>
               <a:buNone/>
             </a:pPr>
             <a:r>
               <a:rPr lang="en-US" sz="1450" dirty="0">
                 <a:solidFill>
-                  <a:srgbClr val="CFE2EC"/>
+                  <a:srgbClr val="112634"/>
                 </a:solidFill>
                 <a:latin typeface="Calibri" pitchFamily="34" charset="0"/>
                 <a:ea typeface="Calibri" pitchFamily="34" charset="-122"/>
@@ -3317,9 +3317,9 @@
               <a:buNone/>
             </a:pPr>
             <a:r>
-              <a:rPr lang="en-US" sz="2200" b="1" dirty="0">
-                <a:solidFill>
-                  <a:srgbClr val="4F98B8"/>
+              <a:rPr lang="en-US" sz="2300" b="1" dirty="0">
+                <a:solidFill>
+                  <a:srgbClr val="1E739A"/>
                 </a:solidFill>
                 <a:latin typeface="Cambria" pitchFamily="34" charset="0"/>
                 <a:ea typeface="Cambria" pitchFamily="34" charset="-122"/>
@@ -3327,7 +3327,7 @@
               </a:rPr>
               <a:t>Solution</a:t>
             </a:r>
-            <a:endParaRPr lang="en-US" sz="2200" dirty="0"/>
+            <a:endParaRPr lang="en-US" sz="2300" dirty="0"/>
           </a:p>
         </p:txBody>
       </p:sp>
@@ -3340,15 +3340,15 @@
         <p:spPr>
           <a:xfrm>
             <a:off x="3200400" y="4069080"/>
-            <a:ext cx="0" cy="1737360"/>
+            <a:ext cx="0" cy="1783080"/>
           </a:xfrm>
           <a:prstGeom prst="line">
             <a:avLst/>
           </a:prstGeom>
           <a:noFill/>
-          <a:ln w="25400">
+          <a:ln w="31750">
             <a:solidFill>
-              <a:srgbClr val="4F98B8"/>
+              <a:srgbClr val="1E739A"/>
             </a:solidFill>
             <a:prstDash val="solid"/>
           </a:ln>
@@ -3363,7 +3363,7 @@
         <p:spPr>
           <a:xfrm>
             <a:off x="3474720" y="4069080"/>
-            <a:ext cx="7955280" cy="1874520"/>
+            <a:ext cx="7955280" cy="1920240"/>
           </a:xfrm>
           <a:prstGeom prst="rect">
             <a:avLst/>
@@ -3377,14 +3377,14 @@
           <a:p>
             <a:pPr indent="0" marL="0">
               <a:lnSpc>
-                <a:spcPct val="110000"/>
+                <a:spcPct val="112000"/>
               </a:lnSpc>
               <a:buNone/>
             </a:pPr>
             <a:r>
               <a:rPr lang="en-US" sz="1450" dirty="0">
                 <a:solidFill>
-                  <a:srgbClr val="CFE2EC"/>
+                  <a:srgbClr val="112634"/>
                 </a:solidFill>
                 <a:latin typeface="Calibri" pitchFamily="34" charset="0"/>
                 <a:ea typeface="Calibri" pitchFamily="34" charset="-122"/>

--- a/ppt/UdayKiranReddyDodda_X25166484_smart-port-container-terminal.pptx
+++ b/ppt/UdayKiranReddyDodda_X25166484_smart-port-container-terminal.pptx
@@ -1144,26 +1144,46 @@
       </p:grpSpPr>
       <p:sp>
         <p:nvSpPr>
-          <p:cNvPr id="2" name="Text 0"/>
-          <p:cNvSpPr/>
-          <p:nvPr/>
-        </p:nvSpPr>
-        <p:spPr>
-          <a:xfrm>
-            <a:off x="548640" y="1051560"/>
-            <a:ext cx="11064240" cy="1188720"/>
-          </a:xfrm>
-          <a:prstGeom prst="rect">
-            <a:avLst/>
-          </a:prstGeom>
-          <a:noFill/>
-          <a:ln/>
-        </p:spPr>
-        <p:txBody>
-          <a:bodyPr wrap="square" rtlCol="0" anchor="ctr"/>
-          <a:lstStyle/>
-          <a:p>
-            <a:pPr algn="ctr" indent="0" marL="0">
+          <p:cNvPr id="2" name="Shape 0"/>
+          <p:cNvSpPr/>
+          <p:nvPr/>
+        </p:nvSpPr>
+        <p:spPr>
+          <a:xfrm>
+            <a:off x="7528255" y="0"/>
+            <a:ext cx="4663440" cy="6858000"/>
+          </a:xfrm>
+          <a:prstGeom prst="rect">
+            <a:avLst/>
+          </a:prstGeom>
+          <a:solidFill>
+            <a:srgbClr val="124C6E"/>
+          </a:solidFill>
+          <a:ln/>
+        </p:spPr>
+      </p:sp>
+      <p:sp>
+        <p:nvSpPr>
+          <p:cNvPr id="3" name="Text 1"/>
+          <p:cNvSpPr/>
+          <p:nvPr/>
+        </p:nvSpPr>
+        <p:spPr>
+          <a:xfrm>
+            <a:off x="7939735" y="1280160"/>
+            <a:ext cx="3749040" cy="2377440"/>
+          </a:xfrm>
+          <a:prstGeom prst="rect">
+            <a:avLst/>
+          </a:prstGeom>
+          <a:noFill/>
+          <a:ln/>
+        </p:spPr>
+        <p:txBody>
+          <a:bodyPr wrap="square" rtlCol="0" anchor="t"/>
+          <a:lstStyle/>
+          <a:p>
+            <a:pPr indent="0" marL="0">
               <a:buNone/>
             </a:pPr>
             <a:r>
@@ -1183,14 +1203,14 @@
       </p:sp>
       <p:sp>
         <p:nvSpPr>
-          <p:cNvPr id="3" name="Text 1"/>
-          <p:cNvSpPr/>
-          <p:nvPr/>
-        </p:nvSpPr>
-        <p:spPr>
-          <a:xfrm>
-            <a:off x="548640" y="2286000"/>
-            <a:ext cx="11064240" cy="365760"/>
+          <p:cNvPr id="4" name="Text 2"/>
+          <p:cNvSpPr/>
+          <p:nvPr/>
+        </p:nvSpPr>
+        <p:spPr>
+          <a:xfrm>
+            <a:off x="7958023" y="5394960"/>
+            <a:ext cx="3840480" cy="731520"/>
           </a:xfrm>
           <a:prstGeom prst="rect">
             <a:avLst/>
@@ -1202,13 +1222,13 @@
           <a:bodyPr wrap="square" rtlCol="0" anchor="ctr"/>
           <a:lstStyle/>
           <a:p>
-            <a:pPr algn="ctr" indent="0" marL="0">
-              <a:buNone/>
-            </a:pPr>
-            <a:r>
-              <a:rPr lang="en-US" sz="1600" dirty="0">
-                <a:solidFill>
-                  <a:srgbClr val="4F98B8"/>
+            <a:pPr indent="0" marL="0">
+              <a:buNone/>
+            </a:pPr>
+            <a:r>
+              <a:rPr lang="en-US" sz="1500" dirty="0">
+                <a:solidFill>
+                  <a:srgbClr val="CFE2EC"/>
                 </a:solidFill>
                 <a:latin typeface="Calibri" pitchFamily="34" charset="0"/>
                 <a:ea typeface="Calibri" pitchFamily="34" charset="-122"/>
@@ -1216,20 +1236,20 @@
               </a:rPr>
               <a:t>Uday Kiran Reddy Dodda   ·   X25166484</a:t>
             </a:r>
-            <a:endParaRPr lang="en-US" sz="1600" dirty="0"/>
-          </a:p>
-        </p:txBody>
-      </p:sp>
-      <p:sp>
-        <p:nvSpPr>
-          <p:cNvPr id="4" name="Text 2"/>
-          <p:cNvSpPr/>
-          <p:nvPr/>
-        </p:nvSpPr>
-        <p:spPr>
-          <a:xfrm>
-            <a:off x="1463040" y="2926080"/>
-            <a:ext cx="9235440" cy="1371600"/>
+            <a:endParaRPr lang="en-US" sz="1500" dirty="0"/>
+          </a:p>
+        </p:txBody>
+      </p:sp>
+      <p:sp>
+        <p:nvSpPr>
+          <p:cNvPr id="5" name="Text 3"/>
+          <p:cNvSpPr/>
+          <p:nvPr/>
+        </p:nvSpPr>
+        <p:spPr>
+          <a:xfrm>
+            <a:off x="548640" y="1371600"/>
+            <a:ext cx="6492240" cy="2011680"/>
           </a:xfrm>
           <a:prstGeom prst="rect">
             <a:avLst/>
@@ -1241,9 +1261,9 @@
           <a:bodyPr wrap="square" rtlCol="0" anchor="ctr"/>
           <a:lstStyle/>
           <a:p>
-            <a:pPr algn="ctr" indent="0" marL="0">
+            <a:pPr indent="0" marL="0">
               <a:lnSpc>
-                <a:spcPct val="110000"/>
+                <a:spcPct val="112000"/>
               </a:lnSpc>
               <a:buNone/>
             </a:pPr>
@@ -1264,14 +1284,14 @@
       </p:sp>
       <p:sp>
         <p:nvSpPr>
-          <p:cNvPr id="5" name="Shape 3"/>
-          <p:cNvSpPr/>
-          <p:nvPr/>
-        </p:nvSpPr>
-        <p:spPr>
-          <a:xfrm>
-            <a:off x="1889608" y="4526280"/>
-            <a:ext cx="2651760" cy="566928"/>
+          <p:cNvPr id="6" name="Shape 4"/>
+          <p:cNvSpPr/>
+          <p:nvPr/>
+        </p:nvSpPr>
+        <p:spPr>
+          <a:xfrm>
+            <a:off x="548640" y="4023360"/>
+            <a:ext cx="2926080" cy="566928"/>
           </a:xfrm>
           <a:prstGeom prst="roundRect">
             <a:avLst>
@@ -1291,14 +1311,14 @@
       </p:sp>
       <p:sp>
         <p:nvSpPr>
-          <p:cNvPr id="6" name="Text 4"/>
-          <p:cNvSpPr/>
-          <p:nvPr/>
-        </p:nvSpPr>
-        <p:spPr>
-          <a:xfrm>
-            <a:off x="1889608" y="4526280"/>
-            <a:ext cx="2651760" cy="566928"/>
+          <p:cNvPr id="7" name="Text 5"/>
+          <p:cNvSpPr/>
+          <p:nvPr/>
+        </p:nvSpPr>
+        <p:spPr>
+          <a:xfrm>
+            <a:off x="548640" y="4023360"/>
+            <a:ext cx="2926080" cy="566928"/>
           </a:xfrm>
           <a:prstGeom prst="rect">
             <a:avLst/>
@@ -1330,14 +1350,14 @@
       </p:sp>
       <p:sp>
         <p:nvSpPr>
-          <p:cNvPr id="7" name="Shape 5"/>
-          <p:cNvSpPr/>
-          <p:nvPr/>
-        </p:nvSpPr>
-        <p:spPr>
-          <a:xfrm>
-            <a:off x="4769968" y="4526280"/>
-            <a:ext cx="2651760" cy="566928"/>
+          <p:cNvPr id="8" name="Shape 6"/>
+          <p:cNvSpPr/>
+          <p:nvPr/>
+        </p:nvSpPr>
+        <p:spPr>
+          <a:xfrm>
+            <a:off x="548640" y="4709160"/>
+            <a:ext cx="2926080" cy="566928"/>
           </a:xfrm>
           <a:prstGeom prst="roundRect">
             <a:avLst>
@@ -1357,14 +1377,14 @@
       </p:sp>
       <p:sp>
         <p:nvSpPr>
-          <p:cNvPr id="8" name="Text 6"/>
-          <p:cNvSpPr/>
-          <p:nvPr/>
-        </p:nvSpPr>
-        <p:spPr>
-          <a:xfrm>
-            <a:off x="4769968" y="4526280"/>
-            <a:ext cx="2651760" cy="566928"/>
+          <p:cNvPr id="9" name="Text 7"/>
+          <p:cNvSpPr/>
+          <p:nvPr/>
+        </p:nvSpPr>
+        <p:spPr>
+          <a:xfrm>
+            <a:off x="548640" y="4709160"/>
+            <a:ext cx="2926080" cy="566928"/>
           </a:xfrm>
           <a:prstGeom prst="rect">
             <a:avLst/>
@@ -1396,14 +1416,14 @@
       </p:sp>
       <p:sp>
         <p:nvSpPr>
-          <p:cNvPr id="9" name="Shape 7"/>
-          <p:cNvSpPr/>
-          <p:nvPr/>
-        </p:nvSpPr>
-        <p:spPr>
-          <a:xfrm>
-            <a:off x="7650328" y="4526280"/>
-            <a:ext cx="2651760" cy="566928"/>
+          <p:cNvPr id="10" name="Shape 8"/>
+          <p:cNvSpPr/>
+          <p:nvPr/>
+        </p:nvSpPr>
+        <p:spPr>
+          <a:xfrm>
+            <a:off x="548640" y="5394960"/>
+            <a:ext cx="2926080" cy="566928"/>
           </a:xfrm>
           <a:prstGeom prst="roundRect">
             <a:avLst>
@@ -1423,14 +1443,14 @@
       </p:sp>
       <p:sp>
         <p:nvSpPr>
-          <p:cNvPr id="10" name="Text 8"/>
-          <p:cNvSpPr/>
-          <p:nvPr/>
-        </p:nvSpPr>
-        <p:spPr>
-          <a:xfrm>
-            <a:off x="7650328" y="4526280"/>
-            <a:ext cx="2651760" cy="566928"/>
+          <p:cNvPr id="11" name="Text 9"/>
+          <p:cNvSpPr/>
+          <p:nvPr/>
+        </p:nvSpPr>
+        <p:spPr>
+          <a:xfrm>
+            <a:off x="548640" y="5394960"/>
+            <a:ext cx="2926080" cy="566928"/>
           </a:xfrm>
           <a:prstGeom prst="rect">
             <a:avLst/>
@@ -1462,14 +1482,14 @@
       </p:sp>
       <p:sp>
         <p:nvSpPr>
-          <p:cNvPr id="11" name="Text 9"/>
-          <p:cNvSpPr/>
-          <p:nvPr/>
-        </p:nvSpPr>
-        <p:spPr>
-          <a:xfrm>
-            <a:off x="548640" y="6126480"/>
-            <a:ext cx="11064240" cy="365760"/>
+          <p:cNvPr id="12" name="Text 10"/>
+          <p:cNvSpPr/>
+          <p:nvPr/>
+        </p:nvSpPr>
+        <p:spPr>
+          <a:xfrm>
+            <a:off x="548640" y="6172200"/>
+            <a:ext cx="6217920" cy="365760"/>
           </a:xfrm>
           <a:prstGeom prst="rect">
             <a:avLst/>
@@ -1481,11 +1501,11 @@
           <a:bodyPr wrap="square" rtlCol="0" anchor="ctr"/>
           <a:lstStyle/>
           <a:p>
-            <a:pPr algn="ctr" indent="0" marL="0">
-              <a:buNone/>
-            </a:pPr>
-            <a:r>
-              <a:rPr lang="en-US" sz="1300" dirty="0">
+            <a:pPr indent="0" marL="0">
+              <a:buNone/>
+            </a:pPr>
+            <a:r>
+              <a:rPr lang="en-US" sz="1250" dirty="0">
                 <a:solidFill>
                   <a:srgbClr val="567480"/>
                 </a:solidFill>
@@ -1495,7 +1515,7 @@
               </a:rPr>
               <a:t>Fog &amp; Edge Computing (H9FECC)   ·   deployed live on AWS</a:t>
             </a:r>
-            <a:endParaRPr lang="en-US" sz="1300" dirty="0"/>
+            <a:endParaRPr lang="en-US" sz="1250" dirty="0"/>
           </a:p>
         </p:txBody>
       </p:sp>
@@ -1578,18 +1598,18 @@
         </p:nvSpPr>
         <p:spPr>
           <a:xfrm>
-            <a:off x="640080" y="2468880"/>
-            <a:ext cx="1572768" cy="1371600"/>
+            <a:off x="3992728" y="1234440"/>
+            <a:ext cx="4206240" cy="658368"/>
           </a:xfrm>
           <a:prstGeom prst="roundRect">
             <a:avLst>
-              <a:gd name="adj" fmla="val 6667"/>
+              <a:gd name="adj" fmla="val 11111"/>
             </a:avLst>
           </a:prstGeom>
           <a:solidFill>
             <a:srgbClr val="EDF4F8"/>
           </a:solidFill>
-          <a:ln w="19050">
+          <a:ln w="17780">
             <a:solidFill>
               <a:srgbClr val="4F98B8"/>
             </a:solidFill>
@@ -1605,8 +1625,8 @@
         </p:nvSpPr>
         <p:spPr>
           <a:xfrm>
-            <a:off x="1335024" y="2633472"/>
-            <a:ext cx="182880" cy="182880"/>
+            <a:off x="4193896" y="1481328"/>
+            <a:ext cx="164592" cy="164592"/>
           </a:xfrm>
           <a:prstGeom prst="ellipse">
             <a:avLst/>
@@ -1625,8 +1645,8 @@
         </p:nvSpPr>
         <p:spPr>
           <a:xfrm>
-            <a:off x="612648" y="2852928"/>
-            <a:ext cx="1627632" cy="365760"/>
+            <a:off x="4495648" y="1234440"/>
+            <a:ext cx="2194560" cy="658368"/>
           </a:xfrm>
           <a:prstGeom prst="rect">
             <a:avLst/>
@@ -1638,11 +1658,11 @@
           <a:bodyPr wrap="square" lIns="0" tIns="0" rIns="0" bIns="0" rtlCol="0" anchor="ctr"/>
           <a:lstStyle/>
           <a:p>
-            <a:pPr algn="ctr" indent="0" marL="0">
-              <a:buNone/>
-            </a:pPr>
-            <a:r>
-              <a:rPr lang="en-US" sz="1450" b="1" dirty="0">
+            <a:pPr indent="0" marL="0">
+              <a:buNone/>
+            </a:pPr>
+            <a:r>
+              <a:rPr lang="en-US" sz="1350" b="1" dirty="0">
                 <a:solidFill>
                   <a:srgbClr val="112634"/>
                 </a:solidFill>
@@ -1652,7 +1672,7 @@
               </a:rPr>
               <a:t>Berth sensors</a:t>
             </a:r>
-            <a:endParaRPr lang="en-US" sz="1450" dirty="0"/>
+            <a:endParaRPr lang="en-US" sz="1350" dirty="0"/>
           </a:p>
         </p:txBody>
       </p:sp>
@@ -1664,24 +1684,24 @@
         </p:nvSpPr>
         <p:spPr>
           <a:xfrm>
-            <a:off x="640080" y="3200400"/>
-            <a:ext cx="1572768" cy="411480"/>
-          </a:xfrm>
-          <a:prstGeom prst="rect">
-            <a:avLst/>
-          </a:prstGeom>
-          <a:noFill/>
-          <a:ln/>
-        </p:spPr>
-        <p:txBody>
-          <a:bodyPr wrap="square" lIns="0" tIns="0" rIns="0" bIns="0" rtlCol="0" anchor="t"/>
-          <a:lstStyle/>
-          <a:p>
-            <a:pPr algn="ctr" indent="0" marL="0">
-              <a:buNone/>
-            </a:pPr>
-            <a:r>
-              <a:rPr lang="en-US" sz="1050" dirty="0">
+            <a:off x="6644488" y="1234440"/>
+            <a:ext cx="1463040" cy="658368"/>
+          </a:xfrm>
+          <a:prstGeom prst="rect">
+            <a:avLst/>
+          </a:prstGeom>
+          <a:noFill/>
+          <a:ln/>
+        </p:spPr>
+        <p:txBody>
+          <a:bodyPr wrap="square" lIns="0" tIns="0" rIns="0" bIns="0" rtlCol="0" anchor="ctr"/>
+          <a:lstStyle/>
+          <a:p>
+            <a:pPr algn="r" indent="0" marL="0">
+              <a:buNone/>
+            </a:pPr>
+            <a:r>
+              <a:rPr lang="en-US" sz="950" dirty="0">
                 <a:solidFill>
                   <a:srgbClr val="567480"/>
                 </a:solidFill>
@@ -1691,7 +1711,7 @@
               </a:rPr>
               <a:t>10 · 2 berths</a:t>
             </a:r>
-            <a:endParaRPr lang="en-US" sz="1050" dirty="0"/>
+            <a:endParaRPr lang="en-US" sz="950" dirty="0"/>
           </a:p>
         </p:txBody>
       </p:sp>
@@ -1703,8 +1723,8 @@
         </p:nvSpPr>
         <p:spPr>
           <a:xfrm>
-            <a:off x="2231136" y="3154680"/>
-            <a:ext cx="258409" cy="0"/>
+            <a:off x="6095848" y="1892808"/>
+            <a:ext cx="0" cy="219456"/>
           </a:xfrm>
           <a:prstGeom prst="line">
             <a:avLst/>
@@ -1727,18 +1747,18 @@
         </p:nvSpPr>
         <p:spPr>
           <a:xfrm>
-            <a:off x="2507833" y="2468880"/>
-            <a:ext cx="1572768" cy="1371600"/>
+            <a:off x="3992728" y="2112264"/>
+            <a:ext cx="4206240" cy="658368"/>
           </a:xfrm>
           <a:prstGeom prst="roundRect">
             <a:avLst>
-              <a:gd name="adj" fmla="val 6667"/>
+              <a:gd name="adj" fmla="val 11111"/>
             </a:avLst>
           </a:prstGeom>
           <a:solidFill>
             <a:srgbClr val="EDF4F8"/>
           </a:solidFill>
-          <a:ln w="19050">
+          <a:ln w="17780">
             <a:solidFill>
               <a:srgbClr val="4F98B8"/>
             </a:solidFill>
@@ -1754,8 +1774,8 @@
         </p:nvSpPr>
         <p:spPr>
           <a:xfrm>
-            <a:off x="3202777" y="2633472"/>
-            <a:ext cx="182880" cy="182880"/>
+            <a:off x="4193896" y="2359152"/>
+            <a:ext cx="164592" cy="164592"/>
           </a:xfrm>
           <a:prstGeom prst="ellipse">
             <a:avLst/>
@@ -1774,8 +1794,8 @@
         </p:nvSpPr>
         <p:spPr>
           <a:xfrm>
-            <a:off x="2480401" y="2852928"/>
-            <a:ext cx="1627632" cy="365760"/>
+            <a:off x="4495648" y="2112264"/>
+            <a:ext cx="2194560" cy="658368"/>
           </a:xfrm>
           <a:prstGeom prst="rect">
             <a:avLst/>
@@ -1787,11 +1807,11 @@
           <a:bodyPr wrap="square" lIns="0" tIns="0" rIns="0" bIns="0" rtlCol="0" anchor="ctr"/>
           <a:lstStyle/>
           <a:p>
-            <a:pPr algn="ctr" indent="0" marL="0">
-              <a:buNone/>
-            </a:pPr>
-            <a:r>
-              <a:rPr lang="en-US" sz="1450" b="1" dirty="0">
+            <a:pPr indent="0" marL="0">
+              <a:buNone/>
+            </a:pPr>
+            <a:r>
+              <a:rPr lang="en-US" sz="1350" b="1" dirty="0">
                 <a:solidFill>
                   <a:srgbClr val="112634"/>
                 </a:solidFill>
@@ -1801,7 +1821,7 @@
               </a:rPr>
               <a:t>Fog node</a:t>
             </a:r>
-            <a:endParaRPr lang="en-US" sz="1450" dirty="0"/>
+            <a:endParaRPr lang="en-US" sz="1350" dirty="0"/>
           </a:p>
         </p:txBody>
       </p:sp>
@@ -1813,24 +1833,24 @@
         </p:nvSpPr>
         <p:spPr>
           <a:xfrm>
-            <a:off x="2507833" y="3200400"/>
-            <a:ext cx="1572768" cy="411480"/>
-          </a:xfrm>
-          <a:prstGeom prst="rect">
-            <a:avLst/>
-          </a:prstGeom>
-          <a:noFill/>
-          <a:ln/>
-        </p:spPr>
-        <p:txBody>
-          <a:bodyPr wrap="square" lIns="0" tIns="0" rIns="0" bIns="0" rtlCol="0" anchor="t"/>
-          <a:lstStyle/>
-          <a:p>
-            <a:pPr algn="ctr" indent="0" marL="0">
-              <a:buNone/>
-            </a:pPr>
-            <a:r>
-              <a:rPr lang="en-US" sz="1050" dirty="0">
+            <a:off x="6644488" y="2112264"/>
+            <a:ext cx="1463040" cy="658368"/>
+          </a:xfrm>
+          <a:prstGeom prst="rect">
+            <a:avLst/>
+          </a:prstGeom>
+          <a:noFill/>
+          <a:ln/>
+        </p:spPr>
+        <p:txBody>
+          <a:bodyPr wrap="square" lIns="0" tIns="0" rIns="0" bIns="0" rtlCol="0" anchor="ctr"/>
+          <a:lstStyle/>
+          <a:p>
+            <a:pPr algn="r" indent="0" marL="0">
+              <a:buNone/>
+            </a:pPr>
+            <a:r>
+              <a:rPr lang="en-US" sz="950" dirty="0">
                 <a:solidFill>
                   <a:srgbClr val="567480"/>
                 </a:solidFill>
@@ -1840,7 +1860,7 @@
               </a:rPr>
               <a:t>windows · safety rules</a:t>
             </a:r>
-            <a:endParaRPr lang="en-US" sz="1050" dirty="0"/>
+            <a:endParaRPr lang="en-US" sz="950" dirty="0"/>
           </a:p>
         </p:txBody>
       </p:sp>
@@ -1852,8 +1872,8 @@
         </p:nvSpPr>
         <p:spPr>
           <a:xfrm>
-            <a:off x="4098889" y="3154680"/>
-            <a:ext cx="258409" cy="0"/>
+            <a:off x="6095848" y="2770632"/>
+            <a:ext cx="0" cy="219456"/>
           </a:xfrm>
           <a:prstGeom prst="line">
             <a:avLst/>
@@ -1876,18 +1896,18 @@
         </p:nvSpPr>
         <p:spPr>
           <a:xfrm>
-            <a:off x="4375587" y="2468880"/>
-            <a:ext cx="1572768" cy="1371600"/>
+            <a:off x="3992728" y="2990088"/>
+            <a:ext cx="4206240" cy="658368"/>
           </a:xfrm>
           <a:prstGeom prst="roundRect">
             <a:avLst>
-              <a:gd name="adj" fmla="val 6667"/>
+              <a:gd name="adj" fmla="val 11111"/>
             </a:avLst>
           </a:prstGeom>
           <a:solidFill>
             <a:srgbClr val="EDF4F8"/>
           </a:solidFill>
-          <a:ln w="19050">
+          <a:ln w="17780">
             <a:solidFill>
               <a:srgbClr val="124C6E"/>
             </a:solidFill>
@@ -1903,8 +1923,8 @@
         </p:nvSpPr>
         <p:spPr>
           <a:xfrm>
-            <a:off x="5070531" y="2633472"/>
-            <a:ext cx="182880" cy="182880"/>
+            <a:off x="4193896" y="3236976"/>
+            <a:ext cx="164592" cy="164592"/>
           </a:xfrm>
           <a:prstGeom prst="ellipse">
             <a:avLst/>
@@ -1923,8 +1943,8 @@
         </p:nvSpPr>
         <p:spPr>
           <a:xfrm>
-            <a:off x="4348155" y="2852928"/>
-            <a:ext cx="1627632" cy="365760"/>
+            <a:off x="4495648" y="2990088"/>
+            <a:ext cx="2194560" cy="658368"/>
           </a:xfrm>
           <a:prstGeom prst="rect">
             <a:avLst/>
@@ -1936,11 +1956,11 @@
           <a:bodyPr wrap="square" lIns="0" tIns="0" rIns="0" bIns="0" rtlCol="0" anchor="ctr"/>
           <a:lstStyle/>
           <a:p>
-            <a:pPr algn="ctr" indent="0" marL="0">
-              <a:buNone/>
-            </a:pPr>
-            <a:r>
-              <a:rPr lang="en-US" sz="1450" b="1" dirty="0">
+            <a:pPr indent="0" marL="0">
+              <a:buNone/>
+            </a:pPr>
+            <a:r>
+              <a:rPr lang="en-US" sz="1350" b="1" dirty="0">
                 <a:solidFill>
                   <a:srgbClr val="112634"/>
                 </a:solidFill>
@@ -1950,7 +1970,7 @@
               </a:rPr>
               <a:t>Amazon SQS</a:t>
             </a:r>
-            <a:endParaRPr lang="en-US" sz="1450" dirty="0"/>
+            <a:endParaRPr lang="en-US" sz="1350" dirty="0"/>
           </a:p>
         </p:txBody>
       </p:sp>
@@ -1962,24 +1982,24 @@
         </p:nvSpPr>
         <p:spPr>
           <a:xfrm>
-            <a:off x="4375587" y="3200400"/>
-            <a:ext cx="1572768" cy="411480"/>
-          </a:xfrm>
-          <a:prstGeom prst="rect">
-            <a:avLst/>
-          </a:prstGeom>
-          <a:noFill/>
-          <a:ln/>
-        </p:spPr>
-        <p:txBody>
-          <a:bodyPr wrap="square" lIns="0" tIns="0" rIns="0" bIns="0" rtlCol="0" anchor="t"/>
-          <a:lstStyle/>
-          <a:p>
-            <a:pPr algn="ctr" indent="0" marL="0">
-              <a:buNone/>
-            </a:pPr>
-            <a:r>
-              <a:rPr lang="en-US" sz="1050" dirty="0">
+            <a:off x="6644488" y="2990088"/>
+            <a:ext cx="1463040" cy="658368"/>
+          </a:xfrm>
+          <a:prstGeom prst="rect">
+            <a:avLst/>
+          </a:prstGeom>
+          <a:noFill/>
+          <a:ln/>
+        </p:spPr>
+        <p:txBody>
+          <a:bodyPr wrap="square" lIns="0" tIns="0" rIns="0" bIns="0" rtlCol="0" anchor="ctr"/>
+          <a:lstStyle/>
+          <a:p>
+            <a:pPr algn="r" indent="0" marL="0">
+              <a:buNone/>
+            </a:pPr>
+            <a:r>
+              <a:rPr lang="en-US" sz="950" dirty="0">
                 <a:solidFill>
                   <a:srgbClr val="567480"/>
                 </a:solidFill>
@@ -1989,7 +2009,7 @@
               </a:rPr>
               <a:t>1 batched msg / cycle</a:t>
             </a:r>
-            <a:endParaRPr lang="en-US" sz="1050" dirty="0"/>
+            <a:endParaRPr lang="en-US" sz="950" dirty="0"/>
           </a:p>
         </p:txBody>
       </p:sp>
@@ -2001,8 +2021,8 @@
         </p:nvSpPr>
         <p:spPr>
           <a:xfrm>
-            <a:off x="5966643" y="3154680"/>
-            <a:ext cx="258409" cy="0"/>
+            <a:off x="6095848" y="3648456"/>
+            <a:ext cx="0" cy="219456"/>
           </a:xfrm>
           <a:prstGeom prst="line">
             <a:avLst/>
@@ -2025,18 +2045,18 @@
         </p:nvSpPr>
         <p:spPr>
           <a:xfrm>
-            <a:off x="6243340" y="2468880"/>
-            <a:ext cx="1572768" cy="1371600"/>
+            <a:off x="3992728" y="3867912"/>
+            <a:ext cx="4206240" cy="658368"/>
           </a:xfrm>
           <a:prstGeom prst="roundRect">
             <a:avLst>
-              <a:gd name="adj" fmla="val 6667"/>
+              <a:gd name="adj" fmla="val 11111"/>
             </a:avLst>
           </a:prstGeom>
           <a:solidFill>
             <a:srgbClr val="EDF4F8"/>
           </a:solidFill>
-          <a:ln w="19050">
+          <a:ln w="17780">
             <a:solidFill>
               <a:srgbClr val="124C6E"/>
             </a:solidFill>
@@ -2052,8 +2072,8 @@
         </p:nvSpPr>
         <p:spPr>
           <a:xfrm>
-            <a:off x="6938284" y="2633472"/>
-            <a:ext cx="182880" cy="182880"/>
+            <a:off x="4193896" y="4114800"/>
+            <a:ext cx="164592" cy="164592"/>
           </a:xfrm>
           <a:prstGeom prst="ellipse">
             <a:avLst/>
@@ -2072,8 +2092,8 @@
         </p:nvSpPr>
         <p:spPr>
           <a:xfrm>
-            <a:off x="6215908" y="2852928"/>
-            <a:ext cx="1627632" cy="365760"/>
+            <a:off x="4495648" y="3867912"/>
+            <a:ext cx="2194560" cy="658368"/>
           </a:xfrm>
           <a:prstGeom prst="rect">
             <a:avLst/>
@@ -2085,11 +2105,11 @@
           <a:bodyPr wrap="square" lIns="0" tIns="0" rIns="0" bIns="0" rtlCol="0" anchor="ctr"/>
           <a:lstStyle/>
           <a:p>
-            <a:pPr algn="ctr" indent="0" marL="0">
-              <a:buNone/>
-            </a:pPr>
-            <a:r>
-              <a:rPr lang="en-US" sz="1450" b="1" dirty="0">
+            <a:pPr indent="0" marL="0">
+              <a:buNone/>
+            </a:pPr>
+            <a:r>
+              <a:rPr lang="en-US" sz="1350" b="1" dirty="0">
                 <a:solidFill>
                   <a:srgbClr val="112634"/>
                 </a:solidFill>
@@ -2099,7 +2119,7 @@
               </a:rPr>
               <a:t>AWS Lambda</a:t>
             </a:r>
-            <a:endParaRPr lang="en-US" sz="1450" dirty="0"/>
+            <a:endParaRPr lang="en-US" sz="1350" dirty="0"/>
           </a:p>
         </p:txBody>
       </p:sp>
@@ -2111,24 +2131,24 @@
         </p:nvSpPr>
         <p:spPr>
           <a:xfrm>
-            <a:off x="6243340" y="3200400"/>
-            <a:ext cx="1572768" cy="411480"/>
-          </a:xfrm>
-          <a:prstGeom prst="rect">
-            <a:avLst/>
-          </a:prstGeom>
-          <a:noFill/>
-          <a:ln/>
-        </p:spPr>
-        <p:txBody>
-          <a:bodyPr wrap="square" lIns="0" tIns="0" rIns="0" bIns="0" rtlCol="0" anchor="t"/>
-          <a:lstStyle/>
-          <a:p>
-            <a:pPr algn="ctr" indent="0" marL="0">
-              <a:buNone/>
-            </a:pPr>
-            <a:r>
-              <a:rPr lang="en-US" sz="1050" dirty="0">
+            <a:off x="6644488" y="3867912"/>
+            <a:ext cx="1463040" cy="658368"/>
+          </a:xfrm>
+          <a:prstGeom prst="rect">
+            <a:avLst/>
+          </a:prstGeom>
+          <a:noFill/>
+          <a:ln/>
+        </p:spPr>
+        <p:txBody>
+          <a:bodyPr wrap="square" lIns="0" tIns="0" rIns="0" bIns="0" rtlCol="0" anchor="ctr"/>
+          <a:lstStyle/>
+          <a:p>
+            <a:pPr algn="r" indent="0" marL="0">
+              <a:buNone/>
+            </a:pPr>
+            <a:r>
+              <a:rPr lang="en-US" sz="950" dirty="0">
                 <a:solidFill>
                   <a:srgbClr val="567480"/>
                 </a:solidFill>
@@ -2138,7 +2158,7 @@
               </a:rPr>
               <a:t>java17 ingest</a:t>
             </a:r>
-            <a:endParaRPr lang="en-US" sz="1050" dirty="0"/>
+            <a:endParaRPr lang="en-US" sz="950" dirty="0"/>
           </a:p>
         </p:txBody>
       </p:sp>
@@ -2150,8 +2170,8 @@
         </p:nvSpPr>
         <p:spPr>
           <a:xfrm>
-            <a:off x="7834396" y="3154680"/>
-            <a:ext cx="258409" cy="0"/>
+            <a:off x="6095848" y="4526280"/>
+            <a:ext cx="0" cy="219456"/>
           </a:xfrm>
           <a:prstGeom prst="line">
             <a:avLst/>
@@ -2174,18 +2194,18 @@
         </p:nvSpPr>
         <p:spPr>
           <a:xfrm>
-            <a:off x="8111094" y="2468880"/>
-            <a:ext cx="1572768" cy="1371600"/>
+            <a:off x="3992728" y="4745736"/>
+            <a:ext cx="4206240" cy="658368"/>
           </a:xfrm>
           <a:prstGeom prst="roundRect">
             <a:avLst>
-              <a:gd name="adj" fmla="val 6667"/>
+              <a:gd name="adj" fmla="val 11111"/>
             </a:avLst>
           </a:prstGeom>
           <a:solidFill>
             <a:srgbClr val="EDF4F8"/>
           </a:solidFill>
-          <a:ln w="19050">
+          <a:ln w="17780">
             <a:solidFill>
               <a:srgbClr val="124C6E"/>
             </a:solidFill>
@@ -2201,8 +2221,8 @@
         </p:nvSpPr>
         <p:spPr>
           <a:xfrm>
-            <a:off x="8806038" y="2633472"/>
-            <a:ext cx="182880" cy="182880"/>
+            <a:off x="4193896" y="4992624"/>
+            <a:ext cx="164592" cy="164592"/>
           </a:xfrm>
           <a:prstGeom prst="ellipse">
             <a:avLst/>
@@ -2221,8 +2241,8 @@
         </p:nvSpPr>
         <p:spPr>
           <a:xfrm>
-            <a:off x="8083662" y="2852928"/>
-            <a:ext cx="1627632" cy="365760"/>
+            <a:off x="4495648" y="4745736"/>
+            <a:ext cx="2194560" cy="658368"/>
           </a:xfrm>
           <a:prstGeom prst="rect">
             <a:avLst/>
@@ -2234,11 +2254,11 @@
           <a:bodyPr wrap="square" lIns="0" tIns="0" rIns="0" bIns="0" rtlCol="0" anchor="ctr"/>
           <a:lstStyle/>
           <a:p>
-            <a:pPr algn="ctr" indent="0" marL="0">
-              <a:buNone/>
-            </a:pPr>
-            <a:r>
-              <a:rPr lang="en-US" sz="1450" b="1" dirty="0">
+            <a:pPr indent="0" marL="0">
+              <a:buNone/>
+            </a:pPr>
+            <a:r>
+              <a:rPr lang="en-US" sz="1350" b="1" dirty="0">
                 <a:solidFill>
                   <a:srgbClr val="112634"/>
                 </a:solidFill>
@@ -2248,7 +2268,7 @@
               </a:rPr>
               <a:t>DynamoDB</a:t>
             </a:r>
-            <a:endParaRPr lang="en-US" sz="1450" dirty="0"/>
+            <a:endParaRPr lang="en-US" sz="1350" dirty="0"/>
           </a:p>
         </p:txBody>
       </p:sp>
@@ -2260,24 +2280,24 @@
         </p:nvSpPr>
         <p:spPr>
           <a:xfrm>
-            <a:off x="8111094" y="3200400"/>
-            <a:ext cx="1572768" cy="411480"/>
-          </a:xfrm>
-          <a:prstGeom prst="rect">
-            <a:avLst/>
-          </a:prstGeom>
-          <a:noFill/>
-          <a:ln/>
-        </p:spPr>
-        <p:txBody>
-          <a:bodyPr wrap="square" lIns="0" tIns="0" rIns="0" bIns="0" rtlCol="0" anchor="t"/>
-          <a:lstStyle/>
-          <a:p>
-            <a:pPr algn="ctr" indent="0" marL="0">
-              <a:buNone/>
-            </a:pPr>
-            <a:r>
-              <a:rPr lang="en-US" sz="1050" dirty="0">
+            <a:off x="6644488" y="4745736"/>
+            <a:ext cx="1463040" cy="658368"/>
+          </a:xfrm>
+          <a:prstGeom prst="rect">
+            <a:avLst/>
+          </a:prstGeom>
+          <a:noFill/>
+          <a:ln/>
+        </p:spPr>
+        <p:txBody>
+          <a:bodyPr wrap="square" lIns="0" tIns="0" rIns="0" bIns="0" rtlCol="0" anchor="ctr"/>
+          <a:lstStyle/>
+          <a:p>
+            <a:pPr algn="r" indent="0" marL="0">
+              <a:buNone/>
+            </a:pPr>
+            <a:r>
+              <a:rPr lang="en-US" sz="950" dirty="0">
                 <a:solidFill>
                   <a:srgbClr val="567480"/>
                 </a:solidFill>
@@ -2287,7 +2307,7 @@
               </a:rPr>
               <a:t>time-ordered store</a:t>
             </a:r>
-            <a:endParaRPr lang="en-US" sz="1050" dirty="0"/>
+            <a:endParaRPr lang="en-US" sz="950" dirty="0"/>
           </a:p>
         </p:txBody>
       </p:sp>
@@ -2299,8 +2319,8 @@
         </p:nvSpPr>
         <p:spPr>
           <a:xfrm>
-            <a:off x="9702150" y="3154680"/>
-            <a:ext cx="258409" cy="0"/>
+            <a:off x="6095848" y="5404104"/>
+            <a:ext cx="0" cy="219456"/>
           </a:xfrm>
           <a:prstGeom prst="line">
             <a:avLst/>
@@ -2323,18 +2343,18 @@
         </p:nvSpPr>
         <p:spPr>
           <a:xfrm>
-            <a:off x="9978847" y="2468880"/>
-            <a:ext cx="1572768" cy="1371600"/>
+            <a:off x="3992728" y="5623560"/>
+            <a:ext cx="4206240" cy="658368"/>
           </a:xfrm>
           <a:prstGeom prst="roundRect">
             <a:avLst>
-              <a:gd name="adj" fmla="val 6667"/>
+              <a:gd name="adj" fmla="val 11111"/>
             </a:avLst>
           </a:prstGeom>
           <a:solidFill>
             <a:srgbClr val="EDF4F8"/>
           </a:solidFill>
-          <a:ln w="19050">
+          <a:ln w="17780">
             <a:solidFill>
               <a:srgbClr val="1E739A"/>
             </a:solidFill>
@@ -2350,8 +2370,8 @@
         </p:nvSpPr>
         <p:spPr>
           <a:xfrm>
-            <a:off x="10673791" y="2633472"/>
-            <a:ext cx="182880" cy="182880"/>
+            <a:off x="4193896" y="5870448"/>
+            <a:ext cx="164592" cy="164592"/>
           </a:xfrm>
           <a:prstGeom prst="ellipse">
             <a:avLst/>
@@ -2370,8 +2390,8 @@
         </p:nvSpPr>
         <p:spPr>
           <a:xfrm>
-            <a:off x="9951415" y="2852928"/>
-            <a:ext cx="1627632" cy="365760"/>
+            <a:off x="4495648" y="5623560"/>
+            <a:ext cx="2194560" cy="658368"/>
           </a:xfrm>
           <a:prstGeom prst="rect">
             <a:avLst/>
@@ -2383,11 +2403,11 @@
           <a:bodyPr wrap="square" lIns="0" tIns="0" rIns="0" bIns="0" rtlCol="0" anchor="ctr"/>
           <a:lstStyle/>
           <a:p>
-            <a:pPr algn="ctr" indent="0" marL="0">
-              <a:buNone/>
-            </a:pPr>
-            <a:r>
-              <a:rPr lang="en-US" sz="1450" b="1" dirty="0">
+            <a:pPr indent="0" marL="0">
+              <a:buNone/>
+            </a:pPr>
+            <a:r>
+              <a:rPr lang="en-US" sz="1350" b="1" dirty="0">
                 <a:solidFill>
                   <a:srgbClr val="112634"/>
                 </a:solidFill>
@@ -2397,7 +2417,7 @@
               </a:rPr>
               <a:t>API GW + S3</a:t>
             </a:r>
-            <a:endParaRPr lang="en-US" sz="1450" dirty="0"/>
+            <a:endParaRPr lang="en-US" sz="1350" dirty="0"/>
           </a:p>
         </p:txBody>
       </p:sp>
@@ -2409,24 +2429,24 @@
         </p:nvSpPr>
         <p:spPr>
           <a:xfrm>
-            <a:off x="9978847" y="3200400"/>
-            <a:ext cx="1572768" cy="411480"/>
-          </a:xfrm>
-          <a:prstGeom prst="rect">
-            <a:avLst/>
-          </a:prstGeom>
-          <a:noFill/>
-          <a:ln/>
-        </p:spPr>
-        <p:txBody>
-          <a:bodyPr wrap="square" lIns="0" tIns="0" rIns="0" bIns="0" rtlCol="0" anchor="t"/>
-          <a:lstStyle/>
-          <a:p>
-            <a:pPr algn="ctr" indent="0" marL="0">
-              <a:buNone/>
-            </a:pPr>
-            <a:r>
-              <a:rPr lang="en-US" sz="1050" dirty="0">
+            <a:off x="6644488" y="5623560"/>
+            <a:ext cx="1463040" cy="658368"/>
+          </a:xfrm>
+          <a:prstGeom prst="rect">
+            <a:avLst/>
+          </a:prstGeom>
+          <a:noFill/>
+          <a:ln/>
+        </p:spPr>
+        <p:txBody>
+          <a:bodyPr wrap="square" lIns="0" tIns="0" rIns="0" bIns="0" rtlCol="0" anchor="ctr"/>
+          <a:lstStyle/>
+          <a:p>
+            <a:pPr algn="r" indent="0" marL="0">
+              <a:buNone/>
+            </a:pPr>
+            <a:r>
+              <a:rPr lang="en-US" sz="950" dirty="0">
                 <a:solidFill>
                   <a:srgbClr val="567480"/>
                 </a:solidFill>
@@ -2436,7 +2456,7 @@
               </a:rPr>
               <a:t>live view</a:t>
             </a:r>
-            <a:endParaRPr lang="en-US" sz="1050" dirty="0"/>
+            <a:endParaRPr lang="en-US" sz="950" dirty="0"/>
           </a:p>
         </p:txBody>
       </p:sp>
@@ -2448,8 +2468,8 @@
         </p:nvSpPr>
         <p:spPr>
           <a:xfrm>
-            <a:off x="640080" y="3977640"/>
-            <a:ext cx="3440521" cy="274320"/>
+            <a:off x="2438248" y="1234440"/>
+            <a:ext cx="1371600" cy="365760"/>
           </a:xfrm>
           <a:prstGeom prst="rect">
             <a:avLst/>
@@ -2461,7 +2481,7 @@
           <a:bodyPr wrap="square" rtlCol="0" anchor="ctr"/>
           <a:lstStyle/>
           <a:p>
-            <a:pPr algn="ctr" indent="0" marL="0">
+            <a:pPr algn="r" indent="0" marL="0">
               <a:buNone/>
             </a:pPr>
             <a:r>
@@ -2487,8 +2507,8 @@
         </p:nvSpPr>
         <p:spPr>
           <a:xfrm>
-            <a:off x="4375587" y="3977640"/>
-            <a:ext cx="7176028" cy="274320"/>
+            <a:off x="2438248" y="2990088"/>
+            <a:ext cx="1371600" cy="365760"/>
           </a:xfrm>
           <a:prstGeom prst="rect">
             <a:avLst/>
@@ -2500,7 +2520,7 @@
           <a:bodyPr wrap="square" rtlCol="0" anchor="ctr"/>
           <a:lstStyle/>
           <a:p>
-            <a:pPr algn="ctr" indent="0" marL="0">
+            <a:pPr algn="r" indent="0" marL="0">
               <a:buNone/>
             </a:pPr>
             <a:r>
@@ -2526,8 +2546,8 @@
         </p:nvSpPr>
         <p:spPr>
           <a:xfrm>
-            <a:off x="640080" y="5257800"/>
-            <a:ext cx="10972800" cy="731520"/>
+            <a:off x="8656168" y="2743200"/>
+            <a:ext cx="3291840" cy="2194560"/>
           </a:xfrm>
           <a:prstGeom prst="rect">
             <a:avLst/>
@@ -2539,7 +2559,7 @@
           <a:bodyPr wrap="square" rtlCol="0" anchor="ctr"/>
           <a:lstStyle/>
           <a:p>
-            <a:pPr algn="ctr" indent="0" marL="0">
+            <a:pPr indent="0" marL="0">
               <a:buNone/>
             </a:pPr>
             <a:r>
@@ -3190,59 +3210,24 @@
       </p:sp>
       <p:sp>
         <p:nvSpPr>
-          <p:cNvPr id="3" name="Text 1"/>
-          <p:cNvSpPr/>
-          <p:nvPr/>
-        </p:nvSpPr>
-        <p:spPr>
-          <a:xfrm>
-            <a:off x="731520" y="1965960"/>
-            <a:ext cx="2377440" cy="548640"/>
-          </a:xfrm>
-          <a:prstGeom prst="rect">
-            <a:avLst/>
-          </a:prstGeom>
-          <a:noFill/>
-          <a:ln/>
-        </p:spPr>
-        <p:txBody>
-          <a:bodyPr wrap="square" lIns="0" tIns="0" rIns="0" bIns="0" rtlCol="0" anchor="ctr"/>
-          <a:lstStyle/>
-          <a:p>
-            <a:pPr indent="0" marL="0">
-              <a:buNone/>
-            </a:pPr>
-            <a:r>
-              <a:rPr lang="en-US" sz="2300" b="1" dirty="0">
-                <a:solidFill>
-                  <a:srgbClr val="E4A63C"/>
-                </a:solidFill>
-                <a:latin typeface="Cambria" pitchFamily="34" charset="0"/>
-                <a:ea typeface="Cambria" pitchFamily="34" charset="-122"/>
-                <a:cs typeface="Cambria" pitchFamily="34" charset="-120"/>
-              </a:rPr>
-              <a:t>Problem</a:t>
-            </a:r>
-            <a:endParaRPr lang="en-US" sz="2300" dirty="0"/>
-          </a:p>
-        </p:txBody>
-      </p:sp>
-      <p:sp>
-        <p:nvSpPr>
-          <p:cNvPr id="4" name="Shape 2"/>
-          <p:cNvSpPr/>
-          <p:nvPr/>
-        </p:nvSpPr>
-        <p:spPr>
-          <a:xfrm>
-            <a:off x="3200400" y="1920240"/>
-            <a:ext cx="0" cy="1783080"/>
-          </a:xfrm>
-          <a:prstGeom prst="line">
-            <a:avLst/>
-          </a:prstGeom>
-          <a:noFill/>
-          <a:ln w="31750">
+          <p:cNvPr id="3" name="Shape 1"/>
+          <p:cNvSpPr/>
+          <p:nvPr/>
+        </p:nvSpPr>
+        <p:spPr>
+          <a:xfrm>
+            <a:off x="640080" y="1874520"/>
+            <a:ext cx="4937760" cy="4160520"/>
+          </a:xfrm>
+          <a:prstGeom prst="roundRect">
+            <a:avLst>
+              <a:gd name="adj" fmla="val 2198"/>
+            </a:avLst>
+          </a:prstGeom>
+          <a:solidFill>
+            <a:srgbClr val="EDF4F8"/>
+          </a:solidFill>
+          <a:ln w="19050">
             <a:solidFill>
               <a:srgbClr val="E4A63C"/>
             </a:solidFill>
@@ -3252,14 +3237,53 @@
       </p:sp>
       <p:sp>
         <p:nvSpPr>
+          <p:cNvPr id="4" name="Text 2"/>
+          <p:cNvSpPr/>
+          <p:nvPr/>
+        </p:nvSpPr>
+        <p:spPr>
+          <a:xfrm>
+            <a:off x="960120" y="2103120"/>
+            <a:ext cx="3657600" cy="457200"/>
+          </a:xfrm>
+          <a:prstGeom prst="rect">
+            <a:avLst/>
+          </a:prstGeom>
+          <a:noFill/>
+          <a:ln/>
+        </p:spPr>
+        <p:txBody>
+          <a:bodyPr wrap="square" lIns="0" tIns="0" rIns="0" bIns="0" rtlCol="0" anchor="ctr"/>
+          <a:lstStyle/>
+          <a:p>
+            <a:pPr indent="0" marL="0">
+              <a:buNone/>
+            </a:pPr>
+            <a:r>
+              <a:rPr lang="en-US" sz="1900" b="1" dirty="0">
+                <a:solidFill>
+                  <a:srgbClr val="E4A63C"/>
+                </a:solidFill>
+                <a:latin typeface="Cambria" pitchFamily="34" charset="0"/>
+                <a:ea typeface="Cambria" pitchFamily="34" charset="-122"/>
+                <a:cs typeface="Cambria" pitchFamily="34" charset="-120"/>
+              </a:rPr>
+              <a:t>Problem</a:t>
+            </a:r>
+            <a:endParaRPr lang="en-US" sz="1900" dirty="0"/>
+          </a:p>
+        </p:txBody>
+      </p:sp>
+      <p:sp>
+        <p:nvSpPr>
           <p:cNvPr id="5" name="Text 3"/>
           <p:cNvSpPr/>
           <p:nvPr/>
         </p:nvSpPr>
         <p:spPr>
           <a:xfrm>
-            <a:off x="3474720" y="1920240"/>
-            <a:ext cx="7955280" cy="1920240"/>
+            <a:off x="960120" y="2651760"/>
+            <a:ext cx="4343400" cy="3200400"/>
           </a:xfrm>
           <a:prstGeom prst="rect">
             <a:avLst/>
@@ -3278,7 +3302,7 @@
               <a:buNone/>
             </a:pPr>
             <a:r>
-              <a:rPr lang="en-US" sz="1450" dirty="0">
+              <a:rPr lang="en-US" sz="1350" dirty="0">
                 <a:solidFill>
                   <a:srgbClr val="112634"/>
                 </a:solidFill>
@@ -3288,65 +3312,30 @@
               </a:rPr>
               <a:t>Every ten seconds the fog node must close the current window and publish aggregates, while ten sensors keep posting new readings into the very same buffer. Lock the buffer and ingest stalls on every flush; clear it naively and any reading that lands mid-drain is lost, or counted twice in the next window.</a:t>
             </a:r>
-            <a:endParaRPr lang="en-US" sz="1450" dirty="0"/>
-          </a:p>
-        </p:txBody>
-      </p:sp>
-      <p:sp>
-        <p:nvSpPr>
-          <p:cNvPr id="6" name="Text 4"/>
-          <p:cNvSpPr/>
-          <p:nvPr/>
-        </p:nvSpPr>
-        <p:spPr>
-          <a:xfrm>
-            <a:off x="731520" y="4114800"/>
-            <a:ext cx="2377440" cy="548640"/>
-          </a:xfrm>
-          <a:prstGeom prst="rect">
-            <a:avLst/>
-          </a:prstGeom>
-          <a:noFill/>
-          <a:ln/>
-        </p:spPr>
-        <p:txBody>
-          <a:bodyPr wrap="square" lIns="0" tIns="0" rIns="0" bIns="0" rtlCol="0" anchor="ctr"/>
-          <a:lstStyle/>
-          <a:p>
-            <a:pPr indent="0" marL="0">
-              <a:buNone/>
-            </a:pPr>
-            <a:r>
-              <a:rPr lang="en-US" sz="2300" b="1" dirty="0">
-                <a:solidFill>
-                  <a:srgbClr val="1E739A"/>
-                </a:solidFill>
-                <a:latin typeface="Cambria" pitchFamily="34" charset="0"/>
-                <a:ea typeface="Cambria" pitchFamily="34" charset="-122"/>
-                <a:cs typeface="Cambria" pitchFamily="34" charset="-120"/>
-              </a:rPr>
-              <a:t>Solution</a:t>
-            </a:r>
-            <a:endParaRPr lang="en-US" sz="2300" dirty="0"/>
-          </a:p>
-        </p:txBody>
-      </p:sp>
-      <p:sp>
-        <p:nvSpPr>
-          <p:cNvPr id="7" name="Shape 5"/>
-          <p:cNvSpPr/>
-          <p:nvPr/>
-        </p:nvSpPr>
-        <p:spPr>
-          <a:xfrm>
-            <a:off x="3200400" y="4069080"/>
-            <a:ext cx="0" cy="1783080"/>
-          </a:xfrm>
-          <a:prstGeom prst="line">
-            <a:avLst/>
-          </a:prstGeom>
-          <a:noFill/>
-          <a:ln w="31750">
+            <a:endParaRPr lang="en-US" sz="1350" dirty="0"/>
+          </a:p>
+        </p:txBody>
+      </p:sp>
+      <p:sp>
+        <p:nvSpPr>
+          <p:cNvPr id="6" name="Shape 4"/>
+          <p:cNvSpPr/>
+          <p:nvPr/>
+        </p:nvSpPr>
+        <p:spPr>
+          <a:xfrm>
+            <a:off x="6611112" y="1874520"/>
+            <a:ext cx="4937760" cy="4160520"/>
+          </a:xfrm>
+          <a:prstGeom prst="roundRect">
+            <a:avLst>
+              <a:gd name="adj" fmla="val 2198"/>
+            </a:avLst>
+          </a:prstGeom>
+          <a:solidFill>
+            <a:srgbClr val="EDF4F8"/>
+          </a:solidFill>
+          <a:ln w="19050">
             <a:solidFill>
               <a:srgbClr val="1E739A"/>
             </a:solidFill>
@@ -3356,14 +3345,53 @@
       </p:sp>
       <p:sp>
         <p:nvSpPr>
+          <p:cNvPr id="7" name="Text 5"/>
+          <p:cNvSpPr/>
+          <p:nvPr/>
+        </p:nvSpPr>
+        <p:spPr>
+          <a:xfrm>
+            <a:off x="6931152" y="2103120"/>
+            <a:ext cx="3657600" cy="457200"/>
+          </a:xfrm>
+          <a:prstGeom prst="rect">
+            <a:avLst/>
+          </a:prstGeom>
+          <a:noFill/>
+          <a:ln/>
+        </p:spPr>
+        <p:txBody>
+          <a:bodyPr wrap="square" lIns="0" tIns="0" rIns="0" bIns="0" rtlCol="0" anchor="ctr"/>
+          <a:lstStyle/>
+          <a:p>
+            <a:pPr indent="0" marL="0">
+              <a:buNone/>
+            </a:pPr>
+            <a:r>
+              <a:rPr lang="en-US" sz="1900" b="1" dirty="0">
+                <a:solidFill>
+                  <a:srgbClr val="1E739A"/>
+                </a:solidFill>
+                <a:latin typeface="Cambria" pitchFamily="34" charset="0"/>
+                <a:ea typeface="Cambria" pitchFamily="34" charset="-122"/>
+                <a:cs typeface="Cambria" pitchFamily="34" charset="-120"/>
+              </a:rPr>
+              <a:t>Solution</a:t>
+            </a:r>
+            <a:endParaRPr lang="en-US" sz="1900" dirty="0"/>
+          </a:p>
+        </p:txBody>
+      </p:sp>
+      <p:sp>
+        <p:nvSpPr>
           <p:cNvPr id="8" name="Text 6"/>
           <p:cNvSpPr/>
           <p:nvPr/>
         </p:nvSpPr>
         <p:spPr>
           <a:xfrm>
-            <a:off x="3474720" y="4069080"/>
-            <a:ext cx="7955280" cy="1920240"/>
+            <a:off x="6931152" y="2651760"/>
+            <a:ext cx="4343400" cy="3200400"/>
           </a:xfrm>
           <a:prstGeom prst="rect">
             <a:avLst/>
@@ -3382,7 +3410,7 @@
               <a:buNone/>
             </a:pPr>
             <a:r>
-              <a:rPr lang="en-US" sz="1450" dirty="0">
+              <a:rPr lang="en-US" sz="1350" dirty="0">
                 <a:solidFill>
                   <a:srgbClr val="112634"/>
                 </a:solidFill>
@@ -3392,9 +3420,29 @@
               </a:rPr>
               <a:t>Every reading takes a numbered ticket on arrival. A flush snapshots the latest number as a boundary, then aggregates and removes only readings below it. Later arrivals roll into the next window — no locks, nothing lost, nothing counted twice. Backed by the fog module's 48 automated tests, including ingest exercised over a real HTTP server.</a:t>
             </a:r>
-            <a:endParaRPr lang="en-US" sz="1450" dirty="0"/>
-          </a:p>
-        </p:txBody>
+            <a:endParaRPr lang="en-US" sz="1350" dirty="0"/>
+          </a:p>
+        </p:txBody>
+      </p:sp>
+      <p:sp>
+        <p:nvSpPr>
+          <p:cNvPr id="9" name="Shape 7"/>
+          <p:cNvSpPr/>
+          <p:nvPr/>
+        </p:nvSpPr>
+        <p:spPr>
+          <a:xfrm>
+            <a:off x="5669280" y="3703320"/>
+            <a:ext cx="841248" cy="512064"/>
+          </a:xfrm>
+          <a:prstGeom prst="rightArrow">
+            <a:avLst/>
+          </a:prstGeom>
+          <a:solidFill>
+            <a:srgbClr val="124C6E"/>
+          </a:solidFill>
+          <a:ln/>
+        </p:spPr>
       </p:sp>
     </p:spTree>
   </p:cSld>

--- a/ppt/UdayKiranReddyDodda_X25166484_smart-port-container-terminal.pptx
+++ b/ppt/UdayKiranReddyDodda_X25166484_smart-port-container-terminal.pptx
@@ -2695,8 +2695,35 @@
         </p:nvSpPr>
         <p:spPr>
           <a:xfrm>
-            <a:off x="731520" y="1965960"/>
-            <a:ext cx="685800" cy="685800"/>
+            <a:off x="640080" y="1874520"/>
+            <a:ext cx="3502152" cy="3977640"/>
+          </a:xfrm>
+          <a:prstGeom prst="roundRect">
+            <a:avLst>
+              <a:gd name="adj" fmla="val 2611"/>
+            </a:avLst>
+          </a:prstGeom>
+          <a:solidFill>
+            <a:srgbClr val="EDF4F8"/>
+          </a:solidFill>
+          <a:ln w="15240">
+            <a:solidFill>
+              <a:srgbClr val="1E739A"/>
+            </a:solidFill>
+            <a:prstDash val="solid"/>
+          </a:ln>
+        </p:spPr>
+      </p:sp>
+      <p:sp>
+        <p:nvSpPr>
+          <p:cNvPr id="5" name="Shape 3"/>
+          <p:cNvSpPr/>
+          <p:nvPr/>
+        </p:nvSpPr>
+        <p:spPr>
+          <a:xfrm>
+            <a:off x="914400" y="2148840"/>
+            <a:ext cx="603504" cy="603504"/>
           </a:xfrm>
           <a:prstGeom prst="ellipse">
             <a:avLst/>
@@ -2709,14 +2736,14 @@
       </p:sp>
       <p:sp>
         <p:nvSpPr>
-          <p:cNvPr id="5" name="Text 3"/>
-          <p:cNvSpPr/>
-          <p:nvPr/>
-        </p:nvSpPr>
-        <p:spPr>
-          <a:xfrm>
-            <a:off x="731520" y="1965960"/>
-            <a:ext cx="685800" cy="685800"/>
+          <p:cNvPr id="6" name="Text 4"/>
+          <p:cNvSpPr/>
+          <p:nvPr/>
+        </p:nvSpPr>
+        <p:spPr>
+          <a:xfrm>
+            <a:off x="914400" y="2148840"/>
+            <a:ext cx="603504" cy="603504"/>
           </a:xfrm>
           <a:prstGeom prst="rect">
             <a:avLst/>
@@ -2732,7 +2759,7 @@
               <a:buNone/>
             </a:pPr>
             <a:r>
-              <a:rPr lang="en-US" sz="2600" b="1" dirty="0">
+              <a:rPr lang="en-US" sz="2200" b="1" dirty="0">
                 <a:solidFill>
                   <a:srgbClr val="FFFFFF"/>
                 </a:solidFill>
@@ -2742,20 +2769,20 @@
               </a:rPr>
               <a:t>1</a:t>
             </a:r>
-            <a:endParaRPr lang="en-US" sz="2600" dirty="0"/>
-          </a:p>
-        </p:txBody>
-      </p:sp>
-      <p:sp>
-        <p:nvSpPr>
-          <p:cNvPr id="6" name="Text 4"/>
-          <p:cNvSpPr/>
-          <p:nvPr/>
-        </p:nvSpPr>
-        <p:spPr>
-          <a:xfrm>
-            <a:off x="1691640" y="1920240"/>
-            <a:ext cx="9875520" cy="411480"/>
+            <a:endParaRPr lang="en-US" sz="2200" dirty="0"/>
+          </a:p>
+        </p:txBody>
+      </p:sp>
+      <p:sp>
+        <p:nvSpPr>
+          <p:cNvPr id="7" name="Text 5"/>
+          <p:cNvSpPr/>
+          <p:nvPr/>
+        </p:nvSpPr>
+        <p:spPr>
+          <a:xfrm>
+            <a:off x="914400" y="2898648"/>
+            <a:ext cx="2953512" cy="777240"/>
           </a:xfrm>
           <a:prstGeom prst="rect">
             <a:avLst/>
@@ -2771,7 +2798,7 @@
               <a:buNone/>
             </a:pPr>
             <a:r>
-              <a:rPr lang="en-US" sz="1800" b="1" dirty="0">
+              <a:rPr lang="en-US" sz="1600" b="1" dirty="0">
                 <a:solidFill>
                   <a:srgbClr val="112634"/>
                 </a:solidFill>
@@ -2781,20 +2808,20 @@
               </a:rPr>
               <a:t>Two berths, five quayside signals</a:t>
             </a:r>
-            <a:endParaRPr lang="en-US" sz="1800" dirty="0"/>
-          </a:p>
-        </p:txBody>
-      </p:sp>
-      <p:sp>
-        <p:nvSpPr>
-          <p:cNvPr id="7" name="Text 5"/>
-          <p:cNvSpPr/>
-          <p:nvPr/>
-        </p:nvSpPr>
-        <p:spPr>
-          <a:xfrm>
-            <a:off x="1691640" y="2340864"/>
-            <a:ext cx="9875520" cy="640080"/>
+            <a:endParaRPr lang="en-US" sz="1600" dirty="0"/>
+          </a:p>
+        </p:txBody>
+      </p:sp>
+      <p:sp>
+        <p:nvSpPr>
+          <p:cNvPr id="8" name="Text 6"/>
+          <p:cNvSpPr/>
+          <p:nvPr/>
+        </p:nvSpPr>
+        <p:spPr>
+          <a:xfrm>
+            <a:off x="914400" y="3657600"/>
+            <a:ext cx="2953512" cy="2011680"/>
           </a:xfrm>
           <a:prstGeom prst="rect">
             <a:avLst/>
@@ -2807,10 +2834,13 @@
           <a:lstStyle/>
           <a:p>
             <a:pPr indent="0" marL="0">
-              <a:buNone/>
-            </a:pPr>
-            <a:r>
-              <a:rPr lang="en-US" sz="1350" dirty="0">
+              <a:lnSpc>
+                <a:spcPct val="106000"/>
+              </a:lnSpc>
+              <a:buNone/>
+            </a:pPr>
+            <a:r>
+              <a:rPr lang="en-US" sz="1250" dirty="0">
                 <a:solidFill>
                   <a:srgbClr val="567480"/>
                 </a:solidFill>
@@ -2820,20 +2850,47 @@
               </a:rPr>
               <a:t>Crane load, container stacks, wind, occupancy and reefer temperature live for both berths.</a:t>
             </a:r>
-            <a:endParaRPr lang="en-US" sz="1350" dirty="0"/>
-          </a:p>
-        </p:txBody>
-      </p:sp>
-      <p:sp>
-        <p:nvSpPr>
-          <p:cNvPr id="8" name="Shape 6"/>
-          <p:cNvSpPr/>
-          <p:nvPr/>
-        </p:nvSpPr>
-        <p:spPr>
-          <a:xfrm>
-            <a:off x="731520" y="3383280"/>
-            <a:ext cx="685800" cy="685800"/>
+            <a:endParaRPr lang="en-US" sz="1250" dirty="0"/>
+          </a:p>
+        </p:txBody>
+      </p:sp>
+      <p:sp>
+        <p:nvSpPr>
+          <p:cNvPr id="9" name="Shape 7"/>
+          <p:cNvSpPr/>
+          <p:nvPr/>
+        </p:nvSpPr>
+        <p:spPr>
+          <a:xfrm>
+            <a:off x="4416552" y="1874520"/>
+            <a:ext cx="3502152" cy="3977640"/>
+          </a:xfrm>
+          <a:prstGeom prst="roundRect">
+            <a:avLst>
+              <a:gd name="adj" fmla="val 2611"/>
+            </a:avLst>
+          </a:prstGeom>
+          <a:solidFill>
+            <a:srgbClr val="EDF4F8"/>
+          </a:solidFill>
+          <a:ln w="15240">
+            <a:solidFill>
+              <a:srgbClr val="1E739A"/>
+            </a:solidFill>
+            <a:prstDash val="solid"/>
+          </a:ln>
+        </p:spPr>
+      </p:sp>
+      <p:sp>
+        <p:nvSpPr>
+          <p:cNvPr id="10" name="Shape 8"/>
+          <p:cNvSpPr/>
+          <p:nvPr/>
+        </p:nvSpPr>
+        <p:spPr>
+          <a:xfrm>
+            <a:off x="4690872" y="2148840"/>
+            <a:ext cx="603504" cy="603504"/>
           </a:xfrm>
           <a:prstGeom prst="ellipse">
             <a:avLst/>
@@ -2846,14 +2903,14 @@
       </p:sp>
       <p:sp>
         <p:nvSpPr>
-          <p:cNvPr id="9" name="Text 7"/>
-          <p:cNvSpPr/>
-          <p:nvPr/>
-        </p:nvSpPr>
-        <p:spPr>
-          <a:xfrm>
-            <a:off x="731520" y="3383280"/>
-            <a:ext cx="685800" cy="685800"/>
+          <p:cNvPr id="11" name="Text 9"/>
+          <p:cNvSpPr/>
+          <p:nvPr/>
+        </p:nvSpPr>
+        <p:spPr>
+          <a:xfrm>
+            <a:off x="4690872" y="2148840"/>
+            <a:ext cx="603504" cy="603504"/>
           </a:xfrm>
           <a:prstGeom prst="rect">
             <a:avLst/>
@@ -2869,7 +2926,7 @@
               <a:buNone/>
             </a:pPr>
             <a:r>
-              <a:rPr lang="en-US" sz="2600" b="1" dirty="0">
+              <a:rPr lang="en-US" sz="2200" b="1" dirty="0">
                 <a:solidFill>
                   <a:srgbClr val="FFFFFF"/>
                 </a:solidFill>
@@ -2879,20 +2936,20 @@
               </a:rPr>
               <a:t>2</a:t>
             </a:r>
-            <a:endParaRPr lang="en-US" sz="2600" dirty="0"/>
-          </a:p>
-        </p:txBody>
-      </p:sp>
-      <p:sp>
-        <p:nvSpPr>
-          <p:cNvPr id="10" name="Text 8"/>
-          <p:cNvSpPr/>
-          <p:nvPr/>
-        </p:nvSpPr>
-        <p:spPr>
-          <a:xfrm>
-            <a:off x="1691640" y="3337560"/>
-            <a:ext cx="9875520" cy="411480"/>
+            <a:endParaRPr lang="en-US" sz="2200" dirty="0"/>
+          </a:p>
+        </p:txBody>
+      </p:sp>
+      <p:sp>
+        <p:nvSpPr>
+          <p:cNvPr id="12" name="Text 10"/>
+          <p:cNvSpPr/>
+          <p:nvPr/>
+        </p:nvSpPr>
+        <p:spPr>
+          <a:xfrm>
+            <a:off x="4690872" y="2898648"/>
+            <a:ext cx="2953512" cy="777240"/>
           </a:xfrm>
           <a:prstGeom prst="rect">
             <a:avLst/>
@@ -2908,7 +2965,7 @@
               <a:buNone/>
             </a:pPr>
             <a:r>
-              <a:rPr lang="en-US" sz="1800" b="1" dirty="0">
+              <a:rPr lang="en-US" sz="1600" b="1" dirty="0">
                 <a:solidFill>
                   <a:srgbClr val="112634"/>
                 </a:solidFill>
@@ -2918,20 +2975,20 @@
               </a:rPr>
               <a:t>Crane, wind and cold-chain alerts</a:t>
             </a:r>
-            <a:endParaRPr lang="en-US" sz="1800" dirty="0"/>
-          </a:p>
-        </p:txBody>
-      </p:sp>
-      <p:sp>
-        <p:nvSpPr>
-          <p:cNvPr id="11" name="Text 9"/>
-          <p:cNvSpPr/>
-          <p:nvPr/>
-        </p:nvSpPr>
-        <p:spPr>
-          <a:xfrm>
-            <a:off x="1691640" y="3758184"/>
-            <a:ext cx="9875520" cy="640080"/>
+            <a:endParaRPr lang="en-US" sz="1600" dirty="0"/>
+          </a:p>
+        </p:txBody>
+      </p:sp>
+      <p:sp>
+        <p:nvSpPr>
+          <p:cNvPr id="13" name="Text 11"/>
+          <p:cNvSpPr/>
+          <p:nvPr/>
+        </p:nvSpPr>
+        <p:spPr>
+          <a:xfrm>
+            <a:off x="4690872" y="3657600"/>
+            <a:ext cx="2953512" cy="2011680"/>
           </a:xfrm>
           <a:prstGeom prst="rect">
             <a:avLst/>
@@ -2944,10 +3001,13 @@
           <a:lstStyle/>
           <a:p>
             <a:pPr indent="0" marL="0">
-              <a:buNone/>
-            </a:pPr>
-            <a:r>
-              <a:rPr lang="en-US" sz="1350" dirty="0">
+              <a:lnSpc>
+                <a:spcPct val="106000"/>
+              </a:lnSpc>
+              <a:buNone/>
+            </a:pPr>
+            <a:r>
+              <a:rPr lang="en-US" sz="1250" dirty="0">
                 <a:solidFill>
                   <a:srgbClr val="567480"/>
                 </a:solidFill>
@@ -2957,20 +3017,47 @@
               </a:rPr>
               <a:t>A gust over the 34-knot limit halts crane lifts, an overloaded lift and a warm reefer each raise their own alert on the window.</a:t>
             </a:r>
-            <a:endParaRPr lang="en-US" sz="1350" dirty="0"/>
-          </a:p>
-        </p:txBody>
-      </p:sp>
-      <p:sp>
-        <p:nvSpPr>
-          <p:cNvPr id="12" name="Shape 10"/>
-          <p:cNvSpPr/>
-          <p:nvPr/>
-        </p:nvSpPr>
-        <p:spPr>
-          <a:xfrm>
-            <a:off x="731520" y="4800600"/>
-            <a:ext cx="685800" cy="685800"/>
+            <a:endParaRPr lang="en-US" sz="1250" dirty="0"/>
+          </a:p>
+        </p:txBody>
+      </p:sp>
+      <p:sp>
+        <p:nvSpPr>
+          <p:cNvPr id="14" name="Shape 12"/>
+          <p:cNvSpPr/>
+          <p:nvPr/>
+        </p:nvSpPr>
+        <p:spPr>
+          <a:xfrm>
+            <a:off x="8193024" y="1874520"/>
+            <a:ext cx="3502152" cy="3977640"/>
+          </a:xfrm>
+          <a:prstGeom prst="roundRect">
+            <a:avLst>
+              <a:gd name="adj" fmla="val 2611"/>
+            </a:avLst>
+          </a:prstGeom>
+          <a:solidFill>
+            <a:srgbClr val="EDF4F8"/>
+          </a:solidFill>
+          <a:ln w="15240">
+            <a:solidFill>
+              <a:srgbClr val="1E739A"/>
+            </a:solidFill>
+            <a:prstDash val="solid"/>
+          </a:ln>
+        </p:spPr>
+      </p:sp>
+      <p:sp>
+        <p:nvSpPr>
+          <p:cNvPr id="15" name="Shape 13"/>
+          <p:cNvSpPr/>
+          <p:nvPr/>
+        </p:nvSpPr>
+        <p:spPr>
+          <a:xfrm>
+            <a:off x="8467344" y="2148840"/>
+            <a:ext cx="603504" cy="603504"/>
           </a:xfrm>
           <a:prstGeom prst="ellipse">
             <a:avLst/>
@@ -2983,14 +3070,14 @@
       </p:sp>
       <p:sp>
         <p:nvSpPr>
-          <p:cNvPr id="13" name="Text 11"/>
-          <p:cNvSpPr/>
-          <p:nvPr/>
-        </p:nvSpPr>
-        <p:spPr>
-          <a:xfrm>
-            <a:off x="731520" y="4800600"/>
-            <a:ext cx="685800" cy="685800"/>
+          <p:cNvPr id="16" name="Text 14"/>
+          <p:cNvSpPr/>
+          <p:nvPr/>
+        </p:nvSpPr>
+        <p:spPr>
+          <a:xfrm>
+            <a:off x="8467344" y="2148840"/>
+            <a:ext cx="603504" cy="603504"/>
           </a:xfrm>
           <a:prstGeom prst="rect">
             <a:avLst/>
@@ -3006,7 +3093,7 @@
               <a:buNone/>
             </a:pPr>
             <a:r>
-              <a:rPr lang="en-US" sz="2600" b="1" dirty="0">
+              <a:rPr lang="en-US" sz="2200" b="1" dirty="0">
                 <a:solidFill>
                   <a:srgbClr val="FFFFFF"/>
                 </a:solidFill>
@@ -3016,20 +3103,20 @@
               </a:rPr>
               <a:t>3</a:t>
             </a:r>
-            <a:endParaRPr lang="en-US" sz="2600" dirty="0"/>
-          </a:p>
-        </p:txBody>
-      </p:sp>
-      <p:sp>
-        <p:nvSpPr>
-          <p:cNvPr id="14" name="Text 12"/>
-          <p:cNvSpPr/>
-          <p:nvPr/>
-        </p:nvSpPr>
-        <p:spPr>
-          <a:xfrm>
-            <a:off x="1691640" y="4754880"/>
-            <a:ext cx="9875520" cy="411480"/>
+            <a:endParaRPr lang="en-US" sz="2200" dirty="0"/>
+          </a:p>
+        </p:txBody>
+      </p:sp>
+      <p:sp>
+        <p:nvSpPr>
+          <p:cNvPr id="17" name="Text 15"/>
+          <p:cNvSpPr/>
+          <p:nvPr/>
+        </p:nvSpPr>
+        <p:spPr>
+          <a:xfrm>
+            <a:off x="8467344" y="2898648"/>
+            <a:ext cx="2953512" cy="777240"/>
           </a:xfrm>
           <a:prstGeom prst="rect">
             <a:avLst/>
@@ -3045,7 +3132,7 @@
               <a:buNone/>
             </a:pPr>
             <a:r>
-              <a:rPr lang="en-US" sz="1800" b="1" dirty="0">
+              <a:rPr lang="en-US" sz="1600" b="1" dirty="0">
                 <a:solidFill>
                   <a:srgbClr val="112634"/>
                 </a:solidFill>
@@ -3055,20 +3142,20 @@
               </a:rPr>
               <a:t>Every alert traces to a real rule</a:t>
             </a:r>
-            <a:endParaRPr lang="en-US" sz="1800" dirty="0"/>
-          </a:p>
-        </p:txBody>
-      </p:sp>
-      <p:sp>
-        <p:nvSpPr>
-          <p:cNvPr id="15" name="Text 13"/>
-          <p:cNvSpPr/>
-          <p:nvPr/>
-        </p:nvSpPr>
-        <p:spPr>
-          <a:xfrm>
-            <a:off x="1691640" y="5175504"/>
-            <a:ext cx="9875520" cy="640080"/>
+            <a:endParaRPr lang="en-US" sz="1600" dirty="0"/>
+          </a:p>
+        </p:txBody>
+      </p:sp>
+      <p:sp>
+        <p:nvSpPr>
+          <p:cNvPr id="18" name="Text 16"/>
+          <p:cNvSpPr/>
+          <p:nvPr/>
+        </p:nvSpPr>
+        <p:spPr>
+          <a:xfrm>
+            <a:off x="8467344" y="3657600"/>
+            <a:ext cx="2953512" cy="2011680"/>
           </a:xfrm>
           <a:prstGeom prst="rect">
             <a:avLst/>
@@ -3081,10 +3168,13 @@
           <a:lstStyle/>
           <a:p>
             <a:pPr indent="0" marL="0">
-              <a:buNone/>
-            </a:pPr>
-            <a:r>
-              <a:rPr lang="en-US" sz="1350" dirty="0">
+              <a:lnSpc>
+                <a:spcPct val="106000"/>
+              </a:lnSpc>
+              <a:buNone/>
+            </a:pPr>
+            <a:r>
+              <a:rPr lang="en-US" sz="1250" dirty="0">
                 <a:solidFill>
                   <a:srgbClr val="567480"/>
                 </a:solidFill>
@@ -3094,46 +3184,7 @@
               </a:rPr>
               <a:t>Each banner maps to a code-defined threshold — 34 knots, 32,000 kg, -10 C, 90% occupancy — not a demo constant.</a:t>
             </a:r>
-            <a:endParaRPr lang="en-US" sz="1350" dirty="0"/>
-          </a:p>
-        </p:txBody>
-      </p:sp>
-      <p:sp>
-        <p:nvSpPr>
-          <p:cNvPr id="16" name="Text 14"/>
-          <p:cNvSpPr/>
-          <p:nvPr/>
-        </p:nvSpPr>
-        <p:spPr>
-          <a:xfrm>
-            <a:off x="640080" y="6263640"/>
-            <a:ext cx="10972800" cy="365760"/>
-          </a:xfrm>
-          <a:prstGeom prst="rect">
-            <a:avLst/>
-          </a:prstGeom>
-          <a:noFill/>
-          <a:ln/>
-        </p:spPr>
-        <p:txBody>
-          <a:bodyPr wrap="square" rtlCol="0" anchor="ctr"/>
-          <a:lstStyle/>
-          <a:p>
-            <a:pPr indent="0" marL="0">
-              <a:buNone/>
-            </a:pPr>
-            <a:r>
-              <a:rPr lang="en-US" sz="1300" i="1" dirty="0">
-                <a:solidFill>
-                  <a:srgbClr val="4F98B8"/>
-                </a:solidFill>
-                <a:latin typeface="Calibri" pitchFamily="34" charset="0"/>
-                <a:ea typeface="Calibri" pitchFamily="34" charset="-122"/>
-                <a:cs typeface="Calibri" pitchFamily="34" charset="-120"/>
-              </a:rPr>
-              <a:t>Switch to the live dashboard here — backup video ready.</a:t>
-            </a:r>
-            <a:endParaRPr lang="en-US" sz="1300" dirty="0"/>
+            <a:endParaRPr lang="en-US" sz="1250" dirty="0"/>
           </a:p>
         </p:txBody>
       </p:sp>

--- a/ppt/UdayKiranReddyDodda_X25166484_smart-port-container-terminal.pptx
+++ b/ppt/UdayKiranReddyDodda_X25166484_smart-port-container-terminal.pptx
@@ -1299,14 +1299,9 @@
             </a:avLst>
           </a:prstGeom>
           <a:solidFill>
-            <a:srgbClr val="163A4E"/>
-          </a:solidFill>
-          <a:ln w="12700">
-            <a:solidFill>
-              <a:srgbClr val="E4A63C"/>
-            </a:solidFill>
-            <a:prstDash val="solid"/>
-          </a:ln>
+            <a:srgbClr val="E4A63C"/>
+          </a:solidFill>
+          <a:ln/>
         </p:spPr>
       </p:sp>
       <p:sp>
@@ -1336,7 +1331,7 @@
             <a:r>
               <a:rPr lang="en-US" sz="1350" b="1" dirty="0">
                 <a:solidFill>
-                  <a:srgbClr val="E4A63C"/>
+                  <a:srgbClr val="102534"/>
                 </a:solidFill>
                 <a:latin typeface="Calibri" pitchFamily="34" charset="0"/>
                 <a:ea typeface="Calibri" pitchFamily="34" charset="-122"/>
@@ -1356,7 +1351,7 @@
         </p:nvSpPr>
         <p:spPr>
           <a:xfrm>
-            <a:off x="548640" y="4709160"/>
+            <a:off x="548640" y="4681728"/>
             <a:ext cx="2926080" cy="566928"/>
           </a:xfrm>
           <a:prstGeom prst="roundRect">
@@ -1365,14 +1360,9 @@
             </a:avLst>
           </a:prstGeom>
           <a:solidFill>
-            <a:srgbClr val="163A4E"/>
-          </a:solidFill>
-          <a:ln w="12700">
-            <a:solidFill>
-              <a:srgbClr val="E4A63C"/>
-            </a:solidFill>
-            <a:prstDash val="solid"/>
-          </a:ln>
+            <a:srgbClr val="E4A63C"/>
+          </a:solidFill>
+          <a:ln/>
         </p:spPr>
       </p:sp>
       <p:sp>
@@ -1383,7 +1373,7 @@
         </p:nvSpPr>
         <p:spPr>
           <a:xfrm>
-            <a:off x="548640" y="4709160"/>
+            <a:off x="548640" y="4681728"/>
             <a:ext cx="2926080" cy="566928"/>
           </a:xfrm>
           <a:prstGeom prst="rect">
@@ -1402,7 +1392,7 @@
             <a:r>
               <a:rPr lang="en-US" sz="1350" b="1" dirty="0">
                 <a:solidFill>
-                  <a:srgbClr val="E4A63C"/>
+                  <a:srgbClr val="102534"/>
                 </a:solidFill>
                 <a:latin typeface="Calibri" pitchFamily="34" charset="0"/>
                 <a:ea typeface="Calibri" pitchFamily="34" charset="-122"/>
@@ -1422,7 +1412,7 @@
         </p:nvSpPr>
         <p:spPr>
           <a:xfrm>
-            <a:off x="548640" y="5394960"/>
+            <a:off x="548640" y="5340096"/>
             <a:ext cx="2926080" cy="566928"/>
           </a:xfrm>
           <a:prstGeom prst="roundRect">
@@ -1431,14 +1421,9 @@
             </a:avLst>
           </a:prstGeom>
           <a:solidFill>
-            <a:srgbClr val="163A4E"/>
-          </a:solidFill>
-          <a:ln w="12700">
-            <a:solidFill>
-              <a:srgbClr val="E4A63C"/>
-            </a:solidFill>
-            <a:prstDash val="solid"/>
-          </a:ln>
+            <a:srgbClr val="E4A63C"/>
+          </a:solidFill>
+          <a:ln/>
         </p:spPr>
       </p:sp>
       <p:sp>
@@ -1449,7 +1434,7 @@
         </p:nvSpPr>
         <p:spPr>
           <a:xfrm>
-            <a:off x="548640" y="5394960"/>
+            <a:off x="548640" y="5340096"/>
             <a:ext cx="2926080" cy="566928"/>
           </a:xfrm>
           <a:prstGeom prst="rect">
@@ -1468,7 +1453,7 @@
             <a:r>
               <a:rPr lang="en-US" sz="1350" b="1" dirty="0">
                 <a:solidFill>
-                  <a:srgbClr val="E4A63C"/>
+                  <a:srgbClr val="102534"/>
                 </a:solidFill>
                 <a:latin typeface="Calibri" pitchFamily="34" charset="0"/>
                 <a:ea typeface="Calibri" pitchFamily="34" charset="-122"/>
@@ -1504,17 +1489,6 @@
             <a:pPr indent="0" marL="0">
               <a:buNone/>
             </a:pPr>
-            <a:r>
-              <a:rPr lang="en-US" sz="1250" dirty="0">
-                <a:solidFill>
-                  <a:srgbClr val="567480"/>
-                </a:solidFill>
-                <a:latin typeface="Calibri" pitchFamily="34" charset="0"/>
-                <a:ea typeface="Calibri" pitchFamily="34" charset="-122"/>
-                <a:cs typeface="Calibri" pitchFamily="34" charset="-120"/>
-              </a:rPr>
-              <a:t>Fog &amp; Edge Computing (H9FECC)   ·   deployed live on AWS</a:t>
-            </a:r>
             <a:endParaRPr lang="en-US" sz="1250" dirty="0"/>
           </a:p>
         </p:txBody>

--- a/ppt/UdayKiranReddyDodda_X25166484_smart-port-container-terminal.pptx
+++ b/ppt/UdayKiranReddyDodda_X25166484_smart-port-container-terminal.pptx
@@ -1124,7 +1124,7 @@
     <p:bg>
       <p:bgPr>
         <a:solidFill>
-          <a:srgbClr val="102534"/>
+          <a:srgbClr val="14384D"/>
         </a:solidFill>
       </p:bgPr>
     </p:bg>
@@ -1150,16 +1150,18 @@
         </p:nvSpPr>
         <p:spPr>
           <a:xfrm>
-            <a:off x="7528255" y="0"/>
-            <a:ext cx="4663440" cy="6858000"/>
-          </a:xfrm>
-          <a:prstGeom prst="rect">
-            <a:avLst/>
-          </a:prstGeom>
-          <a:solidFill>
-            <a:srgbClr val="124C6E"/>
-          </a:solidFill>
-          <a:ln/>
+            <a:off x="411480" y="411480"/>
+            <a:ext cx="11368735" cy="6035040"/>
+          </a:xfrm>
+          <a:prstGeom prst="rect">
+            <a:avLst/>
+          </a:prstGeom>
+          <a:ln w="19050">
+            <a:solidFill>
+              <a:srgbClr val="C13B15"/>
+            </a:solidFill>
+            <a:prstDash val="solid"/>
+          </a:ln>
         </p:spPr>
       </p:sp>
       <p:sp>
@@ -1170,8 +1172,8 @@
         </p:nvSpPr>
         <p:spPr>
           <a:xfrm>
-            <a:off x="7939735" y="1280160"/>
-            <a:ext cx="3749040" cy="2377440"/>
+            <a:off x="941832" y="1645920"/>
+            <a:ext cx="10271455" cy="1645920"/>
           </a:xfrm>
           <a:prstGeom prst="rect">
             <a:avLst/>
@@ -1184,20 +1186,23 @@
           <a:lstStyle/>
           <a:p>
             <a:pPr indent="0" marL="0">
-              <a:buNone/>
-            </a:pPr>
-            <a:r>
-              <a:rPr lang="en-US" sz="3400" b="1" dirty="0">
-                <a:solidFill>
-                  <a:srgbClr val="FFFFFF"/>
-                </a:solidFill>
-                <a:latin typeface="Cambria" pitchFamily="34" charset="0"/>
-                <a:ea typeface="Cambria" pitchFamily="34" charset="-122"/>
-                <a:cs typeface="Cambria" pitchFamily="34" charset="-120"/>
+              <a:lnSpc>
+                <a:spcPct val="98000"/>
+              </a:lnSpc>
+              <a:buNone/>
+            </a:pPr>
+            <a:r>
+              <a:rPr lang="en-US" sz="3800" b="1" dirty="0">
+                <a:solidFill>
+                  <a:srgbClr val="EEF4F8"/>
+                </a:solidFill>
+                <a:latin typeface="Times New Roman" pitchFamily="34" charset="0"/>
+                <a:ea typeface="Times New Roman" pitchFamily="34" charset="-122"/>
+                <a:cs typeface="Times New Roman" pitchFamily="34" charset="-120"/>
               </a:rPr>
               <a:t>Smart Port Container Terminal Monitoring</a:t>
             </a:r>
-            <a:endParaRPr lang="en-US" sz="3400" dirty="0"/>
+            <a:endParaRPr lang="en-US" sz="3800" dirty="0"/>
           </a:p>
         </p:txBody>
       </p:sp>
@@ -1209,8 +1214,8 @@
         </p:nvSpPr>
         <p:spPr>
           <a:xfrm>
-            <a:off x="7958023" y="5394960"/>
-            <a:ext cx="3840480" cy="731520"/>
+            <a:off x="960120" y="3337560"/>
+            <a:ext cx="10271455" cy="365760"/>
           </a:xfrm>
           <a:prstGeom prst="rect">
             <a:avLst/>
@@ -1226,9 +1231,9 @@
               <a:buNone/>
             </a:pPr>
             <a:r>
-              <a:rPr lang="en-US" sz="1500" dirty="0">
-                <a:solidFill>
-                  <a:srgbClr val="CFE2EC"/>
+              <a:rPr lang="en-US" sz="1450" dirty="0">
+                <a:solidFill>
+                  <a:srgbClr val="8B98A6"/>
                 </a:solidFill>
                 <a:latin typeface="Calibri" pitchFamily="34" charset="0"/>
                 <a:ea typeface="Calibri" pitchFamily="34" charset="-122"/>
@@ -1236,7 +1241,7 @@
               </a:rPr>
               <a:t>Uday Kiran Reddy Dodda   ·   X25166484</a:t>
             </a:r>
-            <a:endParaRPr lang="en-US" sz="1500" dirty="0"/>
+            <a:endParaRPr lang="en-US" sz="1450" dirty="0"/>
           </a:p>
         </p:txBody>
       </p:sp>
@@ -1248,29 +1253,29 @@
         </p:nvSpPr>
         <p:spPr>
           <a:xfrm>
-            <a:off x="548640" y="1371600"/>
-            <a:ext cx="6492240" cy="2011680"/>
-          </a:xfrm>
-          <a:prstGeom prst="rect">
-            <a:avLst/>
-          </a:prstGeom>
-          <a:noFill/>
-          <a:ln/>
-        </p:spPr>
-        <p:txBody>
-          <a:bodyPr wrap="square" rtlCol="0" anchor="ctr"/>
+            <a:off x="960120" y="3931920"/>
+            <a:ext cx="8138160" cy="1325880"/>
+          </a:xfrm>
+          <a:prstGeom prst="rect">
+            <a:avLst/>
+          </a:prstGeom>
+          <a:noFill/>
+          <a:ln/>
+        </p:spPr>
+        <p:txBody>
+          <a:bodyPr wrap="square" rtlCol="0" anchor="t"/>
           <a:lstStyle/>
           <a:p>
             <a:pPr indent="0" marL="0">
               <a:lnSpc>
-                <a:spcPct val="112000"/>
+                <a:spcPct val="130000"/>
               </a:lnSpc>
               <a:buNone/>
             </a:pPr>
             <a:r>
-              <a:rPr lang="en-US" sz="2000" dirty="0">
-                <a:solidFill>
-                  <a:srgbClr val="CFE2EC"/>
+              <a:rPr lang="en-US" sz="1400" dirty="0">
+                <a:solidFill>
+                  <a:srgbClr val="EEF4F8"/>
                 </a:solidFill>
                 <a:latin typeface="Calibri" pitchFamily="34" charset="0"/>
                 <a:ea typeface="Calibri" pitchFamily="34" charset="-122"/>
@@ -1278,218 +1283,7 @@
               </a:rPr>
               <a:t>The dangerous moments at a quayside are transient — one gust over the wind limit, one overloaded lift, one reefer drifting warm — and a paper log catches them only after the fact.</a:t>
             </a:r>
-            <a:endParaRPr lang="en-US" sz="2000" dirty="0"/>
-          </a:p>
-        </p:txBody>
-      </p:sp>
-      <p:sp>
-        <p:nvSpPr>
-          <p:cNvPr id="6" name="Shape 4"/>
-          <p:cNvSpPr/>
-          <p:nvPr/>
-        </p:nvSpPr>
-        <p:spPr>
-          <a:xfrm>
-            <a:off x="548640" y="4023360"/>
-            <a:ext cx="2926080" cy="566928"/>
-          </a:xfrm>
-          <a:prstGeom prst="roundRect">
-            <a:avLst>
-              <a:gd name="adj" fmla="val 50000"/>
-            </a:avLst>
-          </a:prstGeom>
-          <a:solidFill>
-            <a:srgbClr val="E4A63C"/>
-          </a:solidFill>
-          <a:ln/>
-        </p:spPr>
-      </p:sp>
-      <p:sp>
-        <p:nvSpPr>
-          <p:cNvPr id="7" name="Text 5"/>
-          <p:cNvSpPr/>
-          <p:nvPr/>
-        </p:nvSpPr>
-        <p:spPr>
-          <a:xfrm>
-            <a:off x="548640" y="4023360"/>
-            <a:ext cx="2926080" cy="566928"/>
-          </a:xfrm>
-          <a:prstGeom prst="rect">
-            <a:avLst/>
-          </a:prstGeom>
-          <a:noFill/>
-          <a:ln/>
-        </p:spPr>
-        <p:txBody>
-          <a:bodyPr wrap="square" lIns="0" tIns="0" rIns="0" bIns="0" rtlCol="0" anchor="ctr"/>
-          <a:lstStyle/>
-          <a:p>
-            <a:pPr algn="ctr" indent="0" marL="0">
-              <a:buNone/>
-            </a:pPr>
-            <a:r>
-              <a:rPr lang="en-US" sz="1350" b="1" dirty="0">
-                <a:solidFill>
-                  <a:srgbClr val="102534"/>
-                </a:solidFill>
-                <a:latin typeface="Calibri" pitchFamily="34" charset="0"/>
-                <a:ea typeface="Calibri" pitchFamily="34" charset="-122"/>
-                <a:cs typeface="Calibri" pitchFamily="34" charset="-120"/>
-              </a:rPr>
-              <a:t>Wind &gt; 34 kn halts lifts</a:t>
-            </a:r>
-            <a:endParaRPr lang="en-US" sz="1350" dirty="0"/>
-          </a:p>
-        </p:txBody>
-      </p:sp>
-      <p:sp>
-        <p:nvSpPr>
-          <p:cNvPr id="8" name="Shape 6"/>
-          <p:cNvSpPr/>
-          <p:nvPr/>
-        </p:nvSpPr>
-        <p:spPr>
-          <a:xfrm>
-            <a:off x="548640" y="4681728"/>
-            <a:ext cx="2926080" cy="566928"/>
-          </a:xfrm>
-          <a:prstGeom prst="roundRect">
-            <a:avLst>
-              <a:gd name="adj" fmla="val 50000"/>
-            </a:avLst>
-          </a:prstGeom>
-          <a:solidFill>
-            <a:srgbClr val="E4A63C"/>
-          </a:solidFill>
-          <a:ln/>
-        </p:spPr>
-      </p:sp>
-      <p:sp>
-        <p:nvSpPr>
-          <p:cNvPr id="9" name="Text 7"/>
-          <p:cNvSpPr/>
-          <p:nvPr/>
-        </p:nvSpPr>
-        <p:spPr>
-          <a:xfrm>
-            <a:off x="548640" y="4681728"/>
-            <a:ext cx="2926080" cy="566928"/>
-          </a:xfrm>
-          <a:prstGeom prst="rect">
-            <a:avLst/>
-          </a:prstGeom>
-          <a:noFill/>
-          <a:ln/>
-        </p:spPr>
-        <p:txBody>
-          <a:bodyPr wrap="square" lIns="0" tIns="0" rIns="0" bIns="0" rtlCol="0" anchor="ctr"/>
-          <a:lstStyle/>
-          <a:p>
-            <a:pPr algn="ctr" indent="0" marL="0">
-              <a:buNone/>
-            </a:pPr>
-            <a:r>
-              <a:rPr lang="en-US" sz="1350" b="1" dirty="0">
-                <a:solidFill>
-                  <a:srgbClr val="102534"/>
-                </a:solidFill>
-                <a:latin typeface="Calibri" pitchFamily="34" charset="0"/>
-                <a:ea typeface="Calibri" pitchFamily="34" charset="-122"/>
-                <a:cs typeface="Calibri" pitchFamily="34" charset="-120"/>
-              </a:rPr>
-              <a:t>Crane load &gt; 32,000 kg</a:t>
-            </a:r>
-            <a:endParaRPr lang="en-US" sz="1350" dirty="0"/>
-          </a:p>
-        </p:txBody>
-      </p:sp>
-      <p:sp>
-        <p:nvSpPr>
-          <p:cNvPr id="10" name="Shape 8"/>
-          <p:cNvSpPr/>
-          <p:nvPr/>
-        </p:nvSpPr>
-        <p:spPr>
-          <a:xfrm>
-            <a:off x="548640" y="5340096"/>
-            <a:ext cx="2926080" cy="566928"/>
-          </a:xfrm>
-          <a:prstGeom prst="roundRect">
-            <a:avLst>
-              <a:gd name="adj" fmla="val 50000"/>
-            </a:avLst>
-          </a:prstGeom>
-          <a:solidFill>
-            <a:srgbClr val="E4A63C"/>
-          </a:solidFill>
-          <a:ln/>
-        </p:spPr>
-      </p:sp>
-      <p:sp>
-        <p:nvSpPr>
-          <p:cNvPr id="11" name="Text 9"/>
-          <p:cNvSpPr/>
-          <p:nvPr/>
-        </p:nvSpPr>
-        <p:spPr>
-          <a:xfrm>
-            <a:off x="548640" y="5340096"/>
-            <a:ext cx="2926080" cy="566928"/>
-          </a:xfrm>
-          <a:prstGeom prst="rect">
-            <a:avLst/>
-          </a:prstGeom>
-          <a:noFill/>
-          <a:ln/>
-        </p:spPr>
-        <p:txBody>
-          <a:bodyPr wrap="square" lIns="0" tIns="0" rIns="0" bIns="0" rtlCol="0" anchor="ctr"/>
-          <a:lstStyle/>
-          <a:p>
-            <a:pPr algn="ctr" indent="0" marL="0">
-              <a:buNone/>
-            </a:pPr>
-            <a:r>
-              <a:rPr lang="en-US" sz="1350" b="1" dirty="0">
-                <a:solidFill>
-                  <a:srgbClr val="102534"/>
-                </a:solidFill>
-                <a:latin typeface="Calibri" pitchFamily="34" charset="0"/>
-                <a:ea typeface="Calibri" pitchFamily="34" charset="-122"/>
-                <a:cs typeface="Calibri" pitchFamily="34" charset="-120"/>
-              </a:rPr>
-              <a:t>Reefer &gt; −10 °C</a:t>
-            </a:r>
-            <a:endParaRPr lang="en-US" sz="1350" dirty="0"/>
-          </a:p>
-        </p:txBody>
-      </p:sp>
-      <p:sp>
-        <p:nvSpPr>
-          <p:cNvPr id="12" name="Text 10"/>
-          <p:cNvSpPr/>
-          <p:nvPr/>
-        </p:nvSpPr>
-        <p:spPr>
-          <a:xfrm>
-            <a:off x="548640" y="6172200"/>
-            <a:ext cx="6217920" cy="365760"/>
-          </a:xfrm>
-          <a:prstGeom prst="rect">
-            <a:avLst/>
-          </a:prstGeom>
-          <a:noFill/>
-          <a:ln/>
-        </p:spPr>
-        <p:txBody>
-          <a:bodyPr wrap="square" rtlCol="0" anchor="ctr"/>
-          <a:lstStyle/>
-          <a:p>
-            <a:pPr indent="0" marL="0">
-              <a:buNone/>
-            </a:pPr>
-            <a:endParaRPr lang="en-US" sz="1250" dirty="0"/>
+            <a:endParaRPr lang="en-US" sz="1400" dirty="0"/>
           </a:p>
         </p:txBody>
       </p:sp>
@@ -1507,7 +1301,7 @@
     <p:bg>
       <p:bgPr>
         <a:solidFill>
-          <a:srgbClr val="FFFFFF"/>
+          <a:srgbClr val="14384D"/>
         </a:solidFill>
       </p:bgPr>
     </p:bg>
@@ -1527,65 +1321,21 @@
       </p:grpSpPr>
       <p:sp>
         <p:nvSpPr>
-          <p:cNvPr id="2" name="Text 0"/>
-          <p:cNvSpPr/>
-          <p:nvPr/>
-        </p:nvSpPr>
-        <p:spPr>
-          <a:xfrm>
-            <a:off x="640080" y="457200"/>
-            <a:ext cx="10972800" cy="640080"/>
-          </a:xfrm>
-          <a:prstGeom prst="rect">
-            <a:avLst/>
-          </a:prstGeom>
-          <a:noFill/>
-          <a:ln/>
-        </p:spPr>
-        <p:txBody>
-          <a:bodyPr wrap="square" rtlCol="0" anchor="ctr"/>
-          <a:lstStyle/>
-          <a:p>
-            <a:pPr indent="0" marL="0">
-              <a:buNone/>
-            </a:pPr>
-            <a:r>
-              <a:rPr lang="en-US" sz="3000" b="1" dirty="0">
-                <a:solidFill>
-                  <a:srgbClr val="112634"/>
-                </a:solidFill>
-                <a:latin typeface="Cambria" pitchFamily="34" charset="0"/>
-                <a:ea typeface="Cambria" pitchFamily="34" charset="-122"/>
-                <a:cs typeface="Cambria" pitchFamily="34" charset="-120"/>
-              </a:rPr>
-              <a:t>What I Built — Sensors to Live Dashboard</a:t>
-            </a:r>
-            <a:endParaRPr lang="en-US" sz="3000" dirty="0"/>
-          </a:p>
-        </p:txBody>
-      </p:sp>
-      <p:sp>
-        <p:nvSpPr>
-          <p:cNvPr id="3" name="Shape 1"/>
-          <p:cNvSpPr/>
-          <p:nvPr/>
-        </p:nvSpPr>
-        <p:spPr>
-          <a:xfrm>
-            <a:off x="3992728" y="1234440"/>
-            <a:ext cx="4206240" cy="658368"/>
-          </a:xfrm>
-          <a:prstGeom prst="roundRect">
-            <a:avLst>
-              <a:gd name="adj" fmla="val 11111"/>
-            </a:avLst>
-          </a:prstGeom>
-          <a:solidFill>
-            <a:srgbClr val="EDF4F8"/>
-          </a:solidFill>
-          <a:ln w="17780">
+          <p:cNvPr id="2" name="Shape 0"/>
+          <p:cNvSpPr/>
+          <p:nvPr/>
+        </p:nvSpPr>
+        <p:spPr>
+          <a:xfrm>
+            <a:off x="411480" y="411480"/>
+            <a:ext cx="11368735" cy="6035040"/>
+          </a:xfrm>
+          <a:prstGeom prst="rect">
+            <a:avLst/>
+          </a:prstGeom>
+          <a:ln w="19050">
             <a:solidFill>
-              <a:srgbClr val="4F98B8"/>
+              <a:srgbClr val="C13B15"/>
             </a:solidFill>
             <a:prstDash val="solid"/>
           </a:ln>
@@ -1593,34 +1343,14 @@
       </p:sp>
       <p:sp>
         <p:nvSpPr>
-          <p:cNvPr id="4" name="Shape 2"/>
-          <p:cNvSpPr/>
-          <p:nvPr/>
-        </p:nvSpPr>
-        <p:spPr>
-          <a:xfrm>
-            <a:off x="4193896" y="1481328"/>
-            <a:ext cx="164592" cy="164592"/>
-          </a:xfrm>
-          <a:prstGeom prst="ellipse">
-            <a:avLst/>
-          </a:prstGeom>
-          <a:solidFill>
-            <a:srgbClr val="4F98B8"/>
-          </a:solidFill>
-          <a:ln/>
-        </p:spPr>
-      </p:sp>
-      <p:sp>
-        <p:nvSpPr>
-          <p:cNvPr id="5" name="Text 3"/>
-          <p:cNvSpPr/>
-          <p:nvPr/>
-        </p:nvSpPr>
-        <p:spPr>
-          <a:xfrm>
-            <a:off x="4495648" y="1234440"/>
-            <a:ext cx="2194560" cy="658368"/>
+          <p:cNvPr id="3" name="Text 1"/>
+          <p:cNvSpPr/>
+          <p:nvPr/>
+        </p:nvSpPr>
+        <p:spPr>
+          <a:xfrm>
+            <a:off x="960120" y="868680"/>
+            <a:ext cx="914400" cy="640080"/>
           </a:xfrm>
           <a:prstGeom prst="rect">
             <a:avLst/>
@@ -1636,30 +1366,214 @@
               <a:buNone/>
             </a:pPr>
             <a:r>
-              <a:rPr lang="en-US" sz="1350" b="1" dirty="0">
-                <a:solidFill>
-                  <a:srgbClr val="112634"/>
+              <a:rPr lang="en-US" sz="3000" b="1" dirty="0">
+                <a:solidFill>
+                  <a:srgbClr val="C13B15"/>
+                </a:solidFill>
+                <a:latin typeface="Times New Roman" pitchFamily="34" charset="0"/>
+                <a:ea typeface="Times New Roman" pitchFamily="34" charset="-122"/>
+                <a:cs typeface="Times New Roman" pitchFamily="34" charset="-120"/>
+              </a:rPr>
+              <a:t>01</a:t>
+            </a:r>
+            <a:endParaRPr lang="en-US" sz="3000" dirty="0"/>
+          </a:p>
+        </p:txBody>
+      </p:sp>
+      <p:sp>
+        <p:nvSpPr>
+          <p:cNvPr id="4" name="Text 2"/>
+          <p:cNvSpPr/>
+          <p:nvPr/>
+        </p:nvSpPr>
+        <p:spPr>
+          <a:xfrm>
+            <a:off x="1828800" y="1042416"/>
+            <a:ext cx="9402775" cy="274320"/>
+          </a:xfrm>
+          <a:prstGeom prst="rect">
+            <a:avLst/>
+          </a:prstGeom>
+          <a:noFill/>
+          <a:ln/>
+        </p:spPr>
+        <p:txBody>
+          <a:bodyPr wrap="square" lIns="0" tIns="0" rIns="0" bIns="0" rtlCol="0" anchor="ctr"/>
+          <a:lstStyle/>
+          <a:p>
+            <a:pPr indent="0" marL="0">
+              <a:buNone/>
+            </a:pPr>
+            <a:r>
+              <a:rPr lang="en-US" sz="1100" b="1" spc="200" kern="0" dirty="0">
+                <a:solidFill>
+                  <a:srgbClr val="8B98A6"/>
                 </a:solidFill>
                 <a:latin typeface="Calibri" pitchFamily="34" charset="0"/>
                 <a:ea typeface="Calibri" pitchFamily="34" charset="-122"/>
                 <a:cs typeface="Calibri" pitchFamily="34" charset="-120"/>
               </a:rPr>
+              <a:t>ARCHITECTURE</a:t>
+            </a:r>
+            <a:endParaRPr lang="en-US" sz="1100" dirty="0"/>
+          </a:p>
+        </p:txBody>
+      </p:sp>
+      <p:sp>
+        <p:nvSpPr>
+          <p:cNvPr id="5" name="Text 3"/>
+          <p:cNvSpPr/>
+          <p:nvPr/>
+        </p:nvSpPr>
+        <p:spPr>
+          <a:xfrm>
+            <a:off x="960120" y="1517904"/>
+            <a:ext cx="10271455" cy="640080"/>
+          </a:xfrm>
+          <a:prstGeom prst="rect">
+            <a:avLst/>
+          </a:prstGeom>
+          <a:noFill/>
+          <a:ln/>
+        </p:spPr>
+        <p:txBody>
+          <a:bodyPr wrap="square" lIns="0" tIns="0" rIns="0" bIns="0" rtlCol="0" anchor="ctr"/>
+          <a:lstStyle/>
+          <a:p>
+            <a:pPr indent="0" marL="0">
+              <a:buNone/>
+            </a:pPr>
+            <a:r>
+              <a:rPr lang="en-US" sz="2300" b="1" dirty="0">
+                <a:solidFill>
+                  <a:srgbClr val="EEF4F8"/>
+                </a:solidFill>
+                <a:latin typeface="Times New Roman" pitchFamily="34" charset="0"/>
+                <a:ea typeface="Times New Roman" pitchFamily="34" charset="-122"/>
+                <a:cs typeface="Times New Roman" pitchFamily="34" charset="-120"/>
+              </a:rPr>
+              <a:t>What I Built — Sensors to Live Dashboard</a:t>
+            </a:r>
+            <a:endParaRPr lang="en-US" sz="2300" dirty="0"/>
+          </a:p>
+        </p:txBody>
+      </p:sp>
+      <p:sp>
+        <p:nvSpPr>
+          <p:cNvPr id="6" name="Shape 4"/>
+          <p:cNvSpPr/>
+          <p:nvPr/>
+        </p:nvSpPr>
+        <p:spPr>
+          <a:xfrm>
+            <a:off x="960120" y="3108960"/>
+            <a:ext cx="1330909" cy="1965960"/>
+          </a:xfrm>
+          <a:prstGeom prst="roundRect">
+            <a:avLst/>
+          </a:prstGeom>
+          <a:solidFill>
+            <a:srgbClr val="C13B15"/>
+          </a:solidFill>
+          <a:ln w="12700">
+            <a:solidFill>
+              <a:srgbClr val="C13B15"/>
+            </a:solidFill>
+            <a:prstDash val="solid"/>
+          </a:ln>
+        </p:spPr>
+      </p:sp>
+      <p:sp>
+        <p:nvSpPr>
+          <p:cNvPr id="7" name="Text 5"/>
+          <p:cNvSpPr/>
+          <p:nvPr/>
+        </p:nvSpPr>
+        <p:spPr>
+          <a:xfrm>
+            <a:off x="1106424" y="3291840"/>
+            <a:ext cx="1038301" cy="320040"/>
+          </a:xfrm>
+          <a:prstGeom prst="rect">
+            <a:avLst/>
+          </a:prstGeom>
+          <a:noFill/>
+          <a:ln/>
+        </p:spPr>
+        <p:txBody>
+          <a:bodyPr wrap="square" lIns="0" tIns="0" rIns="0" bIns="0" rtlCol="0" anchor="ctr"/>
+          <a:lstStyle/>
+          <a:p>
+            <a:pPr indent="0" marL="0">
+              <a:buNone/>
+            </a:pPr>
+            <a:r>
+              <a:rPr lang="en-US" sz="1100" dirty="0">
+                <a:solidFill>
+                  <a:srgbClr val="FFFFFF"/>
+                </a:solidFill>
+                <a:latin typeface="Consolas" pitchFamily="34" charset="0"/>
+                <a:ea typeface="Consolas" pitchFamily="34" charset="-122"/>
+                <a:cs typeface="Consolas" pitchFamily="34" charset="-120"/>
+              </a:rPr>
+              <a:t>01</a:t>
+            </a:r>
+            <a:endParaRPr lang="en-US" sz="1100" dirty="0"/>
+          </a:p>
+        </p:txBody>
+      </p:sp>
+      <p:sp>
+        <p:nvSpPr>
+          <p:cNvPr id="8" name="Text 6"/>
+          <p:cNvSpPr/>
+          <p:nvPr/>
+        </p:nvSpPr>
+        <p:spPr>
+          <a:xfrm>
+            <a:off x="1106424" y="3730752"/>
+            <a:ext cx="1038301" cy="868680"/>
+          </a:xfrm>
+          <a:prstGeom prst="rect">
+            <a:avLst/>
+          </a:prstGeom>
+          <a:noFill/>
+          <a:ln/>
+        </p:spPr>
+        <p:txBody>
+          <a:bodyPr wrap="square" lIns="0" tIns="0" rIns="0" bIns="0" rtlCol="0" anchor="t"/>
+          <a:lstStyle/>
+          <a:p>
+            <a:pPr indent="0" marL="0">
+              <a:lnSpc>
+                <a:spcPct val="96000"/>
+              </a:lnSpc>
+              <a:buNone/>
+            </a:pPr>
+            <a:r>
+              <a:rPr lang="en-US" sz="1300" b="1" dirty="0">
+                <a:solidFill>
+                  <a:srgbClr val="FFFFFF"/>
+                </a:solidFill>
+                <a:latin typeface="Times New Roman" pitchFamily="34" charset="0"/>
+                <a:ea typeface="Times New Roman" pitchFamily="34" charset="-122"/>
+                <a:cs typeface="Times New Roman" pitchFamily="34" charset="-120"/>
+              </a:rPr>
               <a:t>Berth sensors</a:t>
             </a:r>
-            <a:endParaRPr lang="en-US" sz="1350" dirty="0"/>
-          </a:p>
-        </p:txBody>
-      </p:sp>
-      <p:sp>
-        <p:nvSpPr>
-          <p:cNvPr id="6" name="Text 4"/>
-          <p:cNvSpPr/>
-          <p:nvPr/>
-        </p:nvSpPr>
-        <p:spPr>
-          <a:xfrm>
-            <a:off x="6644488" y="1234440"/>
-            <a:ext cx="1463040" cy="658368"/>
+            <a:endParaRPr lang="en-US" sz="1300" dirty="0"/>
+          </a:p>
+        </p:txBody>
+      </p:sp>
+      <p:sp>
+        <p:nvSpPr>
+          <p:cNvPr id="9" name="Text 7"/>
+          <p:cNvSpPr/>
+          <p:nvPr/>
+        </p:nvSpPr>
+        <p:spPr>
+          <a:xfrm>
+            <a:off x="1106424" y="4590288"/>
+            <a:ext cx="1038301" cy="365760"/>
           </a:xfrm>
           <a:prstGeom prst="rect">
             <a:avLst/>
@@ -1671,13 +1585,13 @@
           <a:bodyPr wrap="square" lIns="0" tIns="0" rIns="0" bIns="0" rtlCol="0" anchor="ctr"/>
           <a:lstStyle/>
           <a:p>
-            <a:pPr algn="r" indent="0" marL="0">
-              <a:buNone/>
-            </a:pPr>
-            <a:r>
-              <a:rPr lang="en-US" sz="950" dirty="0">
-                <a:solidFill>
-                  <a:srgbClr val="567480"/>
+            <a:pPr indent="0" marL="0">
+              <a:buNone/>
+            </a:pPr>
+            <a:r>
+              <a:rPr lang="en-US" sz="900" dirty="0">
+                <a:solidFill>
+                  <a:srgbClr val="FFFFFF"/>
                 </a:solidFill>
                 <a:latin typeface="Calibri" pitchFamily="34" charset="0"/>
                 <a:ea typeface="Calibri" pitchFamily="34" charset="-122"/>
@@ -1685,56 +1599,50 @@
               </a:rPr>
               <a:t>10 · 2 berths</a:t>
             </a:r>
-            <a:endParaRPr lang="en-US" sz="950" dirty="0"/>
-          </a:p>
-        </p:txBody>
-      </p:sp>
-      <p:sp>
-        <p:nvSpPr>
-          <p:cNvPr id="7" name="Shape 5"/>
-          <p:cNvSpPr/>
-          <p:nvPr/>
-        </p:nvSpPr>
-        <p:spPr>
-          <a:xfrm>
-            <a:off x="6095848" y="1892808"/>
-            <a:ext cx="0" cy="219456"/>
-          </a:xfrm>
-          <a:prstGeom prst="line">
-            <a:avLst/>
-          </a:prstGeom>
-          <a:noFill/>
-          <a:ln w="25400">
+            <a:endParaRPr lang="en-US" sz="900" dirty="0"/>
+          </a:p>
+        </p:txBody>
+      </p:sp>
+      <p:sp>
+        <p:nvSpPr>
+          <p:cNvPr id="10" name="Shape 8"/>
+          <p:cNvSpPr/>
+          <p:nvPr/>
+        </p:nvSpPr>
+        <p:spPr>
+          <a:xfrm>
+            <a:off x="2364181" y="3982212"/>
+            <a:ext cx="310896" cy="219456"/>
+          </a:xfrm>
+          <a:prstGeom prst="rightArrow">
+            <a:avLst/>
+          </a:prstGeom>
+          <a:solidFill>
+            <a:srgbClr val="8B98A6"/>
+          </a:solidFill>
+          <a:ln/>
+        </p:spPr>
+      </p:sp>
+      <p:sp>
+        <p:nvSpPr>
+          <p:cNvPr id="11" name="Shape 9"/>
+          <p:cNvSpPr/>
+          <p:nvPr/>
+        </p:nvSpPr>
+        <p:spPr>
+          <a:xfrm>
+            <a:off x="2748229" y="3108960"/>
+            <a:ext cx="1330909" cy="1965960"/>
+          </a:xfrm>
+          <a:prstGeom prst="roundRect">
+            <a:avLst/>
+          </a:prstGeom>
+          <a:solidFill>
+            <a:srgbClr val="C13B15"/>
+          </a:solidFill>
+          <a:ln w="12700">
             <a:solidFill>
-              <a:srgbClr val="4F98B8"/>
-            </a:solidFill>
-            <a:prstDash val="solid"/>
-            <a:tailEnd type="triangle"/>
-          </a:ln>
-        </p:spPr>
-      </p:sp>
-      <p:sp>
-        <p:nvSpPr>
-          <p:cNvPr id="8" name="Shape 6"/>
-          <p:cNvSpPr/>
-          <p:nvPr/>
-        </p:nvSpPr>
-        <p:spPr>
-          <a:xfrm>
-            <a:off x="3992728" y="2112264"/>
-            <a:ext cx="4206240" cy="658368"/>
-          </a:xfrm>
-          <a:prstGeom prst="roundRect">
-            <a:avLst>
-              <a:gd name="adj" fmla="val 11111"/>
-            </a:avLst>
-          </a:prstGeom>
-          <a:solidFill>
-            <a:srgbClr val="EDF4F8"/>
-          </a:solidFill>
-          <a:ln w="17780">
-            <a:solidFill>
-              <a:srgbClr val="4F98B8"/>
+              <a:srgbClr val="C13B15"/>
             </a:solidFill>
             <a:prstDash val="solid"/>
           </a:ln>
@@ -1742,34 +1650,14 @@
       </p:sp>
       <p:sp>
         <p:nvSpPr>
-          <p:cNvPr id="9" name="Shape 7"/>
-          <p:cNvSpPr/>
-          <p:nvPr/>
-        </p:nvSpPr>
-        <p:spPr>
-          <a:xfrm>
-            <a:off x="4193896" y="2359152"/>
-            <a:ext cx="164592" cy="164592"/>
-          </a:xfrm>
-          <a:prstGeom prst="ellipse">
-            <a:avLst/>
-          </a:prstGeom>
-          <a:solidFill>
-            <a:srgbClr val="4F98B8"/>
-          </a:solidFill>
-          <a:ln/>
-        </p:spPr>
-      </p:sp>
-      <p:sp>
-        <p:nvSpPr>
-          <p:cNvPr id="10" name="Text 8"/>
-          <p:cNvSpPr/>
-          <p:nvPr/>
-        </p:nvSpPr>
-        <p:spPr>
-          <a:xfrm>
-            <a:off x="4495648" y="2112264"/>
-            <a:ext cx="2194560" cy="658368"/>
+          <p:cNvPr id="12" name="Text 10"/>
+          <p:cNvSpPr/>
+          <p:nvPr/>
+        </p:nvSpPr>
+        <p:spPr>
+          <a:xfrm>
+            <a:off x="2894533" y="3291840"/>
+            <a:ext cx="1038301" cy="320040"/>
           </a:xfrm>
           <a:prstGeom prst="rect">
             <a:avLst/>
@@ -1785,30 +1673,156 @@
               <a:buNone/>
             </a:pPr>
             <a:r>
-              <a:rPr lang="en-US" sz="1350" b="1" dirty="0">
-                <a:solidFill>
-                  <a:srgbClr val="112634"/>
+              <a:rPr lang="en-US" sz="1100" dirty="0">
+                <a:solidFill>
+                  <a:srgbClr val="FFFFFF"/>
+                </a:solidFill>
+                <a:latin typeface="Consolas" pitchFamily="34" charset="0"/>
+                <a:ea typeface="Consolas" pitchFamily="34" charset="-122"/>
+                <a:cs typeface="Consolas" pitchFamily="34" charset="-120"/>
+              </a:rPr>
+              <a:t>02</a:t>
+            </a:r>
+            <a:endParaRPr lang="en-US" sz="1100" dirty="0"/>
+          </a:p>
+        </p:txBody>
+      </p:sp>
+      <p:sp>
+        <p:nvSpPr>
+          <p:cNvPr id="13" name="Text 11"/>
+          <p:cNvSpPr/>
+          <p:nvPr/>
+        </p:nvSpPr>
+        <p:spPr>
+          <a:xfrm>
+            <a:off x="2894533" y="3730752"/>
+            <a:ext cx="1038301" cy="868680"/>
+          </a:xfrm>
+          <a:prstGeom prst="rect">
+            <a:avLst/>
+          </a:prstGeom>
+          <a:noFill/>
+          <a:ln/>
+        </p:spPr>
+        <p:txBody>
+          <a:bodyPr wrap="square" lIns="0" tIns="0" rIns="0" bIns="0" rtlCol="0" anchor="t"/>
+          <a:lstStyle/>
+          <a:p>
+            <a:pPr indent="0" marL="0">
+              <a:lnSpc>
+                <a:spcPct val="96000"/>
+              </a:lnSpc>
+              <a:buNone/>
+            </a:pPr>
+            <a:r>
+              <a:rPr lang="en-US" sz="1300" b="1" dirty="0">
+                <a:solidFill>
+                  <a:srgbClr val="FFFFFF"/>
+                </a:solidFill>
+                <a:latin typeface="Times New Roman" pitchFamily="34" charset="0"/>
+                <a:ea typeface="Times New Roman" pitchFamily="34" charset="-122"/>
+                <a:cs typeface="Times New Roman" pitchFamily="34" charset="-120"/>
+              </a:rPr>
+              <a:t>Fog node</a:t>
+            </a:r>
+            <a:endParaRPr lang="en-US" sz="1300" dirty="0"/>
+          </a:p>
+        </p:txBody>
+      </p:sp>
+      <p:sp>
+        <p:nvSpPr>
+          <p:cNvPr id="14" name="Text 12"/>
+          <p:cNvSpPr/>
+          <p:nvPr/>
+        </p:nvSpPr>
+        <p:spPr>
+          <a:xfrm>
+            <a:off x="2894533" y="4590288"/>
+            <a:ext cx="1038301" cy="365760"/>
+          </a:xfrm>
+          <a:prstGeom prst="rect">
+            <a:avLst/>
+          </a:prstGeom>
+          <a:noFill/>
+          <a:ln/>
+        </p:spPr>
+        <p:txBody>
+          <a:bodyPr wrap="square" lIns="0" tIns="0" rIns="0" bIns="0" rtlCol="0" anchor="ctr"/>
+          <a:lstStyle/>
+          <a:p>
+            <a:pPr indent="0" marL="0">
+              <a:buNone/>
+            </a:pPr>
+            <a:r>
+              <a:rPr lang="en-US" sz="900" dirty="0">
+                <a:solidFill>
+                  <a:srgbClr val="FFFFFF"/>
                 </a:solidFill>
                 <a:latin typeface="Calibri" pitchFamily="34" charset="0"/>
                 <a:ea typeface="Calibri" pitchFamily="34" charset="-122"/>
                 <a:cs typeface="Calibri" pitchFamily="34" charset="-120"/>
               </a:rPr>
-              <a:t>Fog node</a:t>
-            </a:r>
-            <a:endParaRPr lang="en-US" sz="1350" dirty="0"/>
-          </a:p>
-        </p:txBody>
-      </p:sp>
-      <p:sp>
-        <p:nvSpPr>
-          <p:cNvPr id="11" name="Text 9"/>
-          <p:cNvSpPr/>
-          <p:nvPr/>
-        </p:nvSpPr>
-        <p:spPr>
-          <a:xfrm>
-            <a:off x="6644488" y="2112264"/>
-            <a:ext cx="1463040" cy="658368"/>
+              <a:t>windows · safety rules</a:t>
+            </a:r>
+            <a:endParaRPr lang="en-US" sz="900" dirty="0"/>
+          </a:p>
+        </p:txBody>
+      </p:sp>
+      <p:sp>
+        <p:nvSpPr>
+          <p:cNvPr id="15" name="Shape 13"/>
+          <p:cNvSpPr/>
+          <p:nvPr/>
+        </p:nvSpPr>
+        <p:spPr>
+          <a:xfrm>
+            <a:off x="4152290" y="3982212"/>
+            <a:ext cx="310896" cy="219456"/>
+          </a:xfrm>
+          <a:prstGeom prst="rightArrow">
+            <a:avLst/>
+          </a:prstGeom>
+          <a:solidFill>
+            <a:srgbClr val="8B98A6"/>
+          </a:solidFill>
+          <a:ln/>
+        </p:spPr>
+      </p:sp>
+      <p:sp>
+        <p:nvSpPr>
+          <p:cNvPr id="16" name="Shape 14"/>
+          <p:cNvSpPr/>
+          <p:nvPr/>
+        </p:nvSpPr>
+        <p:spPr>
+          <a:xfrm>
+            <a:off x="4536338" y="3108960"/>
+            <a:ext cx="1330909" cy="1965960"/>
+          </a:xfrm>
+          <a:prstGeom prst="roundRect">
+            <a:avLst/>
+          </a:prstGeom>
+          <a:solidFill>
+            <a:srgbClr val="1C4E6B"/>
+          </a:solidFill>
+          <a:ln w="12700">
+            <a:solidFill>
+              <a:srgbClr val="30627F"/>
+            </a:solidFill>
+            <a:prstDash val="solid"/>
+          </a:ln>
+        </p:spPr>
+      </p:sp>
+      <p:sp>
+        <p:nvSpPr>
+          <p:cNvPr id="17" name="Text 15"/>
+          <p:cNvSpPr/>
+          <p:nvPr/>
+        </p:nvSpPr>
+        <p:spPr>
+          <a:xfrm>
+            <a:off x="4682642" y="3291840"/>
+            <a:ext cx="1038301" cy="320040"/>
           </a:xfrm>
           <a:prstGeom prst="rect">
             <a:avLst/>
@@ -1820,70 +1834,145 @@
           <a:bodyPr wrap="square" lIns="0" tIns="0" rIns="0" bIns="0" rtlCol="0" anchor="ctr"/>
           <a:lstStyle/>
           <a:p>
-            <a:pPr algn="r" indent="0" marL="0">
-              <a:buNone/>
-            </a:pPr>
-            <a:r>
-              <a:rPr lang="en-US" sz="950" dirty="0">
-                <a:solidFill>
-                  <a:srgbClr val="567480"/>
+            <a:pPr indent="0" marL="0">
+              <a:buNone/>
+            </a:pPr>
+            <a:r>
+              <a:rPr lang="en-US" sz="1100" dirty="0">
+                <a:solidFill>
+                  <a:srgbClr val="C13B15"/>
+                </a:solidFill>
+                <a:latin typeface="Consolas" pitchFamily="34" charset="0"/>
+                <a:ea typeface="Consolas" pitchFamily="34" charset="-122"/>
+                <a:cs typeface="Consolas" pitchFamily="34" charset="-120"/>
+              </a:rPr>
+              <a:t>03</a:t>
+            </a:r>
+            <a:endParaRPr lang="en-US" sz="1100" dirty="0"/>
+          </a:p>
+        </p:txBody>
+      </p:sp>
+      <p:sp>
+        <p:nvSpPr>
+          <p:cNvPr id="18" name="Text 16"/>
+          <p:cNvSpPr/>
+          <p:nvPr/>
+        </p:nvSpPr>
+        <p:spPr>
+          <a:xfrm>
+            <a:off x="4682642" y="3730752"/>
+            <a:ext cx="1038301" cy="868680"/>
+          </a:xfrm>
+          <a:prstGeom prst="rect">
+            <a:avLst/>
+          </a:prstGeom>
+          <a:noFill/>
+          <a:ln/>
+        </p:spPr>
+        <p:txBody>
+          <a:bodyPr wrap="square" lIns="0" tIns="0" rIns="0" bIns="0" rtlCol="0" anchor="t"/>
+          <a:lstStyle/>
+          <a:p>
+            <a:pPr indent="0" marL="0">
+              <a:lnSpc>
+                <a:spcPct val="96000"/>
+              </a:lnSpc>
+              <a:buNone/>
+            </a:pPr>
+            <a:r>
+              <a:rPr lang="en-US" sz="1300" b="1" dirty="0">
+                <a:solidFill>
+                  <a:srgbClr val="EEF4F8"/>
+                </a:solidFill>
+                <a:latin typeface="Times New Roman" pitchFamily="34" charset="0"/>
+                <a:ea typeface="Times New Roman" pitchFamily="34" charset="-122"/>
+                <a:cs typeface="Times New Roman" pitchFamily="34" charset="-120"/>
+              </a:rPr>
+              <a:t>Amazon SQS</a:t>
+            </a:r>
+            <a:endParaRPr lang="en-US" sz="1300" dirty="0"/>
+          </a:p>
+        </p:txBody>
+      </p:sp>
+      <p:sp>
+        <p:nvSpPr>
+          <p:cNvPr id="19" name="Text 17"/>
+          <p:cNvSpPr/>
+          <p:nvPr/>
+        </p:nvSpPr>
+        <p:spPr>
+          <a:xfrm>
+            <a:off x="4682642" y="4590288"/>
+            <a:ext cx="1038301" cy="365760"/>
+          </a:xfrm>
+          <a:prstGeom prst="rect">
+            <a:avLst/>
+          </a:prstGeom>
+          <a:noFill/>
+          <a:ln/>
+        </p:spPr>
+        <p:txBody>
+          <a:bodyPr wrap="square" lIns="0" tIns="0" rIns="0" bIns="0" rtlCol="0" anchor="ctr"/>
+          <a:lstStyle/>
+          <a:p>
+            <a:pPr indent="0" marL="0">
+              <a:buNone/>
+            </a:pPr>
+            <a:r>
+              <a:rPr lang="en-US" sz="900" dirty="0">
+                <a:solidFill>
+                  <a:srgbClr val="8B98A6"/>
                 </a:solidFill>
                 <a:latin typeface="Calibri" pitchFamily="34" charset="0"/>
                 <a:ea typeface="Calibri" pitchFamily="34" charset="-122"/>
                 <a:cs typeface="Calibri" pitchFamily="34" charset="-120"/>
               </a:rPr>
-              <a:t>windows · safety rules</a:t>
-            </a:r>
-            <a:endParaRPr lang="en-US" sz="950" dirty="0"/>
-          </a:p>
-        </p:txBody>
-      </p:sp>
-      <p:sp>
-        <p:nvSpPr>
-          <p:cNvPr id="12" name="Shape 10"/>
-          <p:cNvSpPr/>
-          <p:nvPr/>
-        </p:nvSpPr>
-        <p:spPr>
-          <a:xfrm>
-            <a:off x="6095848" y="2770632"/>
-            <a:ext cx="0" cy="219456"/>
-          </a:xfrm>
-          <a:prstGeom prst="line">
-            <a:avLst/>
-          </a:prstGeom>
-          <a:noFill/>
-          <a:ln w="25400">
+              <a:t>1 batched msg / cycle</a:t>
+            </a:r>
+            <a:endParaRPr lang="en-US" sz="900" dirty="0"/>
+          </a:p>
+        </p:txBody>
+      </p:sp>
+      <p:sp>
+        <p:nvSpPr>
+          <p:cNvPr id="20" name="Shape 18"/>
+          <p:cNvSpPr/>
+          <p:nvPr/>
+        </p:nvSpPr>
+        <p:spPr>
+          <a:xfrm>
+            <a:off x="5940400" y="3982212"/>
+            <a:ext cx="310896" cy="219456"/>
+          </a:xfrm>
+          <a:prstGeom prst="rightArrow">
+            <a:avLst/>
+          </a:prstGeom>
+          <a:solidFill>
+            <a:srgbClr val="8B98A6"/>
+          </a:solidFill>
+          <a:ln/>
+        </p:spPr>
+      </p:sp>
+      <p:sp>
+        <p:nvSpPr>
+          <p:cNvPr id="21" name="Shape 19"/>
+          <p:cNvSpPr/>
+          <p:nvPr/>
+        </p:nvSpPr>
+        <p:spPr>
+          <a:xfrm>
+            <a:off x="6324448" y="3108960"/>
+            <a:ext cx="1330909" cy="1965960"/>
+          </a:xfrm>
+          <a:prstGeom prst="roundRect">
+            <a:avLst/>
+          </a:prstGeom>
+          <a:solidFill>
+            <a:srgbClr val="1C4E6B"/>
+          </a:solidFill>
+          <a:ln w="12700">
             <a:solidFill>
-              <a:srgbClr val="4F98B8"/>
-            </a:solidFill>
-            <a:prstDash val="solid"/>
-            <a:tailEnd type="triangle"/>
-          </a:ln>
-        </p:spPr>
-      </p:sp>
-      <p:sp>
-        <p:nvSpPr>
-          <p:cNvPr id="13" name="Shape 11"/>
-          <p:cNvSpPr/>
-          <p:nvPr/>
-        </p:nvSpPr>
-        <p:spPr>
-          <a:xfrm>
-            <a:off x="3992728" y="2990088"/>
-            <a:ext cx="4206240" cy="658368"/>
-          </a:xfrm>
-          <a:prstGeom prst="roundRect">
-            <a:avLst>
-              <a:gd name="adj" fmla="val 11111"/>
-            </a:avLst>
-          </a:prstGeom>
-          <a:solidFill>
-            <a:srgbClr val="EDF4F8"/>
-          </a:solidFill>
-          <a:ln w="17780">
-            <a:solidFill>
-              <a:srgbClr val="124C6E"/>
+              <a:srgbClr val="30627F"/>
             </a:solidFill>
             <a:prstDash val="solid"/>
           </a:ln>
@@ -1891,34 +1980,14 @@
       </p:sp>
       <p:sp>
         <p:nvSpPr>
-          <p:cNvPr id="14" name="Shape 12"/>
-          <p:cNvSpPr/>
-          <p:nvPr/>
-        </p:nvSpPr>
-        <p:spPr>
-          <a:xfrm>
-            <a:off x="4193896" y="3236976"/>
-            <a:ext cx="164592" cy="164592"/>
-          </a:xfrm>
-          <a:prstGeom prst="ellipse">
-            <a:avLst/>
-          </a:prstGeom>
-          <a:solidFill>
-            <a:srgbClr val="124C6E"/>
-          </a:solidFill>
-          <a:ln/>
-        </p:spPr>
-      </p:sp>
-      <p:sp>
-        <p:nvSpPr>
-          <p:cNvPr id="15" name="Text 13"/>
-          <p:cNvSpPr/>
-          <p:nvPr/>
-        </p:nvSpPr>
-        <p:spPr>
-          <a:xfrm>
-            <a:off x="4495648" y="2990088"/>
-            <a:ext cx="2194560" cy="658368"/>
+          <p:cNvPr id="22" name="Text 20"/>
+          <p:cNvSpPr/>
+          <p:nvPr/>
+        </p:nvSpPr>
+        <p:spPr>
+          <a:xfrm>
+            <a:off x="6470752" y="3291840"/>
+            <a:ext cx="1038301" cy="320040"/>
           </a:xfrm>
           <a:prstGeom prst="rect">
             <a:avLst/>
@@ -1934,30 +2003,156 @@
               <a:buNone/>
             </a:pPr>
             <a:r>
-              <a:rPr lang="en-US" sz="1350" b="1" dirty="0">
-                <a:solidFill>
-                  <a:srgbClr val="112634"/>
+              <a:rPr lang="en-US" sz="1100" dirty="0">
+                <a:solidFill>
+                  <a:srgbClr val="C13B15"/>
+                </a:solidFill>
+                <a:latin typeface="Consolas" pitchFamily="34" charset="0"/>
+                <a:ea typeface="Consolas" pitchFamily="34" charset="-122"/>
+                <a:cs typeface="Consolas" pitchFamily="34" charset="-120"/>
+              </a:rPr>
+              <a:t>04</a:t>
+            </a:r>
+            <a:endParaRPr lang="en-US" sz="1100" dirty="0"/>
+          </a:p>
+        </p:txBody>
+      </p:sp>
+      <p:sp>
+        <p:nvSpPr>
+          <p:cNvPr id="23" name="Text 21"/>
+          <p:cNvSpPr/>
+          <p:nvPr/>
+        </p:nvSpPr>
+        <p:spPr>
+          <a:xfrm>
+            <a:off x="6470752" y="3730752"/>
+            <a:ext cx="1038301" cy="868680"/>
+          </a:xfrm>
+          <a:prstGeom prst="rect">
+            <a:avLst/>
+          </a:prstGeom>
+          <a:noFill/>
+          <a:ln/>
+        </p:spPr>
+        <p:txBody>
+          <a:bodyPr wrap="square" lIns="0" tIns="0" rIns="0" bIns="0" rtlCol="0" anchor="t"/>
+          <a:lstStyle/>
+          <a:p>
+            <a:pPr indent="0" marL="0">
+              <a:lnSpc>
+                <a:spcPct val="96000"/>
+              </a:lnSpc>
+              <a:buNone/>
+            </a:pPr>
+            <a:r>
+              <a:rPr lang="en-US" sz="1300" b="1" dirty="0">
+                <a:solidFill>
+                  <a:srgbClr val="EEF4F8"/>
+                </a:solidFill>
+                <a:latin typeface="Times New Roman" pitchFamily="34" charset="0"/>
+                <a:ea typeface="Times New Roman" pitchFamily="34" charset="-122"/>
+                <a:cs typeface="Times New Roman" pitchFamily="34" charset="-120"/>
+              </a:rPr>
+              <a:t>AWS Lambda</a:t>
+            </a:r>
+            <a:endParaRPr lang="en-US" sz="1300" dirty="0"/>
+          </a:p>
+        </p:txBody>
+      </p:sp>
+      <p:sp>
+        <p:nvSpPr>
+          <p:cNvPr id="24" name="Text 22"/>
+          <p:cNvSpPr/>
+          <p:nvPr/>
+        </p:nvSpPr>
+        <p:spPr>
+          <a:xfrm>
+            <a:off x="6470752" y="4590288"/>
+            <a:ext cx="1038301" cy="365760"/>
+          </a:xfrm>
+          <a:prstGeom prst="rect">
+            <a:avLst/>
+          </a:prstGeom>
+          <a:noFill/>
+          <a:ln/>
+        </p:spPr>
+        <p:txBody>
+          <a:bodyPr wrap="square" lIns="0" tIns="0" rIns="0" bIns="0" rtlCol="0" anchor="ctr"/>
+          <a:lstStyle/>
+          <a:p>
+            <a:pPr indent="0" marL="0">
+              <a:buNone/>
+            </a:pPr>
+            <a:r>
+              <a:rPr lang="en-US" sz="900" dirty="0">
+                <a:solidFill>
+                  <a:srgbClr val="8B98A6"/>
                 </a:solidFill>
                 <a:latin typeface="Calibri" pitchFamily="34" charset="0"/>
                 <a:ea typeface="Calibri" pitchFamily="34" charset="-122"/>
                 <a:cs typeface="Calibri" pitchFamily="34" charset="-120"/>
               </a:rPr>
-              <a:t>Amazon SQS</a:t>
-            </a:r>
-            <a:endParaRPr lang="en-US" sz="1350" dirty="0"/>
-          </a:p>
-        </p:txBody>
-      </p:sp>
-      <p:sp>
-        <p:nvSpPr>
-          <p:cNvPr id="16" name="Text 14"/>
-          <p:cNvSpPr/>
-          <p:nvPr/>
-        </p:nvSpPr>
-        <p:spPr>
-          <a:xfrm>
-            <a:off x="6644488" y="2990088"/>
-            <a:ext cx="1463040" cy="658368"/>
+              <a:t>java17 ingest</a:t>
+            </a:r>
+            <a:endParaRPr lang="en-US" sz="900" dirty="0"/>
+          </a:p>
+        </p:txBody>
+      </p:sp>
+      <p:sp>
+        <p:nvSpPr>
+          <p:cNvPr id="25" name="Shape 23"/>
+          <p:cNvSpPr/>
+          <p:nvPr/>
+        </p:nvSpPr>
+        <p:spPr>
+          <a:xfrm>
+            <a:off x="7728509" y="3982212"/>
+            <a:ext cx="310896" cy="219456"/>
+          </a:xfrm>
+          <a:prstGeom prst="rightArrow">
+            <a:avLst/>
+          </a:prstGeom>
+          <a:solidFill>
+            <a:srgbClr val="8B98A6"/>
+          </a:solidFill>
+          <a:ln/>
+        </p:spPr>
+      </p:sp>
+      <p:sp>
+        <p:nvSpPr>
+          <p:cNvPr id="26" name="Shape 24"/>
+          <p:cNvSpPr/>
+          <p:nvPr/>
+        </p:nvSpPr>
+        <p:spPr>
+          <a:xfrm>
+            <a:off x="8112557" y="3108960"/>
+            <a:ext cx="1330909" cy="1965960"/>
+          </a:xfrm>
+          <a:prstGeom prst="roundRect">
+            <a:avLst/>
+          </a:prstGeom>
+          <a:solidFill>
+            <a:srgbClr val="1C4E6B"/>
+          </a:solidFill>
+          <a:ln w="12700">
+            <a:solidFill>
+              <a:srgbClr val="30627F"/>
+            </a:solidFill>
+            <a:prstDash val="solid"/>
+          </a:ln>
+        </p:spPr>
+      </p:sp>
+      <p:sp>
+        <p:nvSpPr>
+          <p:cNvPr id="27" name="Text 25"/>
+          <p:cNvSpPr/>
+          <p:nvPr/>
+        </p:nvSpPr>
+        <p:spPr>
+          <a:xfrm>
+            <a:off x="8258861" y="3291840"/>
+            <a:ext cx="1038301" cy="320040"/>
           </a:xfrm>
           <a:prstGeom prst="rect">
             <a:avLst/>
@@ -1969,70 +2164,145 @@
           <a:bodyPr wrap="square" lIns="0" tIns="0" rIns="0" bIns="0" rtlCol="0" anchor="ctr"/>
           <a:lstStyle/>
           <a:p>
-            <a:pPr algn="r" indent="0" marL="0">
-              <a:buNone/>
-            </a:pPr>
-            <a:r>
-              <a:rPr lang="en-US" sz="950" dirty="0">
-                <a:solidFill>
-                  <a:srgbClr val="567480"/>
+            <a:pPr indent="0" marL="0">
+              <a:buNone/>
+            </a:pPr>
+            <a:r>
+              <a:rPr lang="en-US" sz="1100" dirty="0">
+                <a:solidFill>
+                  <a:srgbClr val="C13B15"/>
+                </a:solidFill>
+                <a:latin typeface="Consolas" pitchFamily="34" charset="0"/>
+                <a:ea typeface="Consolas" pitchFamily="34" charset="-122"/>
+                <a:cs typeface="Consolas" pitchFamily="34" charset="-120"/>
+              </a:rPr>
+              <a:t>05</a:t>
+            </a:r>
+            <a:endParaRPr lang="en-US" sz="1100" dirty="0"/>
+          </a:p>
+        </p:txBody>
+      </p:sp>
+      <p:sp>
+        <p:nvSpPr>
+          <p:cNvPr id="28" name="Text 26"/>
+          <p:cNvSpPr/>
+          <p:nvPr/>
+        </p:nvSpPr>
+        <p:spPr>
+          <a:xfrm>
+            <a:off x="8258861" y="3730752"/>
+            <a:ext cx="1038301" cy="868680"/>
+          </a:xfrm>
+          <a:prstGeom prst="rect">
+            <a:avLst/>
+          </a:prstGeom>
+          <a:noFill/>
+          <a:ln/>
+        </p:spPr>
+        <p:txBody>
+          <a:bodyPr wrap="square" lIns="0" tIns="0" rIns="0" bIns="0" rtlCol="0" anchor="t"/>
+          <a:lstStyle/>
+          <a:p>
+            <a:pPr indent="0" marL="0">
+              <a:lnSpc>
+                <a:spcPct val="96000"/>
+              </a:lnSpc>
+              <a:buNone/>
+            </a:pPr>
+            <a:r>
+              <a:rPr lang="en-US" sz="1300" b="1" dirty="0">
+                <a:solidFill>
+                  <a:srgbClr val="EEF4F8"/>
+                </a:solidFill>
+                <a:latin typeface="Times New Roman" pitchFamily="34" charset="0"/>
+                <a:ea typeface="Times New Roman" pitchFamily="34" charset="-122"/>
+                <a:cs typeface="Times New Roman" pitchFamily="34" charset="-120"/>
+              </a:rPr>
+              <a:t>DynamoDB</a:t>
+            </a:r>
+            <a:endParaRPr lang="en-US" sz="1300" dirty="0"/>
+          </a:p>
+        </p:txBody>
+      </p:sp>
+      <p:sp>
+        <p:nvSpPr>
+          <p:cNvPr id="29" name="Text 27"/>
+          <p:cNvSpPr/>
+          <p:nvPr/>
+        </p:nvSpPr>
+        <p:spPr>
+          <a:xfrm>
+            <a:off x="8258861" y="4590288"/>
+            <a:ext cx="1038301" cy="365760"/>
+          </a:xfrm>
+          <a:prstGeom prst="rect">
+            <a:avLst/>
+          </a:prstGeom>
+          <a:noFill/>
+          <a:ln/>
+        </p:spPr>
+        <p:txBody>
+          <a:bodyPr wrap="square" lIns="0" tIns="0" rIns="0" bIns="0" rtlCol="0" anchor="ctr"/>
+          <a:lstStyle/>
+          <a:p>
+            <a:pPr indent="0" marL="0">
+              <a:buNone/>
+            </a:pPr>
+            <a:r>
+              <a:rPr lang="en-US" sz="900" dirty="0">
+                <a:solidFill>
+                  <a:srgbClr val="8B98A6"/>
                 </a:solidFill>
                 <a:latin typeface="Calibri" pitchFamily="34" charset="0"/>
                 <a:ea typeface="Calibri" pitchFamily="34" charset="-122"/>
                 <a:cs typeface="Calibri" pitchFamily="34" charset="-120"/>
               </a:rPr>
-              <a:t>1 batched msg / cycle</a:t>
-            </a:r>
-            <a:endParaRPr lang="en-US" sz="950" dirty="0"/>
-          </a:p>
-        </p:txBody>
-      </p:sp>
-      <p:sp>
-        <p:nvSpPr>
-          <p:cNvPr id="17" name="Shape 15"/>
-          <p:cNvSpPr/>
-          <p:nvPr/>
-        </p:nvSpPr>
-        <p:spPr>
-          <a:xfrm>
-            <a:off x="6095848" y="3648456"/>
-            <a:ext cx="0" cy="219456"/>
-          </a:xfrm>
-          <a:prstGeom prst="line">
-            <a:avLst/>
-          </a:prstGeom>
-          <a:noFill/>
-          <a:ln w="25400">
+              <a:t>time-ordered store</a:t>
+            </a:r>
+            <a:endParaRPr lang="en-US" sz="900" dirty="0"/>
+          </a:p>
+        </p:txBody>
+      </p:sp>
+      <p:sp>
+        <p:nvSpPr>
+          <p:cNvPr id="30" name="Shape 28"/>
+          <p:cNvSpPr/>
+          <p:nvPr/>
+        </p:nvSpPr>
+        <p:spPr>
+          <a:xfrm>
+            <a:off x="9516618" y="3982212"/>
+            <a:ext cx="310896" cy="219456"/>
+          </a:xfrm>
+          <a:prstGeom prst="rightArrow">
+            <a:avLst/>
+          </a:prstGeom>
+          <a:solidFill>
+            <a:srgbClr val="8B98A6"/>
+          </a:solidFill>
+          <a:ln/>
+        </p:spPr>
+      </p:sp>
+      <p:sp>
+        <p:nvSpPr>
+          <p:cNvPr id="31" name="Shape 29"/>
+          <p:cNvSpPr/>
+          <p:nvPr/>
+        </p:nvSpPr>
+        <p:spPr>
+          <a:xfrm>
+            <a:off x="9900666" y="3108960"/>
+            <a:ext cx="1330909" cy="1965960"/>
+          </a:xfrm>
+          <a:prstGeom prst="roundRect">
+            <a:avLst/>
+          </a:prstGeom>
+          <a:solidFill>
+            <a:srgbClr val="1C4E6B"/>
+          </a:solidFill>
+          <a:ln w="12700">
             <a:solidFill>
-              <a:srgbClr val="4F98B8"/>
-            </a:solidFill>
-            <a:prstDash val="solid"/>
-            <a:tailEnd type="triangle"/>
-          </a:ln>
-        </p:spPr>
-      </p:sp>
-      <p:sp>
-        <p:nvSpPr>
-          <p:cNvPr id="18" name="Shape 16"/>
-          <p:cNvSpPr/>
-          <p:nvPr/>
-        </p:nvSpPr>
-        <p:spPr>
-          <a:xfrm>
-            <a:off x="3992728" y="3867912"/>
-            <a:ext cx="4206240" cy="658368"/>
-          </a:xfrm>
-          <a:prstGeom prst="roundRect">
-            <a:avLst>
-              <a:gd name="adj" fmla="val 11111"/>
-            </a:avLst>
-          </a:prstGeom>
-          <a:solidFill>
-            <a:srgbClr val="EDF4F8"/>
-          </a:solidFill>
-          <a:ln w="17780">
-            <a:solidFill>
-              <a:srgbClr val="124C6E"/>
+              <a:srgbClr val="30627F"/>
             </a:solidFill>
             <a:prstDash val="solid"/>
           </a:ln>
@@ -2040,34 +2310,14 @@
       </p:sp>
       <p:sp>
         <p:nvSpPr>
-          <p:cNvPr id="19" name="Shape 17"/>
-          <p:cNvSpPr/>
-          <p:nvPr/>
-        </p:nvSpPr>
-        <p:spPr>
-          <a:xfrm>
-            <a:off x="4193896" y="4114800"/>
-            <a:ext cx="164592" cy="164592"/>
-          </a:xfrm>
-          <a:prstGeom prst="ellipse">
-            <a:avLst/>
-          </a:prstGeom>
-          <a:solidFill>
-            <a:srgbClr val="124C6E"/>
-          </a:solidFill>
-          <a:ln/>
-        </p:spPr>
-      </p:sp>
-      <p:sp>
-        <p:nvSpPr>
-          <p:cNvPr id="20" name="Text 18"/>
-          <p:cNvSpPr/>
-          <p:nvPr/>
-        </p:nvSpPr>
-        <p:spPr>
-          <a:xfrm>
-            <a:off x="4495648" y="3867912"/>
-            <a:ext cx="2194560" cy="658368"/>
+          <p:cNvPr id="32" name="Text 30"/>
+          <p:cNvSpPr/>
+          <p:nvPr/>
+        </p:nvSpPr>
+        <p:spPr>
+          <a:xfrm>
+            <a:off x="10046970" y="3291840"/>
+            <a:ext cx="1038301" cy="320040"/>
           </a:xfrm>
           <a:prstGeom prst="rect">
             <a:avLst/>
@@ -2083,471 +2333,98 @@
               <a:buNone/>
             </a:pPr>
             <a:r>
-              <a:rPr lang="en-US" sz="1350" b="1" dirty="0">
-                <a:solidFill>
-                  <a:srgbClr val="112634"/>
+              <a:rPr lang="en-US" sz="1100" dirty="0">
+                <a:solidFill>
+                  <a:srgbClr val="C13B15"/>
+                </a:solidFill>
+                <a:latin typeface="Consolas" pitchFamily="34" charset="0"/>
+                <a:ea typeface="Consolas" pitchFamily="34" charset="-122"/>
+                <a:cs typeface="Consolas" pitchFamily="34" charset="-120"/>
+              </a:rPr>
+              <a:t>06</a:t>
+            </a:r>
+            <a:endParaRPr lang="en-US" sz="1100" dirty="0"/>
+          </a:p>
+        </p:txBody>
+      </p:sp>
+      <p:sp>
+        <p:nvSpPr>
+          <p:cNvPr id="33" name="Text 31"/>
+          <p:cNvSpPr/>
+          <p:nvPr/>
+        </p:nvSpPr>
+        <p:spPr>
+          <a:xfrm>
+            <a:off x="10046970" y="3730752"/>
+            <a:ext cx="1038301" cy="868680"/>
+          </a:xfrm>
+          <a:prstGeom prst="rect">
+            <a:avLst/>
+          </a:prstGeom>
+          <a:noFill/>
+          <a:ln/>
+        </p:spPr>
+        <p:txBody>
+          <a:bodyPr wrap="square" lIns="0" tIns="0" rIns="0" bIns="0" rtlCol="0" anchor="t"/>
+          <a:lstStyle/>
+          <a:p>
+            <a:pPr indent="0" marL="0">
+              <a:lnSpc>
+                <a:spcPct val="96000"/>
+              </a:lnSpc>
+              <a:buNone/>
+            </a:pPr>
+            <a:r>
+              <a:rPr lang="en-US" sz="1300" b="1" dirty="0">
+                <a:solidFill>
+                  <a:srgbClr val="EEF4F8"/>
+                </a:solidFill>
+                <a:latin typeface="Times New Roman" pitchFamily="34" charset="0"/>
+                <a:ea typeface="Times New Roman" pitchFamily="34" charset="-122"/>
+                <a:cs typeface="Times New Roman" pitchFamily="34" charset="-120"/>
+              </a:rPr>
+              <a:t>API GW + S3</a:t>
+            </a:r>
+            <a:endParaRPr lang="en-US" sz="1300" dirty="0"/>
+          </a:p>
+        </p:txBody>
+      </p:sp>
+      <p:sp>
+        <p:nvSpPr>
+          <p:cNvPr id="34" name="Text 32"/>
+          <p:cNvSpPr/>
+          <p:nvPr/>
+        </p:nvSpPr>
+        <p:spPr>
+          <a:xfrm>
+            <a:off x="10046970" y="4590288"/>
+            <a:ext cx="1038301" cy="365760"/>
+          </a:xfrm>
+          <a:prstGeom prst="rect">
+            <a:avLst/>
+          </a:prstGeom>
+          <a:noFill/>
+          <a:ln/>
+        </p:spPr>
+        <p:txBody>
+          <a:bodyPr wrap="square" lIns="0" tIns="0" rIns="0" bIns="0" rtlCol="0" anchor="ctr"/>
+          <a:lstStyle/>
+          <a:p>
+            <a:pPr indent="0" marL="0">
+              <a:buNone/>
+            </a:pPr>
+            <a:r>
+              <a:rPr lang="en-US" sz="900" dirty="0">
+                <a:solidFill>
+                  <a:srgbClr val="8B98A6"/>
                 </a:solidFill>
                 <a:latin typeface="Calibri" pitchFamily="34" charset="0"/>
                 <a:ea typeface="Calibri" pitchFamily="34" charset="-122"/>
                 <a:cs typeface="Calibri" pitchFamily="34" charset="-120"/>
               </a:rPr>
-              <a:t>AWS Lambda</a:t>
-            </a:r>
-            <a:endParaRPr lang="en-US" sz="1350" dirty="0"/>
-          </a:p>
-        </p:txBody>
-      </p:sp>
-      <p:sp>
-        <p:nvSpPr>
-          <p:cNvPr id="21" name="Text 19"/>
-          <p:cNvSpPr/>
-          <p:nvPr/>
-        </p:nvSpPr>
-        <p:spPr>
-          <a:xfrm>
-            <a:off x="6644488" y="3867912"/>
-            <a:ext cx="1463040" cy="658368"/>
-          </a:xfrm>
-          <a:prstGeom prst="rect">
-            <a:avLst/>
-          </a:prstGeom>
-          <a:noFill/>
-          <a:ln/>
-        </p:spPr>
-        <p:txBody>
-          <a:bodyPr wrap="square" lIns="0" tIns="0" rIns="0" bIns="0" rtlCol="0" anchor="ctr"/>
-          <a:lstStyle/>
-          <a:p>
-            <a:pPr algn="r" indent="0" marL="0">
-              <a:buNone/>
-            </a:pPr>
-            <a:r>
-              <a:rPr lang="en-US" sz="950" dirty="0">
-                <a:solidFill>
-                  <a:srgbClr val="567480"/>
-                </a:solidFill>
-                <a:latin typeface="Calibri" pitchFamily="34" charset="0"/>
-                <a:ea typeface="Calibri" pitchFamily="34" charset="-122"/>
-                <a:cs typeface="Calibri" pitchFamily="34" charset="-120"/>
-              </a:rPr>
-              <a:t>java17 ingest</a:t>
-            </a:r>
-            <a:endParaRPr lang="en-US" sz="950" dirty="0"/>
-          </a:p>
-        </p:txBody>
-      </p:sp>
-      <p:sp>
-        <p:nvSpPr>
-          <p:cNvPr id="22" name="Shape 20"/>
-          <p:cNvSpPr/>
-          <p:nvPr/>
-        </p:nvSpPr>
-        <p:spPr>
-          <a:xfrm>
-            <a:off x="6095848" y="4526280"/>
-            <a:ext cx="0" cy="219456"/>
-          </a:xfrm>
-          <a:prstGeom prst="line">
-            <a:avLst/>
-          </a:prstGeom>
-          <a:noFill/>
-          <a:ln w="25400">
-            <a:solidFill>
-              <a:srgbClr val="4F98B8"/>
-            </a:solidFill>
-            <a:prstDash val="solid"/>
-            <a:tailEnd type="triangle"/>
-          </a:ln>
-        </p:spPr>
-      </p:sp>
-      <p:sp>
-        <p:nvSpPr>
-          <p:cNvPr id="23" name="Shape 21"/>
-          <p:cNvSpPr/>
-          <p:nvPr/>
-        </p:nvSpPr>
-        <p:spPr>
-          <a:xfrm>
-            <a:off x="3992728" y="4745736"/>
-            <a:ext cx="4206240" cy="658368"/>
-          </a:xfrm>
-          <a:prstGeom prst="roundRect">
-            <a:avLst>
-              <a:gd name="adj" fmla="val 11111"/>
-            </a:avLst>
-          </a:prstGeom>
-          <a:solidFill>
-            <a:srgbClr val="EDF4F8"/>
-          </a:solidFill>
-          <a:ln w="17780">
-            <a:solidFill>
-              <a:srgbClr val="124C6E"/>
-            </a:solidFill>
-            <a:prstDash val="solid"/>
-          </a:ln>
-        </p:spPr>
-      </p:sp>
-      <p:sp>
-        <p:nvSpPr>
-          <p:cNvPr id="24" name="Shape 22"/>
-          <p:cNvSpPr/>
-          <p:nvPr/>
-        </p:nvSpPr>
-        <p:spPr>
-          <a:xfrm>
-            <a:off x="4193896" y="4992624"/>
-            <a:ext cx="164592" cy="164592"/>
-          </a:xfrm>
-          <a:prstGeom prst="ellipse">
-            <a:avLst/>
-          </a:prstGeom>
-          <a:solidFill>
-            <a:srgbClr val="124C6E"/>
-          </a:solidFill>
-          <a:ln/>
-        </p:spPr>
-      </p:sp>
-      <p:sp>
-        <p:nvSpPr>
-          <p:cNvPr id="25" name="Text 23"/>
-          <p:cNvSpPr/>
-          <p:nvPr/>
-        </p:nvSpPr>
-        <p:spPr>
-          <a:xfrm>
-            <a:off x="4495648" y="4745736"/>
-            <a:ext cx="2194560" cy="658368"/>
-          </a:xfrm>
-          <a:prstGeom prst="rect">
-            <a:avLst/>
-          </a:prstGeom>
-          <a:noFill/>
-          <a:ln/>
-        </p:spPr>
-        <p:txBody>
-          <a:bodyPr wrap="square" lIns="0" tIns="0" rIns="0" bIns="0" rtlCol="0" anchor="ctr"/>
-          <a:lstStyle/>
-          <a:p>
-            <a:pPr indent="0" marL="0">
-              <a:buNone/>
-            </a:pPr>
-            <a:r>
-              <a:rPr lang="en-US" sz="1350" b="1" dirty="0">
-                <a:solidFill>
-                  <a:srgbClr val="112634"/>
-                </a:solidFill>
-                <a:latin typeface="Calibri" pitchFamily="34" charset="0"/>
-                <a:ea typeface="Calibri" pitchFamily="34" charset="-122"/>
-                <a:cs typeface="Calibri" pitchFamily="34" charset="-120"/>
-              </a:rPr>
-              <a:t>DynamoDB</a:t>
-            </a:r>
-            <a:endParaRPr lang="en-US" sz="1350" dirty="0"/>
-          </a:p>
-        </p:txBody>
-      </p:sp>
-      <p:sp>
-        <p:nvSpPr>
-          <p:cNvPr id="26" name="Text 24"/>
-          <p:cNvSpPr/>
-          <p:nvPr/>
-        </p:nvSpPr>
-        <p:spPr>
-          <a:xfrm>
-            <a:off x="6644488" y="4745736"/>
-            <a:ext cx="1463040" cy="658368"/>
-          </a:xfrm>
-          <a:prstGeom prst="rect">
-            <a:avLst/>
-          </a:prstGeom>
-          <a:noFill/>
-          <a:ln/>
-        </p:spPr>
-        <p:txBody>
-          <a:bodyPr wrap="square" lIns="0" tIns="0" rIns="0" bIns="0" rtlCol="0" anchor="ctr"/>
-          <a:lstStyle/>
-          <a:p>
-            <a:pPr algn="r" indent="0" marL="0">
-              <a:buNone/>
-            </a:pPr>
-            <a:r>
-              <a:rPr lang="en-US" sz="950" dirty="0">
-                <a:solidFill>
-                  <a:srgbClr val="567480"/>
-                </a:solidFill>
-                <a:latin typeface="Calibri" pitchFamily="34" charset="0"/>
-                <a:ea typeface="Calibri" pitchFamily="34" charset="-122"/>
-                <a:cs typeface="Calibri" pitchFamily="34" charset="-120"/>
-              </a:rPr>
-              <a:t>time-ordered store</a:t>
-            </a:r>
-            <a:endParaRPr lang="en-US" sz="950" dirty="0"/>
-          </a:p>
-        </p:txBody>
-      </p:sp>
-      <p:sp>
-        <p:nvSpPr>
-          <p:cNvPr id="27" name="Shape 25"/>
-          <p:cNvSpPr/>
-          <p:nvPr/>
-        </p:nvSpPr>
-        <p:spPr>
-          <a:xfrm>
-            <a:off x="6095848" y="5404104"/>
-            <a:ext cx="0" cy="219456"/>
-          </a:xfrm>
-          <a:prstGeom prst="line">
-            <a:avLst/>
-          </a:prstGeom>
-          <a:noFill/>
-          <a:ln w="25400">
-            <a:solidFill>
-              <a:srgbClr val="4F98B8"/>
-            </a:solidFill>
-            <a:prstDash val="solid"/>
-            <a:tailEnd type="triangle"/>
-          </a:ln>
-        </p:spPr>
-      </p:sp>
-      <p:sp>
-        <p:nvSpPr>
-          <p:cNvPr id="28" name="Shape 26"/>
-          <p:cNvSpPr/>
-          <p:nvPr/>
-        </p:nvSpPr>
-        <p:spPr>
-          <a:xfrm>
-            <a:off x="3992728" y="5623560"/>
-            <a:ext cx="4206240" cy="658368"/>
-          </a:xfrm>
-          <a:prstGeom prst="roundRect">
-            <a:avLst>
-              <a:gd name="adj" fmla="val 11111"/>
-            </a:avLst>
-          </a:prstGeom>
-          <a:solidFill>
-            <a:srgbClr val="EDF4F8"/>
-          </a:solidFill>
-          <a:ln w="17780">
-            <a:solidFill>
-              <a:srgbClr val="1E739A"/>
-            </a:solidFill>
-            <a:prstDash val="solid"/>
-          </a:ln>
-        </p:spPr>
-      </p:sp>
-      <p:sp>
-        <p:nvSpPr>
-          <p:cNvPr id="29" name="Shape 27"/>
-          <p:cNvSpPr/>
-          <p:nvPr/>
-        </p:nvSpPr>
-        <p:spPr>
-          <a:xfrm>
-            <a:off x="4193896" y="5870448"/>
-            <a:ext cx="164592" cy="164592"/>
-          </a:xfrm>
-          <a:prstGeom prst="ellipse">
-            <a:avLst/>
-          </a:prstGeom>
-          <a:solidFill>
-            <a:srgbClr val="1E739A"/>
-          </a:solidFill>
-          <a:ln/>
-        </p:spPr>
-      </p:sp>
-      <p:sp>
-        <p:nvSpPr>
-          <p:cNvPr id="30" name="Text 28"/>
-          <p:cNvSpPr/>
-          <p:nvPr/>
-        </p:nvSpPr>
-        <p:spPr>
-          <a:xfrm>
-            <a:off x="4495648" y="5623560"/>
-            <a:ext cx="2194560" cy="658368"/>
-          </a:xfrm>
-          <a:prstGeom prst="rect">
-            <a:avLst/>
-          </a:prstGeom>
-          <a:noFill/>
-          <a:ln/>
-        </p:spPr>
-        <p:txBody>
-          <a:bodyPr wrap="square" lIns="0" tIns="0" rIns="0" bIns="0" rtlCol="0" anchor="ctr"/>
-          <a:lstStyle/>
-          <a:p>
-            <a:pPr indent="0" marL="0">
-              <a:buNone/>
-            </a:pPr>
-            <a:r>
-              <a:rPr lang="en-US" sz="1350" b="1" dirty="0">
-                <a:solidFill>
-                  <a:srgbClr val="112634"/>
-                </a:solidFill>
-                <a:latin typeface="Calibri" pitchFamily="34" charset="0"/>
-                <a:ea typeface="Calibri" pitchFamily="34" charset="-122"/>
-                <a:cs typeface="Calibri" pitchFamily="34" charset="-120"/>
-              </a:rPr>
-              <a:t>API GW + S3</a:t>
-            </a:r>
-            <a:endParaRPr lang="en-US" sz="1350" dirty="0"/>
-          </a:p>
-        </p:txBody>
-      </p:sp>
-      <p:sp>
-        <p:nvSpPr>
-          <p:cNvPr id="31" name="Text 29"/>
-          <p:cNvSpPr/>
-          <p:nvPr/>
-        </p:nvSpPr>
-        <p:spPr>
-          <a:xfrm>
-            <a:off x="6644488" y="5623560"/>
-            <a:ext cx="1463040" cy="658368"/>
-          </a:xfrm>
-          <a:prstGeom prst="rect">
-            <a:avLst/>
-          </a:prstGeom>
-          <a:noFill/>
-          <a:ln/>
-        </p:spPr>
-        <p:txBody>
-          <a:bodyPr wrap="square" lIns="0" tIns="0" rIns="0" bIns="0" rtlCol="0" anchor="ctr"/>
-          <a:lstStyle/>
-          <a:p>
-            <a:pPr algn="r" indent="0" marL="0">
-              <a:buNone/>
-            </a:pPr>
-            <a:r>
-              <a:rPr lang="en-US" sz="950" dirty="0">
-                <a:solidFill>
-                  <a:srgbClr val="567480"/>
-                </a:solidFill>
-                <a:latin typeface="Calibri" pitchFamily="34" charset="0"/>
-                <a:ea typeface="Calibri" pitchFamily="34" charset="-122"/>
-                <a:cs typeface="Calibri" pitchFamily="34" charset="-120"/>
-              </a:rPr>
               <a:t>live view</a:t>
             </a:r>
-            <a:endParaRPr lang="en-US" sz="950" dirty="0"/>
-          </a:p>
-        </p:txBody>
-      </p:sp>
-      <p:sp>
-        <p:nvSpPr>
-          <p:cNvPr id="32" name="Text 30"/>
-          <p:cNvSpPr/>
-          <p:nvPr/>
-        </p:nvSpPr>
-        <p:spPr>
-          <a:xfrm>
-            <a:off x="2438248" y="1234440"/>
-            <a:ext cx="1371600" cy="365760"/>
-          </a:xfrm>
-          <a:prstGeom prst="rect">
-            <a:avLst/>
-          </a:prstGeom>
-          <a:noFill/>
-          <a:ln/>
-        </p:spPr>
-        <p:txBody>
-          <a:bodyPr wrap="square" rtlCol="0" anchor="ctr"/>
-          <a:lstStyle/>
-          <a:p>
-            <a:pPr algn="r" indent="0" marL="0">
-              <a:buNone/>
-            </a:pPr>
-            <a:r>
-              <a:rPr lang="en-US" sz="1100" b="1" spc="200" kern="0" dirty="0">
-                <a:solidFill>
-                  <a:srgbClr val="4F98B8"/>
-                </a:solidFill>
-                <a:latin typeface="Calibri" pitchFamily="34" charset="0"/>
-                <a:ea typeface="Calibri" pitchFamily="34" charset="-122"/>
-                <a:cs typeface="Calibri" pitchFamily="34" charset="-120"/>
-              </a:rPr>
-              <a:t>EDGE</a:t>
-            </a:r>
-            <a:endParaRPr lang="en-US" sz="1100" dirty="0"/>
-          </a:p>
-        </p:txBody>
-      </p:sp>
-      <p:sp>
-        <p:nvSpPr>
-          <p:cNvPr id="33" name="Text 31"/>
-          <p:cNvSpPr/>
-          <p:nvPr/>
-        </p:nvSpPr>
-        <p:spPr>
-          <a:xfrm>
-            <a:off x="2438248" y="2990088"/>
-            <a:ext cx="1371600" cy="365760"/>
-          </a:xfrm>
-          <a:prstGeom prst="rect">
-            <a:avLst/>
-          </a:prstGeom>
-          <a:noFill/>
-          <a:ln/>
-        </p:spPr>
-        <p:txBody>
-          <a:bodyPr wrap="square" rtlCol="0" anchor="ctr"/>
-          <a:lstStyle/>
-          <a:p>
-            <a:pPr algn="r" indent="0" marL="0">
-              <a:buNone/>
-            </a:pPr>
-            <a:r>
-              <a:rPr lang="en-US" sz="1100" b="1" spc="200" kern="0" dirty="0">
-                <a:solidFill>
-                  <a:srgbClr val="124C6E"/>
-                </a:solidFill>
-                <a:latin typeface="Calibri" pitchFamily="34" charset="0"/>
-                <a:ea typeface="Calibri" pitchFamily="34" charset="-122"/>
-                <a:cs typeface="Calibri" pitchFamily="34" charset="-120"/>
-              </a:rPr>
-              <a:t>CLOUD</a:t>
-            </a:r>
-            <a:endParaRPr lang="en-US" sz="1100" dirty="0"/>
-          </a:p>
-        </p:txBody>
-      </p:sp>
-      <p:sp>
-        <p:nvSpPr>
-          <p:cNvPr id="34" name="Text 32"/>
-          <p:cNvSpPr/>
-          <p:nvPr/>
-        </p:nvSpPr>
-        <p:spPr>
-          <a:xfrm>
-            <a:off x="8656168" y="2743200"/>
-            <a:ext cx="3291840" cy="2194560"/>
-          </a:xfrm>
-          <a:prstGeom prst="rect">
-            <a:avLst/>
-          </a:prstGeom>
-          <a:noFill/>
-          <a:ln/>
-        </p:spPr>
-        <p:txBody>
-          <a:bodyPr wrap="square" rtlCol="0" anchor="ctr"/>
-          <a:lstStyle/>
-          <a:p>
-            <a:pPr indent="0" marL="0">
-              <a:buNone/>
-            </a:pPr>
-            <a:r>
-              <a:rPr lang="en-US" sz="1500" i="1" dirty="0">
-                <a:solidFill>
-                  <a:srgbClr val="124C6E"/>
-                </a:solidFill>
-                <a:latin typeface="Calibri" pitchFamily="34" charset="0"/>
-                <a:ea typeface="Calibri" pitchFamily="34" charset="-122"/>
-                <a:cs typeface="Calibri" pitchFamily="34" charset="-120"/>
-              </a:rPr>
-              <a:t>Every ten-second window collapses raw readings into one aggregate per sensor per berth, and the safety rules fire right there, so raw noise never leaves the terminal.</a:t>
-            </a:r>
-            <a:endParaRPr lang="en-US" sz="1500" dirty="0"/>
+            <a:endParaRPr lang="en-US" sz="900" dirty="0"/>
           </a:p>
         </p:txBody>
       </p:sp>
@@ -2565,7 +2442,7 @@
     <p:bg>
       <p:bgPr>
         <a:solidFill>
-          <a:srgbClr val="FFFFFF"/>
+          <a:srgbClr val="14384D"/>
         </a:solidFill>
       </p:bgPr>
     </p:bg>
@@ -2585,14 +2462,153 @@
       </p:grpSpPr>
       <p:sp>
         <p:nvSpPr>
-          <p:cNvPr id="2" name="Text 0"/>
-          <p:cNvSpPr/>
-          <p:nvPr/>
-        </p:nvSpPr>
-        <p:spPr>
-          <a:xfrm>
-            <a:off x="640080" y="457200"/>
-            <a:ext cx="7315200" cy="640080"/>
+          <p:cNvPr id="2" name="Shape 0"/>
+          <p:cNvSpPr/>
+          <p:nvPr/>
+        </p:nvSpPr>
+        <p:spPr>
+          <a:xfrm>
+            <a:off x="411480" y="411480"/>
+            <a:ext cx="11368735" cy="6035040"/>
+          </a:xfrm>
+          <a:prstGeom prst="rect">
+            <a:avLst/>
+          </a:prstGeom>
+          <a:ln w="19050">
+            <a:solidFill>
+              <a:srgbClr val="C13B15"/>
+            </a:solidFill>
+            <a:prstDash val="solid"/>
+          </a:ln>
+        </p:spPr>
+      </p:sp>
+      <p:sp>
+        <p:nvSpPr>
+          <p:cNvPr id="3" name="Text 1"/>
+          <p:cNvSpPr/>
+          <p:nvPr/>
+        </p:nvSpPr>
+        <p:spPr>
+          <a:xfrm>
+            <a:off x="960120" y="868680"/>
+            <a:ext cx="914400" cy="640080"/>
+          </a:xfrm>
+          <a:prstGeom prst="rect">
+            <a:avLst/>
+          </a:prstGeom>
+          <a:noFill/>
+          <a:ln/>
+        </p:spPr>
+        <p:txBody>
+          <a:bodyPr wrap="square" lIns="0" tIns="0" rIns="0" bIns="0" rtlCol="0" anchor="ctr"/>
+          <a:lstStyle/>
+          <a:p>
+            <a:pPr indent="0" marL="0">
+              <a:buNone/>
+            </a:pPr>
+            <a:r>
+              <a:rPr lang="en-US" sz="3000" b="1" dirty="0">
+                <a:solidFill>
+                  <a:srgbClr val="C13B15"/>
+                </a:solidFill>
+                <a:latin typeface="Times New Roman" pitchFamily="34" charset="0"/>
+                <a:ea typeface="Times New Roman" pitchFamily="34" charset="-122"/>
+                <a:cs typeface="Times New Roman" pitchFamily="34" charset="-120"/>
+              </a:rPr>
+              <a:t>02</a:t>
+            </a:r>
+            <a:endParaRPr lang="en-US" sz="3000" dirty="0"/>
+          </a:p>
+        </p:txBody>
+      </p:sp>
+      <p:sp>
+        <p:nvSpPr>
+          <p:cNvPr id="4" name="Text 2"/>
+          <p:cNvSpPr/>
+          <p:nvPr/>
+        </p:nvSpPr>
+        <p:spPr>
+          <a:xfrm>
+            <a:off x="1828800" y="1042416"/>
+            <a:ext cx="9402775" cy="274320"/>
+          </a:xfrm>
+          <a:prstGeom prst="rect">
+            <a:avLst/>
+          </a:prstGeom>
+          <a:noFill/>
+          <a:ln/>
+        </p:spPr>
+        <p:txBody>
+          <a:bodyPr wrap="square" lIns="0" tIns="0" rIns="0" bIns="0" rtlCol="0" anchor="ctr"/>
+          <a:lstStyle/>
+          <a:p>
+            <a:pPr indent="0" marL="0">
+              <a:buNone/>
+            </a:pPr>
+            <a:r>
+              <a:rPr lang="en-US" sz="1100" b="1" spc="200" kern="0" dirty="0">
+                <a:solidFill>
+                  <a:srgbClr val="8B98A6"/>
+                </a:solidFill>
+                <a:latin typeface="Calibri" pitchFamily="34" charset="0"/>
+                <a:ea typeface="Calibri" pitchFamily="34" charset="-122"/>
+                <a:cs typeface="Calibri" pitchFamily="34" charset="-120"/>
+              </a:rPr>
+              <a:t>LIVE DEMO</a:t>
+            </a:r>
+            <a:endParaRPr lang="en-US" sz="1100" dirty="0"/>
+          </a:p>
+        </p:txBody>
+      </p:sp>
+      <p:sp>
+        <p:nvSpPr>
+          <p:cNvPr id="5" name="Text 3"/>
+          <p:cNvSpPr/>
+          <p:nvPr/>
+        </p:nvSpPr>
+        <p:spPr>
+          <a:xfrm>
+            <a:off x="960120" y="1517904"/>
+            <a:ext cx="10271455" cy="640080"/>
+          </a:xfrm>
+          <a:prstGeom prst="rect">
+            <a:avLst/>
+          </a:prstGeom>
+          <a:noFill/>
+          <a:ln/>
+        </p:spPr>
+        <p:txBody>
+          <a:bodyPr wrap="square" lIns="0" tIns="0" rIns="0" bIns="0" rtlCol="0" anchor="ctr"/>
+          <a:lstStyle/>
+          <a:p>
+            <a:pPr indent="0" marL="0">
+              <a:buNone/>
+            </a:pPr>
+            <a:r>
+              <a:rPr lang="en-US" sz="2300" b="1" dirty="0">
+                <a:solidFill>
+                  <a:srgbClr val="EEF4F8"/>
+                </a:solidFill>
+                <a:latin typeface="Times New Roman" pitchFamily="34" charset="0"/>
+                <a:ea typeface="Times New Roman" pitchFamily="34" charset="-122"/>
+                <a:cs typeface="Times New Roman" pitchFamily="34" charset="-120"/>
+              </a:rPr>
+              <a:t>See it running on AWS</a:t>
+            </a:r>
+            <a:endParaRPr lang="en-US" sz="2300" dirty="0"/>
+          </a:p>
+        </p:txBody>
+      </p:sp>
+      <p:sp>
+        <p:nvSpPr>
+          <p:cNvPr id="6" name="Text 4"/>
+          <p:cNvSpPr/>
+          <p:nvPr/>
+        </p:nvSpPr>
+        <p:spPr>
+          <a:xfrm>
+            <a:off x="960120" y="2039112"/>
+            <a:ext cx="10271455" cy="274320"/>
           </a:xfrm>
           <a:prstGeom prst="rect">
             <a:avLst/>
@@ -2608,48 +2624,9 @@
               <a:buNone/>
             </a:pPr>
             <a:r>
-              <a:rPr lang="en-US" sz="3000" b="1" dirty="0">
-                <a:solidFill>
-                  <a:srgbClr val="112634"/>
-                </a:solidFill>
-                <a:latin typeface="Cambria" pitchFamily="34" charset="0"/>
-                <a:ea typeface="Cambria" pitchFamily="34" charset="-122"/>
-                <a:cs typeface="Cambria" pitchFamily="34" charset="-120"/>
-              </a:rPr>
-              <a:t>Live Demo</a:t>
-            </a:r>
-            <a:endParaRPr lang="en-US" sz="3000" dirty="0"/>
-          </a:p>
-        </p:txBody>
-      </p:sp>
-      <p:sp>
-        <p:nvSpPr>
-          <p:cNvPr id="3" name="Text 1"/>
-          <p:cNvSpPr/>
-          <p:nvPr/>
-        </p:nvSpPr>
-        <p:spPr>
-          <a:xfrm>
-            <a:off x="658368" y="1143000"/>
-            <a:ext cx="10972800" cy="365760"/>
-          </a:xfrm>
-          <a:prstGeom prst="rect">
-            <a:avLst/>
-          </a:prstGeom>
-          <a:noFill/>
-          <a:ln/>
-        </p:spPr>
-        <p:txBody>
-          <a:bodyPr wrap="square" rtlCol="0" anchor="ctr"/>
-          <a:lstStyle/>
-          <a:p>
-            <a:pPr indent="0" marL="0">
-              <a:buNone/>
-            </a:pPr>
-            <a:r>
-              <a:rPr lang="en-US" sz="1400" dirty="0">
-                <a:solidFill>
-                  <a:srgbClr val="1E739A"/>
+              <a:rPr lang="en-US" sz="1100" dirty="0">
+                <a:solidFill>
+                  <a:srgbClr val="C13B15"/>
                 </a:solidFill>
                 <a:latin typeface="Consolas" pitchFamily="34" charset="0"/>
                 <a:ea typeface="Consolas" pitchFamily="34" charset="-122"/>
@@ -2657,32 +2634,30 @@
               </a:rPr>
               <a:t>spc-frontend-659211701832.s3.us-east-1.amazonaws.com</a:t>
             </a:r>
-            <a:endParaRPr lang="en-US" sz="1400" dirty="0"/>
-          </a:p>
-        </p:txBody>
-      </p:sp>
-      <p:sp>
-        <p:nvSpPr>
-          <p:cNvPr id="4" name="Shape 2"/>
-          <p:cNvSpPr/>
-          <p:nvPr/>
-        </p:nvSpPr>
-        <p:spPr>
-          <a:xfrm>
-            <a:off x="640080" y="1874520"/>
-            <a:ext cx="3502152" cy="3977640"/>
+            <a:endParaRPr lang="en-US" sz="1100" dirty="0"/>
+          </a:p>
+        </p:txBody>
+      </p:sp>
+      <p:sp>
+        <p:nvSpPr>
+          <p:cNvPr id="7" name="Shape 5"/>
+          <p:cNvSpPr/>
+          <p:nvPr/>
+        </p:nvSpPr>
+        <p:spPr>
+          <a:xfrm>
+            <a:off x="960120" y="2651760"/>
+            <a:ext cx="3179978" cy="3200400"/>
           </a:xfrm>
           <a:prstGeom prst="roundRect">
-            <a:avLst>
-              <a:gd name="adj" fmla="val 2611"/>
-            </a:avLst>
+            <a:avLst/>
           </a:prstGeom>
           <a:solidFill>
-            <a:srgbClr val="EDF4F8"/>
+            <a:srgbClr val="1C4E6B"/>
           </a:solidFill>
-          <a:ln w="15240">
+          <a:ln w="12700">
             <a:solidFill>
-              <a:srgbClr val="1E739A"/>
+              <a:srgbClr val="30627F"/>
             </a:solidFill>
             <a:prstDash val="solid"/>
           </a:ln>
@@ -2690,34 +2665,14 @@
       </p:sp>
       <p:sp>
         <p:nvSpPr>
-          <p:cNvPr id="5" name="Shape 3"/>
-          <p:cNvSpPr/>
-          <p:nvPr/>
-        </p:nvSpPr>
-        <p:spPr>
-          <a:xfrm>
-            <a:off x="914400" y="2148840"/>
-            <a:ext cx="603504" cy="603504"/>
-          </a:xfrm>
-          <a:prstGeom prst="ellipse">
-            <a:avLst/>
-          </a:prstGeom>
-          <a:solidFill>
-            <a:srgbClr val="124C6E"/>
-          </a:solidFill>
-          <a:ln/>
-        </p:spPr>
-      </p:sp>
-      <p:sp>
-        <p:nvSpPr>
-          <p:cNvPr id="6" name="Text 4"/>
-          <p:cNvSpPr/>
-          <p:nvPr/>
-        </p:nvSpPr>
-        <p:spPr>
-          <a:xfrm>
-            <a:off x="914400" y="2148840"/>
-            <a:ext cx="603504" cy="603504"/>
+          <p:cNvPr id="8" name="Text 6"/>
+          <p:cNvSpPr/>
+          <p:nvPr/>
+        </p:nvSpPr>
+        <p:spPr>
+          <a:xfrm>
+            <a:off x="1234440" y="2889504"/>
+            <a:ext cx="1828800" cy="777240"/>
           </a:xfrm>
           <a:prstGeom prst="rect">
             <a:avLst/>
@@ -2729,34 +2684,76 @@
           <a:bodyPr wrap="square" lIns="0" tIns="0" rIns="0" bIns="0" rtlCol="0" anchor="ctr"/>
           <a:lstStyle/>
           <a:p>
-            <a:pPr algn="ctr" indent="0" marL="0">
-              <a:buNone/>
-            </a:pPr>
-            <a:r>
-              <a:rPr lang="en-US" sz="2200" b="1" dirty="0">
-                <a:solidFill>
-                  <a:srgbClr val="FFFFFF"/>
-                </a:solidFill>
-                <a:latin typeface="Cambria" pitchFamily="34" charset="0"/>
-                <a:ea typeface="Cambria" pitchFamily="34" charset="-122"/>
-                <a:cs typeface="Cambria" pitchFamily="34" charset="-120"/>
-              </a:rPr>
-              <a:t>1</a:t>
-            </a:r>
-            <a:endParaRPr lang="en-US" sz="2200" dirty="0"/>
-          </a:p>
-        </p:txBody>
-      </p:sp>
-      <p:sp>
-        <p:nvSpPr>
-          <p:cNvPr id="7" name="Text 5"/>
-          <p:cNvSpPr/>
-          <p:nvPr/>
-        </p:nvSpPr>
-        <p:spPr>
-          <a:xfrm>
-            <a:off x="914400" y="2898648"/>
-            <a:ext cx="2953512" cy="777240"/>
+            <a:pPr indent="0" marL="0">
+              <a:buNone/>
+            </a:pPr>
+            <a:r>
+              <a:rPr lang="en-US" sz="3800" b="1" dirty="0">
+                <a:solidFill>
+                  <a:srgbClr val="C13B15"/>
+                </a:solidFill>
+                <a:latin typeface="Times New Roman" pitchFamily="34" charset="0"/>
+                <a:ea typeface="Times New Roman" pitchFamily="34" charset="-122"/>
+                <a:cs typeface="Times New Roman" pitchFamily="34" charset="-120"/>
+              </a:rPr>
+              <a:t>01</a:t>
+            </a:r>
+            <a:endParaRPr lang="en-US" sz="3800" dirty="0"/>
+          </a:p>
+        </p:txBody>
+      </p:sp>
+      <p:sp>
+        <p:nvSpPr>
+          <p:cNvPr id="9" name="Text 7"/>
+          <p:cNvSpPr/>
+          <p:nvPr/>
+        </p:nvSpPr>
+        <p:spPr>
+          <a:xfrm>
+            <a:off x="1252728" y="3703320"/>
+            <a:ext cx="2631338" cy="868680"/>
+          </a:xfrm>
+          <a:prstGeom prst="rect">
+            <a:avLst/>
+          </a:prstGeom>
+          <a:noFill/>
+          <a:ln/>
+        </p:spPr>
+        <p:txBody>
+          <a:bodyPr wrap="square" lIns="0" tIns="0" rIns="0" bIns="0" rtlCol="0" anchor="t"/>
+          <a:lstStyle/>
+          <a:p>
+            <a:pPr indent="0" marL="0">
+              <a:lnSpc>
+                <a:spcPct val="100000"/>
+              </a:lnSpc>
+              <a:buNone/>
+            </a:pPr>
+            <a:r>
+              <a:rPr lang="en-US" sz="1550" b="1" dirty="0">
+                <a:solidFill>
+                  <a:srgbClr val="EEF4F8"/>
+                </a:solidFill>
+                <a:latin typeface="Times New Roman" pitchFamily="34" charset="0"/>
+                <a:ea typeface="Times New Roman" pitchFamily="34" charset="-122"/>
+                <a:cs typeface="Times New Roman" pitchFamily="34" charset="-120"/>
+              </a:rPr>
+              <a:t>Two berths, five quayside signals</a:t>
+            </a:r>
+            <a:endParaRPr lang="en-US" sz="1550" dirty="0"/>
+          </a:p>
+        </p:txBody>
+      </p:sp>
+      <p:sp>
+        <p:nvSpPr>
+          <p:cNvPr id="10" name="Text 8"/>
+          <p:cNvSpPr/>
+          <p:nvPr/>
+        </p:nvSpPr>
+        <p:spPr>
+          <a:xfrm>
+            <a:off x="1252728" y="4572000"/>
+            <a:ext cx="2631338" cy="1097280"/>
           </a:xfrm>
           <a:prstGeom prst="rect">
             <a:avLst/>
@@ -2769,33 +2766,61 @@
           <a:lstStyle/>
           <a:p>
             <a:pPr indent="0" marL="0">
-              <a:buNone/>
-            </a:pPr>
-            <a:r>
-              <a:rPr lang="en-US" sz="1600" b="1" dirty="0">
-                <a:solidFill>
-                  <a:srgbClr val="112634"/>
+              <a:lnSpc>
+                <a:spcPct val="120000"/>
+              </a:lnSpc>
+              <a:buNone/>
+            </a:pPr>
+            <a:r>
+              <a:rPr lang="en-US" sz="1200" dirty="0">
+                <a:solidFill>
+                  <a:srgbClr val="8B98A6"/>
                 </a:solidFill>
                 <a:latin typeface="Calibri" pitchFamily="34" charset="0"/>
                 <a:ea typeface="Calibri" pitchFamily="34" charset="-122"/>
                 <a:cs typeface="Calibri" pitchFamily="34" charset="-120"/>
               </a:rPr>
-              <a:t>Two berths, five quayside signals</a:t>
-            </a:r>
-            <a:endParaRPr lang="en-US" sz="1600" dirty="0"/>
-          </a:p>
-        </p:txBody>
-      </p:sp>
-      <p:sp>
-        <p:nvSpPr>
-          <p:cNvPr id="8" name="Text 6"/>
-          <p:cNvSpPr/>
-          <p:nvPr/>
-        </p:nvSpPr>
-        <p:spPr>
-          <a:xfrm>
-            <a:off x="914400" y="3657600"/>
-            <a:ext cx="2953512" cy="2011680"/>
+              <a:t>Crane load, container stacks, wind, occupancy and reefer temperature live for both berths.</a:t>
+            </a:r>
+            <a:endParaRPr lang="en-US" sz="1200" dirty="0"/>
+          </a:p>
+        </p:txBody>
+      </p:sp>
+      <p:sp>
+        <p:nvSpPr>
+          <p:cNvPr id="11" name="Shape 9"/>
+          <p:cNvSpPr/>
+          <p:nvPr/>
+        </p:nvSpPr>
+        <p:spPr>
+          <a:xfrm>
+            <a:off x="4505858" y="2651760"/>
+            <a:ext cx="3179978" cy="3200400"/>
+          </a:xfrm>
+          <a:prstGeom prst="roundRect">
+            <a:avLst/>
+          </a:prstGeom>
+          <a:solidFill>
+            <a:srgbClr val="1C4E6B"/>
+          </a:solidFill>
+          <a:ln w="12700">
+            <a:solidFill>
+              <a:srgbClr val="30627F"/>
+            </a:solidFill>
+            <a:prstDash val="solid"/>
+          </a:ln>
+        </p:spPr>
+      </p:sp>
+      <p:sp>
+        <p:nvSpPr>
+          <p:cNvPr id="12" name="Text 10"/>
+          <p:cNvSpPr/>
+          <p:nvPr/>
+        </p:nvSpPr>
+        <p:spPr>
+          <a:xfrm>
+            <a:off x="4780178" y="2889504"/>
+            <a:ext cx="1828800" cy="777240"/>
           </a:xfrm>
           <a:prstGeom prst="rect">
             <a:avLst/>
@@ -2808,48 +2833,127 @@
           <a:lstStyle/>
           <a:p>
             <a:pPr indent="0" marL="0">
+              <a:buNone/>
+            </a:pPr>
+            <a:r>
+              <a:rPr lang="en-US" sz="3800" b="1" dirty="0">
+                <a:solidFill>
+                  <a:srgbClr val="C13B15"/>
+                </a:solidFill>
+                <a:latin typeface="Times New Roman" pitchFamily="34" charset="0"/>
+                <a:ea typeface="Times New Roman" pitchFamily="34" charset="-122"/>
+                <a:cs typeface="Times New Roman" pitchFamily="34" charset="-120"/>
+              </a:rPr>
+              <a:t>02</a:t>
+            </a:r>
+            <a:endParaRPr lang="en-US" sz="3800" dirty="0"/>
+          </a:p>
+        </p:txBody>
+      </p:sp>
+      <p:sp>
+        <p:nvSpPr>
+          <p:cNvPr id="13" name="Text 11"/>
+          <p:cNvSpPr/>
+          <p:nvPr/>
+        </p:nvSpPr>
+        <p:spPr>
+          <a:xfrm>
+            <a:off x="4798466" y="3703320"/>
+            <a:ext cx="2631338" cy="868680"/>
+          </a:xfrm>
+          <a:prstGeom prst="rect">
+            <a:avLst/>
+          </a:prstGeom>
+          <a:noFill/>
+          <a:ln/>
+        </p:spPr>
+        <p:txBody>
+          <a:bodyPr wrap="square" lIns="0" tIns="0" rIns="0" bIns="0" rtlCol="0" anchor="t"/>
+          <a:lstStyle/>
+          <a:p>
+            <a:pPr indent="0" marL="0">
               <a:lnSpc>
-                <a:spcPct val="106000"/>
+                <a:spcPct val="100000"/>
               </a:lnSpc>
               <a:buNone/>
             </a:pPr>
             <a:r>
-              <a:rPr lang="en-US" sz="1250" dirty="0">
-                <a:solidFill>
-                  <a:srgbClr val="567480"/>
+              <a:rPr lang="en-US" sz="1550" b="1" dirty="0">
+                <a:solidFill>
+                  <a:srgbClr val="EEF4F8"/>
+                </a:solidFill>
+                <a:latin typeface="Times New Roman" pitchFamily="34" charset="0"/>
+                <a:ea typeface="Times New Roman" pitchFamily="34" charset="-122"/>
+                <a:cs typeface="Times New Roman" pitchFamily="34" charset="-120"/>
+              </a:rPr>
+              <a:t>Crane, wind and cold-chain alerts</a:t>
+            </a:r>
+            <a:endParaRPr lang="en-US" sz="1550" dirty="0"/>
+          </a:p>
+        </p:txBody>
+      </p:sp>
+      <p:sp>
+        <p:nvSpPr>
+          <p:cNvPr id="14" name="Text 12"/>
+          <p:cNvSpPr/>
+          <p:nvPr/>
+        </p:nvSpPr>
+        <p:spPr>
+          <a:xfrm>
+            <a:off x="4798466" y="4572000"/>
+            <a:ext cx="2631338" cy="1097280"/>
+          </a:xfrm>
+          <a:prstGeom prst="rect">
+            <a:avLst/>
+          </a:prstGeom>
+          <a:noFill/>
+          <a:ln/>
+        </p:spPr>
+        <p:txBody>
+          <a:bodyPr wrap="square" lIns="0" tIns="0" rIns="0" bIns="0" rtlCol="0" anchor="ctr"/>
+          <a:lstStyle/>
+          <a:p>
+            <a:pPr indent="0" marL="0">
+              <a:lnSpc>
+                <a:spcPct val="120000"/>
+              </a:lnSpc>
+              <a:buNone/>
+            </a:pPr>
+            <a:r>
+              <a:rPr lang="en-US" sz="1200" dirty="0">
+                <a:solidFill>
+                  <a:srgbClr val="8B98A6"/>
                 </a:solidFill>
                 <a:latin typeface="Calibri" pitchFamily="34" charset="0"/>
                 <a:ea typeface="Calibri" pitchFamily="34" charset="-122"/>
                 <a:cs typeface="Calibri" pitchFamily="34" charset="-120"/>
               </a:rPr>
-              <a:t>Crane load, container stacks, wind, occupancy and reefer temperature live for both berths.</a:t>
-            </a:r>
-            <a:endParaRPr lang="en-US" sz="1250" dirty="0"/>
-          </a:p>
-        </p:txBody>
-      </p:sp>
-      <p:sp>
-        <p:nvSpPr>
-          <p:cNvPr id="9" name="Shape 7"/>
-          <p:cNvSpPr/>
-          <p:nvPr/>
-        </p:nvSpPr>
-        <p:spPr>
-          <a:xfrm>
-            <a:off x="4416552" y="1874520"/>
-            <a:ext cx="3502152" cy="3977640"/>
+              <a:t>A gust over the 34-knot limit halts crane lifts, an overloaded lift and a warm reefer each raise their own alert on the window.</a:t>
+            </a:r>
+            <a:endParaRPr lang="en-US" sz="1200" dirty="0"/>
+          </a:p>
+        </p:txBody>
+      </p:sp>
+      <p:sp>
+        <p:nvSpPr>
+          <p:cNvPr id="15" name="Shape 13"/>
+          <p:cNvSpPr/>
+          <p:nvPr/>
+        </p:nvSpPr>
+        <p:spPr>
+          <a:xfrm>
+            <a:off x="8051597" y="2651760"/>
+            <a:ext cx="3179978" cy="3200400"/>
           </a:xfrm>
           <a:prstGeom prst="roundRect">
-            <a:avLst>
-              <a:gd name="adj" fmla="val 2611"/>
-            </a:avLst>
+            <a:avLst/>
           </a:prstGeom>
           <a:solidFill>
-            <a:srgbClr val="EDF4F8"/>
+            <a:srgbClr val="1C4E6B"/>
           </a:solidFill>
-          <a:ln w="15240">
+          <a:ln w="12700">
             <a:solidFill>
-              <a:srgbClr val="1E739A"/>
+              <a:srgbClr val="30627F"/>
             </a:solidFill>
             <a:prstDash val="solid"/>
           </a:ln>
@@ -2857,34 +2961,14 @@
       </p:sp>
       <p:sp>
         <p:nvSpPr>
-          <p:cNvPr id="10" name="Shape 8"/>
-          <p:cNvSpPr/>
-          <p:nvPr/>
-        </p:nvSpPr>
-        <p:spPr>
-          <a:xfrm>
-            <a:off x="4690872" y="2148840"/>
-            <a:ext cx="603504" cy="603504"/>
-          </a:xfrm>
-          <a:prstGeom prst="ellipse">
-            <a:avLst/>
-          </a:prstGeom>
-          <a:solidFill>
-            <a:srgbClr val="124C6E"/>
-          </a:solidFill>
-          <a:ln/>
-        </p:spPr>
-      </p:sp>
-      <p:sp>
-        <p:nvSpPr>
-          <p:cNvPr id="11" name="Text 9"/>
-          <p:cNvSpPr/>
-          <p:nvPr/>
-        </p:nvSpPr>
-        <p:spPr>
-          <a:xfrm>
-            <a:off x="4690872" y="2148840"/>
-            <a:ext cx="603504" cy="603504"/>
+          <p:cNvPr id="16" name="Text 14"/>
+          <p:cNvSpPr/>
+          <p:nvPr/>
+        </p:nvSpPr>
+        <p:spPr>
+          <a:xfrm>
+            <a:off x="8325917" y="2889504"/>
+            <a:ext cx="1828800" cy="777240"/>
           </a:xfrm>
           <a:prstGeom prst="rect">
             <a:avLst/>
@@ -2896,34 +2980,76 @@
           <a:bodyPr wrap="square" lIns="0" tIns="0" rIns="0" bIns="0" rtlCol="0" anchor="ctr"/>
           <a:lstStyle/>
           <a:p>
-            <a:pPr algn="ctr" indent="0" marL="0">
-              <a:buNone/>
-            </a:pPr>
-            <a:r>
-              <a:rPr lang="en-US" sz="2200" b="1" dirty="0">
-                <a:solidFill>
-                  <a:srgbClr val="FFFFFF"/>
-                </a:solidFill>
-                <a:latin typeface="Cambria" pitchFamily="34" charset="0"/>
-                <a:ea typeface="Cambria" pitchFamily="34" charset="-122"/>
-                <a:cs typeface="Cambria" pitchFamily="34" charset="-120"/>
-              </a:rPr>
-              <a:t>2</a:t>
-            </a:r>
-            <a:endParaRPr lang="en-US" sz="2200" dirty="0"/>
-          </a:p>
-        </p:txBody>
-      </p:sp>
-      <p:sp>
-        <p:nvSpPr>
-          <p:cNvPr id="12" name="Text 10"/>
-          <p:cNvSpPr/>
-          <p:nvPr/>
-        </p:nvSpPr>
-        <p:spPr>
-          <a:xfrm>
-            <a:off x="4690872" y="2898648"/>
-            <a:ext cx="2953512" cy="777240"/>
+            <a:pPr indent="0" marL="0">
+              <a:buNone/>
+            </a:pPr>
+            <a:r>
+              <a:rPr lang="en-US" sz="3800" b="1" dirty="0">
+                <a:solidFill>
+                  <a:srgbClr val="C13B15"/>
+                </a:solidFill>
+                <a:latin typeface="Times New Roman" pitchFamily="34" charset="0"/>
+                <a:ea typeface="Times New Roman" pitchFamily="34" charset="-122"/>
+                <a:cs typeface="Times New Roman" pitchFamily="34" charset="-120"/>
+              </a:rPr>
+              <a:t>03</a:t>
+            </a:r>
+            <a:endParaRPr lang="en-US" sz="3800" dirty="0"/>
+          </a:p>
+        </p:txBody>
+      </p:sp>
+      <p:sp>
+        <p:nvSpPr>
+          <p:cNvPr id="17" name="Text 15"/>
+          <p:cNvSpPr/>
+          <p:nvPr/>
+        </p:nvSpPr>
+        <p:spPr>
+          <a:xfrm>
+            <a:off x="8344205" y="3703320"/>
+            <a:ext cx="2631338" cy="868680"/>
+          </a:xfrm>
+          <a:prstGeom prst="rect">
+            <a:avLst/>
+          </a:prstGeom>
+          <a:noFill/>
+          <a:ln/>
+        </p:spPr>
+        <p:txBody>
+          <a:bodyPr wrap="square" lIns="0" tIns="0" rIns="0" bIns="0" rtlCol="0" anchor="t"/>
+          <a:lstStyle/>
+          <a:p>
+            <a:pPr indent="0" marL="0">
+              <a:lnSpc>
+                <a:spcPct val="100000"/>
+              </a:lnSpc>
+              <a:buNone/>
+            </a:pPr>
+            <a:r>
+              <a:rPr lang="en-US" sz="1550" b="1" dirty="0">
+                <a:solidFill>
+                  <a:srgbClr val="EEF4F8"/>
+                </a:solidFill>
+                <a:latin typeface="Times New Roman" pitchFamily="34" charset="0"/>
+                <a:ea typeface="Times New Roman" pitchFamily="34" charset="-122"/>
+                <a:cs typeface="Times New Roman" pitchFamily="34" charset="-120"/>
+              </a:rPr>
+              <a:t>Every alert traces to a real rule</a:t>
+            </a:r>
+            <a:endParaRPr lang="en-US" sz="1550" dirty="0"/>
+          </a:p>
+        </p:txBody>
+      </p:sp>
+      <p:sp>
+        <p:nvSpPr>
+          <p:cNvPr id="18" name="Text 16"/>
+          <p:cNvSpPr/>
+          <p:nvPr/>
+        </p:nvSpPr>
+        <p:spPr>
+          <a:xfrm>
+            <a:off x="8344205" y="4572000"/>
+            <a:ext cx="2631338" cy="1097280"/>
           </a:xfrm>
           <a:prstGeom prst="rect">
             <a:avLst/>
@@ -2936,229 +3062,23 @@
           <a:lstStyle/>
           <a:p>
             <a:pPr indent="0" marL="0">
-              <a:buNone/>
-            </a:pPr>
-            <a:r>
-              <a:rPr lang="en-US" sz="1600" b="1" dirty="0">
-                <a:solidFill>
-                  <a:srgbClr val="112634"/>
+              <a:lnSpc>
+                <a:spcPct val="120000"/>
+              </a:lnSpc>
+              <a:buNone/>
+            </a:pPr>
+            <a:r>
+              <a:rPr lang="en-US" sz="1200" dirty="0">
+                <a:solidFill>
+                  <a:srgbClr val="8B98A6"/>
                 </a:solidFill>
                 <a:latin typeface="Calibri" pitchFamily="34" charset="0"/>
                 <a:ea typeface="Calibri" pitchFamily="34" charset="-122"/>
                 <a:cs typeface="Calibri" pitchFamily="34" charset="-120"/>
               </a:rPr>
-              <a:t>Crane, wind and cold-chain alerts</a:t>
-            </a:r>
-            <a:endParaRPr lang="en-US" sz="1600" dirty="0"/>
-          </a:p>
-        </p:txBody>
-      </p:sp>
-      <p:sp>
-        <p:nvSpPr>
-          <p:cNvPr id="13" name="Text 11"/>
-          <p:cNvSpPr/>
-          <p:nvPr/>
-        </p:nvSpPr>
-        <p:spPr>
-          <a:xfrm>
-            <a:off x="4690872" y="3657600"/>
-            <a:ext cx="2953512" cy="2011680"/>
-          </a:xfrm>
-          <a:prstGeom prst="rect">
-            <a:avLst/>
-          </a:prstGeom>
-          <a:noFill/>
-          <a:ln/>
-        </p:spPr>
-        <p:txBody>
-          <a:bodyPr wrap="square" lIns="0" tIns="0" rIns="0" bIns="0" rtlCol="0" anchor="ctr"/>
-          <a:lstStyle/>
-          <a:p>
-            <a:pPr indent="0" marL="0">
-              <a:lnSpc>
-                <a:spcPct val="106000"/>
-              </a:lnSpc>
-              <a:buNone/>
-            </a:pPr>
-            <a:r>
-              <a:rPr lang="en-US" sz="1250" dirty="0">
-                <a:solidFill>
-                  <a:srgbClr val="567480"/>
-                </a:solidFill>
-                <a:latin typeface="Calibri" pitchFamily="34" charset="0"/>
-                <a:ea typeface="Calibri" pitchFamily="34" charset="-122"/>
-                <a:cs typeface="Calibri" pitchFamily="34" charset="-120"/>
-              </a:rPr>
-              <a:t>A gust over the 34-knot limit halts crane lifts, an overloaded lift and a warm reefer each raise their own alert on the window.</a:t>
-            </a:r>
-            <a:endParaRPr lang="en-US" sz="1250" dirty="0"/>
-          </a:p>
-        </p:txBody>
-      </p:sp>
-      <p:sp>
-        <p:nvSpPr>
-          <p:cNvPr id="14" name="Shape 12"/>
-          <p:cNvSpPr/>
-          <p:nvPr/>
-        </p:nvSpPr>
-        <p:spPr>
-          <a:xfrm>
-            <a:off x="8193024" y="1874520"/>
-            <a:ext cx="3502152" cy="3977640"/>
-          </a:xfrm>
-          <a:prstGeom prst="roundRect">
-            <a:avLst>
-              <a:gd name="adj" fmla="val 2611"/>
-            </a:avLst>
-          </a:prstGeom>
-          <a:solidFill>
-            <a:srgbClr val="EDF4F8"/>
-          </a:solidFill>
-          <a:ln w="15240">
-            <a:solidFill>
-              <a:srgbClr val="1E739A"/>
-            </a:solidFill>
-            <a:prstDash val="solid"/>
-          </a:ln>
-        </p:spPr>
-      </p:sp>
-      <p:sp>
-        <p:nvSpPr>
-          <p:cNvPr id="15" name="Shape 13"/>
-          <p:cNvSpPr/>
-          <p:nvPr/>
-        </p:nvSpPr>
-        <p:spPr>
-          <a:xfrm>
-            <a:off x="8467344" y="2148840"/>
-            <a:ext cx="603504" cy="603504"/>
-          </a:xfrm>
-          <a:prstGeom prst="ellipse">
-            <a:avLst/>
-          </a:prstGeom>
-          <a:solidFill>
-            <a:srgbClr val="124C6E"/>
-          </a:solidFill>
-          <a:ln/>
-        </p:spPr>
-      </p:sp>
-      <p:sp>
-        <p:nvSpPr>
-          <p:cNvPr id="16" name="Text 14"/>
-          <p:cNvSpPr/>
-          <p:nvPr/>
-        </p:nvSpPr>
-        <p:spPr>
-          <a:xfrm>
-            <a:off x="8467344" y="2148840"/>
-            <a:ext cx="603504" cy="603504"/>
-          </a:xfrm>
-          <a:prstGeom prst="rect">
-            <a:avLst/>
-          </a:prstGeom>
-          <a:noFill/>
-          <a:ln/>
-        </p:spPr>
-        <p:txBody>
-          <a:bodyPr wrap="square" lIns="0" tIns="0" rIns="0" bIns="0" rtlCol="0" anchor="ctr"/>
-          <a:lstStyle/>
-          <a:p>
-            <a:pPr algn="ctr" indent="0" marL="0">
-              <a:buNone/>
-            </a:pPr>
-            <a:r>
-              <a:rPr lang="en-US" sz="2200" b="1" dirty="0">
-                <a:solidFill>
-                  <a:srgbClr val="FFFFFF"/>
-                </a:solidFill>
-                <a:latin typeface="Cambria" pitchFamily="34" charset="0"/>
-                <a:ea typeface="Cambria" pitchFamily="34" charset="-122"/>
-                <a:cs typeface="Cambria" pitchFamily="34" charset="-120"/>
-              </a:rPr>
-              <a:t>3</a:t>
-            </a:r>
-            <a:endParaRPr lang="en-US" sz="2200" dirty="0"/>
-          </a:p>
-        </p:txBody>
-      </p:sp>
-      <p:sp>
-        <p:nvSpPr>
-          <p:cNvPr id="17" name="Text 15"/>
-          <p:cNvSpPr/>
-          <p:nvPr/>
-        </p:nvSpPr>
-        <p:spPr>
-          <a:xfrm>
-            <a:off x="8467344" y="2898648"/>
-            <a:ext cx="2953512" cy="777240"/>
-          </a:xfrm>
-          <a:prstGeom prst="rect">
-            <a:avLst/>
-          </a:prstGeom>
-          <a:noFill/>
-          <a:ln/>
-        </p:spPr>
-        <p:txBody>
-          <a:bodyPr wrap="square" lIns="0" tIns="0" rIns="0" bIns="0" rtlCol="0" anchor="ctr"/>
-          <a:lstStyle/>
-          <a:p>
-            <a:pPr indent="0" marL="0">
-              <a:buNone/>
-            </a:pPr>
-            <a:r>
-              <a:rPr lang="en-US" sz="1600" b="1" dirty="0">
-                <a:solidFill>
-                  <a:srgbClr val="112634"/>
-                </a:solidFill>
-                <a:latin typeface="Calibri" pitchFamily="34" charset="0"/>
-                <a:ea typeface="Calibri" pitchFamily="34" charset="-122"/>
-                <a:cs typeface="Calibri" pitchFamily="34" charset="-120"/>
-              </a:rPr>
-              <a:t>Every alert traces to a real rule</a:t>
-            </a:r>
-            <a:endParaRPr lang="en-US" sz="1600" dirty="0"/>
-          </a:p>
-        </p:txBody>
-      </p:sp>
-      <p:sp>
-        <p:nvSpPr>
-          <p:cNvPr id="18" name="Text 16"/>
-          <p:cNvSpPr/>
-          <p:nvPr/>
-        </p:nvSpPr>
-        <p:spPr>
-          <a:xfrm>
-            <a:off x="8467344" y="3657600"/>
-            <a:ext cx="2953512" cy="2011680"/>
-          </a:xfrm>
-          <a:prstGeom prst="rect">
-            <a:avLst/>
-          </a:prstGeom>
-          <a:noFill/>
-          <a:ln/>
-        </p:spPr>
-        <p:txBody>
-          <a:bodyPr wrap="square" lIns="0" tIns="0" rIns="0" bIns="0" rtlCol="0" anchor="ctr"/>
-          <a:lstStyle/>
-          <a:p>
-            <a:pPr indent="0" marL="0">
-              <a:lnSpc>
-                <a:spcPct val="106000"/>
-              </a:lnSpc>
-              <a:buNone/>
-            </a:pPr>
-            <a:r>
-              <a:rPr lang="en-US" sz="1250" dirty="0">
-                <a:solidFill>
-                  <a:srgbClr val="567480"/>
-                </a:solidFill>
-                <a:latin typeface="Calibri" pitchFamily="34" charset="0"/>
-                <a:ea typeface="Calibri" pitchFamily="34" charset="-122"/>
-                <a:cs typeface="Calibri" pitchFamily="34" charset="-120"/>
-              </a:rPr>
               <a:t>Each banner maps to a code-defined threshold — 34 knots, 32,000 kg, -10 C, 90% occupancy — not a demo constant.</a:t>
             </a:r>
-            <a:endParaRPr lang="en-US" sz="1250" dirty="0"/>
+            <a:endParaRPr lang="en-US" sz="1200" dirty="0"/>
           </a:p>
         </p:txBody>
       </p:sp>
@@ -3176,7 +3096,7 @@
     <p:bg>
       <p:bgPr>
         <a:solidFill>
-          <a:srgbClr val="FFFFFF"/>
+          <a:srgbClr val="14384D"/>
         </a:solidFill>
       </p:bgPr>
     </p:bg>
@@ -3196,65 +3116,21 @@
       </p:grpSpPr>
       <p:sp>
         <p:nvSpPr>
-          <p:cNvPr id="2" name="Text 0"/>
-          <p:cNvSpPr/>
-          <p:nvPr/>
-        </p:nvSpPr>
-        <p:spPr>
-          <a:xfrm>
-            <a:off x="640080" y="502920"/>
-            <a:ext cx="10972800" cy="822960"/>
-          </a:xfrm>
-          <a:prstGeom prst="rect">
-            <a:avLst/>
-          </a:prstGeom>
-          <a:noFill/>
-          <a:ln/>
-        </p:spPr>
-        <p:txBody>
-          <a:bodyPr wrap="square" rtlCol="0" anchor="t"/>
-          <a:lstStyle/>
-          <a:p>
-            <a:pPr indent="0" marL="0">
-              <a:buNone/>
-            </a:pPr>
-            <a:r>
-              <a:rPr lang="en-US" sz="2800" b="1" dirty="0">
-                <a:solidFill>
-                  <a:srgbClr val="112634"/>
-                </a:solidFill>
-                <a:latin typeface="Cambria" pitchFamily="34" charset="0"/>
-                <a:ea typeface="Cambria" pitchFamily="34" charset="-122"/>
-                <a:cs typeface="Cambria" pitchFamily="34" charset="-120"/>
-              </a:rPr>
-              <a:t>Hardest Part — a numbered-ticket window boundary</a:t>
-            </a:r>
-            <a:endParaRPr lang="en-US" sz="2800" dirty="0"/>
-          </a:p>
-        </p:txBody>
-      </p:sp>
-      <p:sp>
-        <p:nvSpPr>
-          <p:cNvPr id="3" name="Shape 1"/>
-          <p:cNvSpPr/>
-          <p:nvPr/>
-        </p:nvSpPr>
-        <p:spPr>
-          <a:xfrm>
-            <a:off x="640080" y="1874520"/>
-            <a:ext cx="4937760" cy="4160520"/>
-          </a:xfrm>
-          <a:prstGeom prst="roundRect">
-            <a:avLst>
-              <a:gd name="adj" fmla="val 2198"/>
-            </a:avLst>
-          </a:prstGeom>
-          <a:solidFill>
-            <a:srgbClr val="EDF4F8"/>
-          </a:solidFill>
+          <p:cNvPr id="2" name="Shape 0"/>
+          <p:cNvSpPr/>
+          <p:nvPr/>
+        </p:nvSpPr>
+        <p:spPr>
+          <a:xfrm>
+            <a:off x="411480" y="411480"/>
+            <a:ext cx="11368735" cy="6035040"/>
+          </a:xfrm>
+          <a:prstGeom prst="rect">
+            <a:avLst/>
+          </a:prstGeom>
           <a:ln w="19050">
             <a:solidFill>
-              <a:srgbClr val="E4A63C"/>
+              <a:srgbClr val="C13B15"/>
             </a:solidFill>
             <a:prstDash val="solid"/>
           </a:ln>
@@ -3262,14 +3138,53 @@
       </p:sp>
       <p:sp>
         <p:nvSpPr>
+          <p:cNvPr id="3" name="Text 1"/>
+          <p:cNvSpPr/>
+          <p:nvPr/>
+        </p:nvSpPr>
+        <p:spPr>
+          <a:xfrm>
+            <a:off x="960120" y="868680"/>
+            <a:ext cx="914400" cy="640080"/>
+          </a:xfrm>
+          <a:prstGeom prst="rect">
+            <a:avLst/>
+          </a:prstGeom>
+          <a:noFill/>
+          <a:ln/>
+        </p:spPr>
+        <p:txBody>
+          <a:bodyPr wrap="square" lIns="0" tIns="0" rIns="0" bIns="0" rtlCol="0" anchor="ctr"/>
+          <a:lstStyle/>
+          <a:p>
+            <a:pPr indent="0" marL="0">
+              <a:buNone/>
+            </a:pPr>
+            <a:r>
+              <a:rPr lang="en-US" sz="3000" b="1" dirty="0">
+                <a:solidFill>
+                  <a:srgbClr val="C13B15"/>
+                </a:solidFill>
+                <a:latin typeface="Times New Roman" pitchFamily="34" charset="0"/>
+                <a:ea typeface="Times New Roman" pitchFamily="34" charset="-122"/>
+                <a:cs typeface="Times New Roman" pitchFamily="34" charset="-120"/>
+              </a:rPr>
+              <a:t>03</a:t>
+            </a:r>
+            <a:endParaRPr lang="en-US" sz="3000" dirty="0"/>
+          </a:p>
+        </p:txBody>
+      </p:sp>
+      <p:sp>
+        <p:nvSpPr>
           <p:cNvPr id="4" name="Text 2"/>
           <p:cNvSpPr/>
           <p:nvPr/>
         </p:nvSpPr>
         <p:spPr>
           <a:xfrm>
-            <a:off x="960120" y="2103120"/>
-            <a:ext cx="3657600" cy="457200"/>
+            <a:off x="1828800" y="1042416"/>
+            <a:ext cx="9402775" cy="274320"/>
           </a:xfrm>
           <a:prstGeom prst="rect">
             <a:avLst/>
@@ -3285,59 +3200,56 @@
               <a:buNone/>
             </a:pPr>
             <a:r>
-              <a:rPr lang="en-US" sz="1900" b="1" dirty="0">
-                <a:solidFill>
-                  <a:srgbClr val="E4A63C"/>
-                </a:solidFill>
-                <a:latin typeface="Cambria" pitchFamily="34" charset="0"/>
-                <a:ea typeface="Cambria" pitchFamily="34" charset="-122"/>
-                <a:cs typeface="Cambria" pitchFamily="34" charset="-120"/>
-              </a:rPr>
-              <a:t>Problem</a:t>
-            </a:r>
-            <a:endParaRPr lang="en-US" sz="1900" dirty="0"/>
-          </a:p>
-        </p:txBody>
-      </p:sp>
-      <p:sp>
-        <p:nvSpPr>
-          <p:cNvPr id="5" name="Text 3"/>
-          <p:cNvSpPr/>
-          <p:nvPr/>
-        </p:nvSpPr>
-        <p:spPr>
-          <a:xfrm>
-            <a:off x="960120" y="2651760"/>
-            <a:ext cx="4343400" cy="3200400"/>
-          </a:xfrm>
-          <a:prstGeom prst="rect">
-            <a:avLst/>
-          </a:prstGeom>
-          <a:noFill/>
-          <a:ln/>
-        </p:spPr>
-        <p:txBody>
-          <a:bodyPr wrap="square" lIns="0" tIns="0" rIns="0" bIns="0" rtlCol="0" anchor="ctr"/>
-          <a:lstStyle/>
-          <a:p>
-            <a:pPr indent="0" marL="0">
-              <a:lnSpc>
-                <a:spcPct val="112000"/>
-              </a:lnSpc>
-              <a:buNone/>
-            </a:pPr>
-            <a:r>
-              <a:rPr lang="en-US" sz="1350" dirty="0">
-                <a:solidFill>
-                  <a:srgbClr val="112634"/>
+              <a:rPr lang="en-US" sz="1100" b="1" spc="200" kern="0" dirty="0">
+                <a:solidFill>
+                  <a:srgbClr val="8B98A6"/>
                 </a:solidFill>
                 <a:latin typeface="Calibri" pitchFamily="34" charset="0"/>
                 <a:ea typeface="Calibri" pitchFamily="34" charset="-122"/>
                 <a:cs typeface="Calibri" pitchFamily="34" charset="-120"/>
               </a:rPr>
-              <a:t>Every ten seconds the fog node must close the current window and publish aggregates, while ten sensors keep posting new readings into the very same buffer. Lock the buffer and ingest stalls on every flush; clear it naively and any reading that lands mid-drain is lost, or counted twice in the next window.</a:t>
-            </a:r>
-            <a:endParaRPr lang="en-US" sz="1350" dirty="0"/>
+              <a:t>CHALLENGE</a:t>
+            </a:r>
+            <a:endParaRPr lang="en-US" sz="1100" dirty="0"/>
+          </a:p>
+        </p:txBody>
+      </p:sp>
+      <p:sp>
+        <p:nvSpPr>
+          <p:cNvPr id="5" name="Text 3"/>
+          <p:cNvSpPr/>
+          <p:nvPr/>
+        </p:nvSpPr>
+        <p:spPr>
+          <a:xfrm>
+            <a:off x="960120" y="1517904"/>
+            <a:ext cx="10271455" cy="640080"/>
+          </a:xfrm>
+          <a:prstGeom prst="rect">
+            <a:avLst/>
+          </a:prstGeom>
+          <a:noFill/>
+          <a:ln/>
+        </p:spPr>
+        <p:txBody>
+          <a:bodyPr wrap="square" lIns="0" tIns="0" rIns="0" bIns="0" rtlCol="0" anchor="ctr"/>
+          <a:lstStyle/>
+          <a:p>
+            <a:pPr indent="0" marL="0">
+              <a:buNone/>
+            </a:pPr>
+            <a:r>
+              <a:rPr lang="en-US" sz="2300" b="1" dirty="0">
+                <a:solidFill>
+                  <a:srgbClr val="EEF4F8"/>
+                </a:solidFill>
+                <a:latin typeface="Times New Roman" pitchFamily="34" charset="0"/>
+                <a:ea typeface="Times New Roman" pitchFamily="34" charset="-122"/>
+                <a:cs typeface="Times New Roman" pitchFamily="34" charset="-120"/>
+              </a:rPr>
+              <a:t>only alarm what has a rule</a:t>
+            </a:r>
+            <a:endParaRPr lang="en-US" sz="2300" dirty="0"/>
           </a:p>
         </p:txBody>
       </p:sp>
@@ -3349,20 +3261,18 @@
         </p:nvSpPr>
         <p:spPr>
           <a:xfrm>
-            <a:off x="6611112" y="1874520"/>
-            <a:ext cx="4937760" cy="4160520"/>
+            <a:off x="960120" y="2560320"/>
+            <a:ext cx="4907128" cy="3291840"/>
           </a:xfrm>
           <a:prstGeom prst="roundRect">
-            <a:avLst>
-              <a:gd name="adj" fmla="val 2198"/>
-            </a:avLst>
+            <a:avLst/>
           </a:prstGeom>
           <a:solidFill>
-            <a:srgbClr val="EDF4F8"/>
+            <a:srgbClr val="1C4E6B"/>
           </a:solidFill>
-          <a:ln w="19050">
+          <a:ln w="12700">
             <a:solidFill>
-              <a:srgbClr val="1E739A"/>
+              <a:srgbClr val="30627F"/>
             </a:solidFill>
             <a:prstDash val="solid"/>
           </a:ln>
@@ -3376,8 +3286,8 @@
         </p:nvSpPr>
         <p:spPr>
           <a:xfrm>
-            <a:off x="6931152" y="2103120"/>
-            <a:ext cx="3657600" cy="457200"/>
+            <a:off x="1280160" y="2834640"/>
+            <a:ext cx="4267048" cy="320040"/>
           </a:xfrm>
           <a:prstGeom prst="rect">
             <a:avLst/>
@@ -3393,57 +3303,80 @@
               <a:buNone/>
             </a:pPr>
             <a:r>
-              <a:rPr lang="en-US" sz="1900" b="1" dirty="0">
-                <a:solidFill>
-                  <a:srgbClr val="1E739A"/>
-                </a:solidFill>
-                <a:latin typeface="Cambria" pitchFamily="34" charset="0"/>
-                <a:ea typeface="Cambria" pitchFamily="34" charset="-122"/>
-                <a:cs typeface="Cambria" pitchFamily="34" charset="-120"/>
-              </a:rPr>
-              <a:t>Solution</a:t>
-            </a:r>
-            <a:endParaRPr lang="en-US" sz="1900" dirty="0"/>
-          </a:p>
-        </p:txBody>
-      </p:sp>
-      <p:sp>
-        <p:nvSpPr>
-          <p:cNvPr id="8" name="Text 6"/>
-          <p:cNvSpPr/>
-          <p:nvPr/>
-        </p:nvSpPr>
-        <p:spPr>
-          <a:xfrm>
-            <a:off x="6931152" y="2651760"/>
-            <a:ext cx="4343400" cy="3200400"/>
-          </a:xfrm>
-          <a:prstGeom prst="rect">
-            <a:avLst/>
-          </a:prstGeom>
-          <a:noFill/>
-          <a:ln/>
-        </p:spPr>
-        <p:txBody>
-          <a:bodyPr wrap="square" lIns="0" tIns="0" rIns="0" bIns="0" rtlCol="0" anchor="ctr"/>
-          <a:lstStyle/>
-          <a:p>
-            <a:pPr indent="0" marL="0">
-              <a:lnSpc>
-                <a:spcPct val="112000"/>
-              </a:lnSpc>
-              <a:buNone/>
-            </a:pPr>
-            <a:r>
-              <a:rPr lang="en-US" sz="1350" dirty="0">
-                <a:solidFill>
-                  <a:srgbClr val="112634"/>
+              <a:rPr lang="en-US" sz="1200" b="1" spc="200" kern="0" dirty="0">
+                <a:solidFill>
+                  <a:srgbClr val="D1584E"/>
                 </a:solidFill>
                 <a:latin typeface="Calibri" pitchFamily="34" charset="0"/>
                 <a:ea typeface="Calibri" pitchFamily="34" charset="-122"/>
                 <a:cs typeface="Calibri" pitchFamily="34" charset="-120"/>
               </a:rPr>
-              <a:t>Every reading takes a numbered ticket on arrival. A flush snapshots the latest number as a boundary, then aggregates and removes only readings below it. Later arrivals roll into the next window — no locks, nothing lost, nothing counted twice. Backed by the fog module's 48 automated tests, including ingest exercised over a real HTTP server.</a:t>
+              <a:t>PROBLEM</a:t>
+            </a:r>
+            <a:endParaRPr lang="en-US" sz="1200" dirty="0"/>
+          </a:p>
+        </p:txBody>
+      </p:sp>
+      <p:sp>
+        <p:nvSpPr>
+          <p:cNvPr id="8" name="Shape 6"/>
+          <p:cNvSpPr/>
+          <p:nvPr/>
+        </p:nvSpPr>
+        <p:spPr>
+          <a:xfrm>
+            <a:off x="1280160" y="3218688"/>
+            <a:ext cx="4267048" cy="0"/>
+          </a:xfrm>
+          <a:prstGeom prst="line">
+            <a:avLst/>
+          </a:prstGeom>
+          <a:noFill/>
+          <a:ln w="19050">
+            <a:solidFill>
+              <a:srgbClr val="D1584E"/>
+            </a:solidFill>
+            <a:prstDash val="solid"/>
+          </a:ln>
+        </p:spPr>
+      </p:sp>
+      <p:sp>
+        <p:nvSpPr>
+          <p:cNvPr id="9" name="Text 7"/>
+          <p:cNvSpPr/>
+          <p:nvPr/>
+        </p:nvSpPr>
+        <p:spPr>
+          <a:xfrm>
+            <a:off x="1280160" y="3383280"/>
+            <a:ext cx="4267048" cy="2286000"/>
+          </a:xfrm>
+          <a:prstGeom prst="rect">
+            <a:avLst/>
+          </a:prstGeom>
+          <a:noFill/>
+          <a:ln/>
+        </p:spPr>
+        <p:txBody>
+          <a:bodyPr wrap="square" lIns="0" tIns="0" rIns="0" bIns="0" rtlCol="0" anchor="t"/>
+          <a:lstStyle/>
+          <a:p>
+            <a:pPr indent="0" marL="0">
+              <a:lnSpc>
+                <a:spcPct val="128000"/>
+              </a:lnSpc>
+              <a:buNone/>
+            </a:pPr>
+            <a:r>
+              <a:rPr lang="en-US" sz="1350" dirty="0">
+                <a:solidFill>
+                  <a:srgbClr val="EEF4F8"/>
+                </a:solidFill>
+                <a:latin typeface="Calibri" pitchFamily="34" charset="0"/>
+                <a:ea typeface="Calibri" pitchFamily="34" charset="-122"/>
+                <a:cs typeface="Calibri" pitchFamily="34" charset="-120"/>
+              </a:rPr>
+              <a:t>A container terminal streams signals of two kinds: some carry a real safety rule — crane overload, reefer temperature, high-wind crane halt — and some, like container stack height, are useful context but should never raise an alarm. If the dashboard advertised a threshold for every signal, the operator's alarm list would fill with numbers that can never actually fire.</a:t>
             </a:r>
             <a:endParaRPr lang="en-US" sz="1350" dirty="0"/>
           </a:p>
@@ -3451,23 +3384,132 @@
       </p:sp>
       <p:sp>
         <p:nvSpPr>
-          <p:cNvPr id="9" name="Shape 7"/>
-          <p:cNvSpPr/>
-          <p:nvPr/>
-        </p:nvSpPr>
-        <p:spPr>
-          <a:xfrm>
-            <a:off x="5669280" y="3703320"/>
-            <a:ext cx="841248" cy="512064"/>
-          </a:xfrm>
-          <a:prstGeom prst="rightArrow">
+          <p:cNvPr id="10" name="Shape 8"/>
+          <p:cNvSpPr/>
+          <p:nvPr/>
+        </p:nvSpPr>
+        <p:spPr>
+          <a:xfrm>
+            <a:off x="6324448" y="2560320"/>
+            <a:ext cx="4907128" cy="3291840"/>
+          </a:xfrm>
+          <a:prstGeom prst="roundRect">
             <a:avLst/>
           </a:prstGeom>
           <a:solidFill>
-            <a:srgbClr val="124C6E"/>
+            <a:srgbClr val="1C4E6B"/>
           </a:solidFill>
-          <a:ln/>
-        </p:spPr>
+          <a:ln w="12700">
+            <a:solidFill>
+              <a:srgbClr val="30627F"/>
+            </a:solidFill>
+            <a:prstDash val="solid"/>
+          </a:ln>
+        </p:spPr>
+      </p:sp>
+      <p:sp>
+        <p:nvSpPr>
+          <p:cNvPr id="11" name="Text 9"/>
+          <p:cNvSpPr/>
+          <p:nvPr/>
+        </p:nvSpPr>
+        <p:spPr>
+          <a:xfrm>
+            <a:off x="6644488" y="2834640"/>
+            <a:ext cx="4267048" cy="320040"/>
+          </a:xfrm>
+          <a:prstGeom prst="rect">
+            <a:avLst/>
+          </a:prstGeom>
+          <a:noFill/>
+          <a:ln/>
+        </p:spPr>
+        <p:txBody>
+          <a:bodyPr wrap="square" lIns="0" tIns="0" rIns="0" bIns="0" rtlCol="0" anchor="ctr"/>
+          <a:lstStyle/>
+          <a:p>
+            <a:pPr indent="0" marL="0">
+              <a:buNone/>
+            </a:pPr>
+            <a:r>
+              <a:rPr lang="en-US" sz="1200" b="1" spc="200" kern="0" dirty="0">
+                <a:solidFill>
+                  <a:srgbClr val="3FAE6A"/>
+                </a:solidFill>
+                <a:latin typeface="Calibri" pitchFamily="34" charset="0"/>
+                <a:ea typeface="Calibri" pitchFamily="34" charset="-122"/>
+                <a:cs typeface="Calibri" pitchFamily="34" charset="-120"/>
+              </a:rPr>
+              <a:t>SOLUTION</a:t>
+            </a:r>
+            <a:endParaRPr lang="en-US" sz="1200" dirty="0"/>
+          </a:p>
+        </p:txBody>
+      </p:sp>
+      <p:sp>
+        <p:nvSpPr>
+          <p:cNvPr id="12" name="Shape 10"/>
+          <p:cNvSpPr/>
+          <p:nvPr/>
+        </p:nvSpPr>
+        <p:spPr>
+          <a:xfrm>
+            <a:off x="6644488" y="3218688"/>
+            <a:ext cx="4267048" cy="0"/>
+          </a:xfrm>
+          <a:prstGeom prst="line">
+            <a:avLst/>
+          </a:prstGeom>
+          <a:noFill/>
+          <a:ln w="19050">
+            <a:solidFill>
+              <a:srgbClr val="3FAE6A"/>
+            </a:solidFill>
+            <a:prstDash val="solid"/>
+          </a:ln>
+        </p:spPr>
+      </p:sp>
+      <p:sp>
+        <p:nvSpPr>
+          <p:cNvPr id="13" name="Text 11"/>
+          <p:cNvSpPr/>
+          <p:nvPr/>
+        </p:nvSpPr>
+        <p:spPr>
+          <a:xfrm>
+            <a:off x="6644488" y="3383280"/>
+            <a:ext cx="4267048" cy="2286000"/>
+          </a:xfrm>
+          <a:prstGeom prst="rect">
+            <a:avLst/>
+          </a:prstGeom>
+          <a:noFill/>
+          <a:ln/>
+        </p:spPr>
+        <p:txBody>
+          <a:bodyPr wrap="square" lIns="0" tIns="0" rIns="0" bIns="0" rtlCol="0" anchor="t"/>
+          <a:lstStyle/>
+          <a:p>
+            <a:pPr indent="0" marL="0">
+              <a:lnSpc>
+                <a:spcPct val="128000"/>
+              </a:lnSpc>
+              <a:buNone/>
+            </a:pPr>
+            <a:r>
+              <a:rPr lang="en-US" sz="1350" dirty="0">
+                <a:solidFill>
+                  <a:srgbClr val="EEF4F8"/>
+                </a:solidFill>
+                <a:latin typeface="Calibri" pitchFamily="34" charset="0"/>
+                <a:ea typeface="Calibri" pitchFamily="34" charset="-122"/>
+                <a:cs typeface="Calibri" pitchFamily="34" charset="-120"/>
+              </a:rPr>
+              <a:t>The fog gateway's published thresholds expose only the signals that carry an active rule; context-only signals are still aggregated and trended but are deliberately omitted from the threshold list. The tests assert that stack height never appears among the rules, so what the operator sees as monitored for breach is exactly what the edge will actually alarm on.</a:t>
+            </a:r>
+            <a:endParaRPr lang="en-US" sz="1350" dirty="0"/>
+          </a:p>
+        </p:txBody>
       </p:sp>
     </p:spTree>
   </p:cSld>
